--- a/output/wordlabs-count-3day.pptx
+++ b/output/wordlabs-count-3day.pptx
@@ -4240,7 +4240,7 @@
                 <a:ea typeface="Calibri" pitchFamily="34" charset="-122"/>
                 <a:cs typeface="Calibri" pitchFamily="34" charset="-120"/>
               </a:rPr>
-              <a:t>"to number or reckon"</a:t>
+              <a:t>"to number or calculate"</a:t>
             </a:r>
             <a:endParaRPr lang="en-US" sz="2200" dirty="0"/>
           </a:p>
@@ -5288,7 +5288,7 @@
                 <a:ea typeface="Calibri" pitchFamily="34" charset="-122"/>
                 <a:cs typeface="Calibri" pitchFamily="34" charset="-120"/>
               </a:rPr>
-              <a:t>Word Labs  •  wordlabs.app  •  Root: 'count' = to number or reckon</a:t>
+              <a:t>Word Labs  •  wordlabs.app  •  Root: 'count' = to number or calculate</a:t>
             </a:r>
             <a:endParaRPr lang="en-US" sz="800" dirty="0"/>
           </a:p>
@@ -5622,7 +5622,7 @@
                 <a:ea typeface="Trebuchet MS" pitchFamily="34" charset="-122"/>
                 <a:cs typeface="Trebuchet MS" pitchFamily="34" charset="-120"/>
               </a:rPr>
-              <a:t>1</a:t>
+              <a:t>0</a:t>
             </a:r>
             <a:pPr algn="ctr" indent="0" marL="0">
               <a:buNone/>
@@ -5928,7 +5928,7 @@
                 <a:ea typeface="Calibri" pitchFamily="34" charset="-122"/>
                 <a:cs typeface="Calibri" pitchFamily="34" charset="-120"/>
               </a:rPr>
-              <a:t>Word Labs  •  wordlabs.app  •  Root: 'count' = to number or reckon</a:t>
+              <a:t>Word Labs  •  wordlabs.app  •  Root: 'count' = to number or calculate</a:t>
             </a:r>
             <a:endParaRPr lang="en-US" sz="800" dirty="0"/>
           </a:p>
@@ -6040,7 +6040,7 @@
                 <a:ea typeface="Calibri" pitchFamily="34" charset="-122"/>
                 <a:cs typeface="Calibri" pitchFamily="34" charset="-120"/>
               </a:rPr>
-              <a:t>She did a careful </a:t>
+              <a:t>The </a:t>
             </a:r>
             <a:pPr algn="l" indent="0" marL="0">
               <a:buNone/>
@@ -6057,7 +6057,7 @@
                 <a:ea typeface="Calibri" pitchFamily="34" charset="-122"/>
                 <a:cs typeface="Calibri" pitchFamily="34" charset="-120"/>
               </a:rPr>
-              <a:t>recount</a:t>
+              <a:t>accountant</a:t>
             </a:r>
             <a:pPr algn="l" indent="0" marL="0">
               <a:buNone/>
@@ -6071,7 +6071,7 @@
                 <a:ea typeface="Calibri" pitchFamily="34" charset="-122"/>
                 <a:cs typeface="Calibri" pitchFamily="34" charset="-120"/>
               </a:rPr>
-              <a:t> of the votes, but the </a:t>
+              <a:t> explained that the </a:t>
             </a:r>
             <a:pPr algn="l" indent="0" marL="0">
               <a:buNone/>
@@ -6088,7 +6088,7 @@
                 <a:ea typeface="Calibri" pitchFamily="34" charset="-122"/>
                 <a:cs typeface="Calibri" pitchFamily="34" charset="-120"/>
               </a:rPr>
-              <a:t>countless</a:t>
+              <a:t>discount</a:t>
             </a:r>
             <a:pPr algn="l" indent="0" marL="0">
               <a:buNone/>
@@ -6102,7 +6102,7 @@
                 <a:ea typeface="Calibri" pitchFamily="34" charset="-122"/>
                 <a:cs typeface="Calibri" pitchFamily="34" charset="-120"/>
               </a:rPr>
-              <a:t> errors made it very difficult.</a:t>
+              <a:t> made the shoes much more affordable.</a:t>
             </a:r>
             <a:endParaRPr lang="en-US" sz="1800" dirty="0"/>
           </a:p>
@@ -6257,7 +6257,7 @@
                 <a:ea typeface="Trebuchet MS" pitchFamily="34" charset="-122"/>
                 <a:cs typeface="Trebuchet MS" pitchFamily="34" charset="-120"/>
               </a:rPr>
-              <a:t>recount</a:t>
+              <a:t>accountant</a:t>
             </a:r>
             <a:endParaRPr lang="en-US" sz="1400" dirty="0"/>
           </a:p>
@@ -6385,7 +6385,7 @@
                 <a:ea typeface="Trebuchet MS" pitchFamily="34" charset="-122"/>
                 <a:cs typeface="Trebuchet MS" pitchFamily="34" charset="-120"/>
               </a:rPr>
-              <a:t>countless</a:t>
+              <a:t>discount</a:t>
             </a:r>
             <a:endParaRPr lang="en-US" sz="1400" dirty="0"/>
           </a:p>
@@ -6716,7 +6716,7 @@
                 <a:ea typeface="Calibri" pitchFamily="34" charset="-122"/>
                 <a:cs typeface="Calibri" pitchFamily="34" charset="-120"/>
               </a:rPr>
-              <a:t>Word Labs  •  wordlabs.app  •  Root: 'count' = to number or reckon</a:t>
+              <a:t>Word Labs  •  wordlabs.app  •  Root: 'count' = to number or calculate</a:t>
             </a:r>
             <a:endParaRPr lang="en-US" sz="800" dirty="0"/>
           </a:p>
@@ -6855,7 +6855,7 @@
                 <a:ea typeface="Trebuchet MS" pitchFamily="34" charset="-122"/>
                 <a:cs typeface="Trebuchet MS" pitchFamily="34" charset="-120"/>
               </a:rPr>
-              <a:t>recount</a:t>
+              <a:t>accountant</a:t>
             </a:r>
             <a:endParaRPr lang="en-US" sz="2800" dirty="0"/>
           </a:p>
@@ -7543,7 +7543,7 @@
                 <a:ea typeface="Calibri" pitchFamily="34" charset="-122"/>
                 <a:cs typeface="Calibri" pitchFamily="34" charset="-120"/>
               </a:rPr>
-              <a:t>Word Labs  •  wordlabs.app  •  Root: 'count' = to number or reckon</a:t>
+              <a:t>Word Labs  •  wordlabs.app  •  Root: 'count' = to number or calculate</a:t>
             </a:r>
             <a:endParaRPr lang="en-US" sz="800" dirty="0"/>
           </a:p>
@@ -7682,7 +7682,7 @@
                 <a:ea typeface="Trebuchet MS" pitchFamily="34" charset="-122"/>
                 <a:cs typeface="Trebuchet MS" pitchFamily="34" charset="-120"/>
               </a:rPr>
-              <a:t>recount</a:t>
+              <a:t>accountant</a:t>
             </a:r>
             <a:endParaRPr lang="en-US" sz="2800" dirty="0"/>
           </a:p>
@@ -7762,7 +7762,7 @@
         </p:nvSpPr>
         <p:spPr>
           <a:xfrm>
-            <a:off x="2938272" y="2258568"/>
+            <a:off x="2221992" y="2258568"/>
             <a:ext cx="1828800" cy="292608"/>
           </a:xfrm>
           <a:prstGeom prst="rect">
@@ -7796,7 +7796,7 @@
         </p:nvSpPr>
         <p:spPr>
           <a:xfrm>
-            <a:off x="2938272" y="2258568"/>
+            <a:off x="2221992" y="2258568"/>
             <a:ext cx="1828800" cy="292608"/>
           </a:xfrm>
           <a:prstGeom prst="rect">
@@ -7821,7 +7821,7 @@
                 <a:ea typeface="Trebuchet MS" pitchFamily="34" charset="-122"/>
                 <a:cs typeface="Trebuchet MS" pitchFamily="34" charset="-120"/>
               </a:rPr>
-              <a:t>re</a:t>
+              <a:t>ac</a:t>
             </a:r>
             <a:endParaRPr lang="en-US" sz="1300" dirty="0"/>
           </a:p>
@@ -7835,7 +7835,7 @@
         </p:nvSpPr>
         <p:spPr>
           <a:xfrm>
-            <a:off x="2938272" y="2569464"/>
+            <a:off x="2221992" y="2569464"/>
             <a:ext cx="1828800" cy="201168"/>
           </a:xfrm>
           <a:prstGeom prst="rect">
@@ -7860,7 +7860,7 @@
                 <a:ea typeface="Calibri" pitchFamily="34" charset="-122"/>
                 <a:cs typeface="Calibri" pitchFamily="34" charset="-120"/>
               </a:rPr>
-              <a:t>again</a:t>
+              <a:t>to, towards</a:t>
             </a:r>
             <a:endParaRPr lang="en-US" sz="850" dirty="0"/>
           </a:p>
@@ -7868,13 +7868,52 @@
       </p:sp>
       <p:sp>
         <p:nvSpPr>
-          <p:cNvPr id="19" name="Shape 17"/>
-          <p:cNvSpPr/>
-          <p:nvPr/>
-        </p:nvSpPr>
-        <p:spPr>
-          <a:xfrm>
-            <a:off x="5803392" y="2258568"/>
+          <p:cNvPr id="19" name="Text 17"/>
+          <p:cNvSpPr/>
+          <p:nvPr/>
+        </p:nvSpPr>
+        <p:spPr>
+          <a:xfrm>
+            <a:off x="2221992" y="2752344"/>
+            <a:ext cx="1828800" cy="182880"/>
+          </a:xfrm>
+          <a:prstGeom prst="rect">
+            <a:avLst/>
+          </a:prstGeom>
+          <a:noFill/>
+          <a:ln/>
+        </p:spPr>
+        <p:txBody>
+          <a:bodyPr wrap="square" lIns="0" tIns="0" rIns="0" bIns="0" rtlCol="0" anchor="t"/>
+          <a:lstStyle/>
+          <a:p>
+            <a:pPr algn="ctr" indent="0" marL="0">
+              <a:buNone/>
+            </a:pPr>
+            <a:r>
+              <a:rPr lang="en-US" sz="700" i="1" dirty="0">
+                <a:solidFill>
+                  <a:srgbClr val="94A3B8"/>
+                </a:solidFill>
+                <a:latin typeface="Calibri" pitchFamily="34" charset="0"/>
+                <a:ea typeface="Calibri" pitchFamily="34" charset="-122"/>
+                <a:cs typeface="Calibri" pitchFamily="34" charset="-120"/>
+              </a:rPr>
+              <a:t>ad → ac before 'c'</a:t>
+            </a:r>
+            <a:endParaRPr lang="en-US" sz="700" dirty="0"/>
+          </a:p>
+        </p:txBody>
+      </p:sp>
+      <p:sp>
+        <p:nvSpPr>
+          <p:cNvPr id="20" name="Shape 18"/>
+          <p:cNvSpPr/>
+          <p:nvPr/>
+        </p:nvSpPr>
+        <p:spPr>
+          <a:xfrm>
+            <a:off x="4370832" y="2258568"/>
             <a:ext cx="1828800" cy="292608"/>
           </a:xfrm>
           <a:prstGeom prst="rect">
@@ -7902,13 +7941,13 @@
       </p:sp>
       <p:sp>
         <p:nvSpPr>
-          <p:cNvPr id="20" name="Text 18"/>
-          <p:cNvSpPr/>
-          <p:nvPr/>
-        </p:nvSpPr>
-        <p:spPr>
-          <a:xfrm>
-            <a:off x="5803392" y="2258568"/>
+          <p:cNvPr id="21" name="Text 19"/>
+          <p:cNvSpPr/>
+          <p:nvPr/>
+        </p:nvSpPr>
+        <p:spPr>
+          <a:xfrm>
+            <a:off x="4370832" y="2258568"/>
             <a:ext cx="1828800" cy="292608"/>
           </a:xfrm>
           <a:prstGeom prst="rect">
@@ -7941,13 +7980,13 @@
       </p:sp>
       <p:sp>
         <p:nvSpPr>
-          <p:cNvPr id="21" name="Text 19"/>
-          <p:cNvSpPr/>
-          <p:nvPr/>
-        </p:nvSpPr>
-        <p:spPr>
-          <a:xfrm>
-            <a:off x="5803392" y="2569464"/>
+          <p:cNvPr id="22" name="Text 20"/>
+          <p:cNvSpPr/>
+          <p:nvPr/>
+        </p:nvSpPr>
+        <p:spPr>
+          <a:xfrm>
+            <a:off x="4370832" y="2569464"/>
             <a:ext cx="1828800" cy="201168"/>
           </a:xfrm>
           <a:prstGeom prst="rect">
@@ -7972,7 +8011,7 @@
                 <a:ea typeface="Calibri" pitchFamily="34" charset="-122"/>
                 <a:cs typeface="Calibri" pitchFamily="34" charset="-120"/>
               </a:rPr>
-              <a:t>to number or reckon</a:t>
+              <a:t>to number or calculate</a:t>
             </a:r>
             <a:endParaRPr lang="en-US" sz="850" dirty="0"/>
           </a:p>
@@ -7980,7 +8019,119 @@
       </p:sp>
       <p:sp>
         <p:nvSpPr>
-          <p:cNvPr id="22" name="Shape 20"/>
+          <p:cNvPr id="23" name="Shape 21"/>
+          <p:cNvSpPr/>
+          <p:nvPr/>
+        </p:nvSpPr>
+        <p:spPr>
+          <a:xfrm>
+            <a:off x="6519672" y="2258568"/>
+            <a:ext cx="1828800" cy="292608"/>
+          </a:xfrm>
+          <a:prstGeom prst="rect">
+            <a:avLst>
+              <a:gd name="adj" fmla="val 25000"/>
+            </a:avLst>
+          </a:prstGeom>
+          <a:solidFill>
+            <a:srgbClr val="FCE7F3"/>
+          </a:solidFill>
+          <a:ln w="19050">
+            <a:solidFill>
+              <a:srgbClr val="DB2777"/>
+            </a:solidFill>
+            <a:prstDash val="solid"/>
+          </a:ln>
+          <a:effectLst>
+            <a:outerShdw sx="100000" sy="100000" kx="0" ky="0" algn="bl" rotWithShape="0" blurRad="101600" dist="38100" dir="8100000">
+              <a:srgbClr val="000000">
+                <a:alpha val="12000"/>
+              </a:srgbClr>
+            </a:outerShdw>
+          </a:effectLst>
+        </p:spPr>
+      </p:sp>
+      <p:sp>
+        <p:nvSpPr>
+          <p:cNvPr id="24" name="Text 22"/>
+          <p:cNvSpPr/>
+          <p:nvPr/>
+        </p:nvSpPr>
+        <p:spPr>
+          <a:xfrm>
+            <a:off x="6519672" y="2258568"/>
+            <a:ext cx="1828800" cy="292608"/>
+          </a:xfrm>
+          <a:prstGeom prst="rect">
+            <a:avLst/>
+          </a:prstGeom>
+          <a:noFill/>
+          <a:ln/>
+        </p:spPr>
+        <p:txBody>
+          <a:bodyPr wrap="square" lIns="0" tIns="0" rIns="0" bIns="0" rtlCol="0" anchor="ctr"/>
+          <a:lstStyle/>
+          <a:p>
+            <a:pPr algn="ctr" indent="0" marL="0">
+              <a:buNone/>
+            </a:pPr>
+            <a:r>
+              <a:rPr lang="en-US" sz="1300" b="1" dirty="0">
+                <a:solidFill>
+                  <a:srgbClr val="9D174D"/>
+                </a:solidFill>
+                <a:latin typeface="Trebuchet MS" pitchFamily="34" charset="0"/>
+                <a:ea typeface="Trebuchet MS" pitchFamily="34" charset="-122"/>
+                <a:cs typeface="Trebuchet MS" pitchFamily="34" charset="-120"/>
+              </a:rPr>
+              <a:t>ant</a:t>
+            </a:r>
+            <a:endParaRPr lang="en-US" sz="1300" dirty="0"/>
+          </a:p>
+        </p:txBody>
+      </p:sp>
+      <p:sp>
+        <p:nvSpPr>
+          <p:cNvPr id="25" name="Text 23"/>
+          <p:cNvSpPr/>
+          <p:nvPr/>
+        </p:nvSpPr>
+        <p:spPr>
+          <a:xfrm>
+            <a:off x="6519672" y="2569464"/>
+            <a:ext cx="1828800" cy="201168"/>
+          </a:xfrm>
+          <a:prstGeom prst="rect">
+            <a:avLst/>
+          </a:prstGeom>
+          <a:noFill/>
+          <a:ln/>
+        </p:spPr>
+        <p:txBody>
+          <a:bodyPr wrap="square" lIns="0" tIns="0" rIns="0" bIns="0" rtlCol="0" anchor="t"/>
+          <a:lstStyle/>
+          <a:p>
+            <a:pPr algn="ctr" indent="0" marL="0">
+              <a:buNone/>
+            </a:pPr>
+            <a:r>
+              <a:rPr lang="en-US" sz="850" dirty="0">
+                <a:solidFill>
+                  <a:srgbClr val="475569"/>
+                </a:solidFill>
+                <a:latin typeface="Calibri" pitchFamily="34" charset="0"/>
+                <a:ea typeface="Calibri" pitchFamily="34" charset="-122"/>
+                <a:cs typeface="Calibri" pitchFamily="34" charset="-120"/>
+              </a:rPr>
+              <a:t>person who does something</a:t>
+            </a:r>
+            <a:endParaRPr lang="en-US" sz="850" dirty="0"/>
+          </a:p>
+        </p:txBody>
+      </p:sp>
+      <p:sp>
+        <p:nvSpPr>
+          <p:cNvPr id="26" name="Shape 24"/>
           <p:cNvSpPr/>
           <p:nvPr/>
         </p:nvSpPr>
@@ -8007,7 +8158,7 @@
       </p:sp>
       <p:sp>
         <p:nvSpPr>
-          <p:cNvPr id="23" name="Text 21"/>
+          <p:cNvPr id="27" name="Text 25"/>
           <p:cNvSpPr/>
           <p:nvPr/>
         </p:nvSpPr>
@@ -8046,7 +8197,7 @@
       </p:sp>
       <p:sp>
         <p:nvSpPr>
-          <p:cNvPr id="24" name="Shape 22"/>
+          <p:cNvPr id="28" name="Shape 26"/>
           <p:cNvSpPr/>
           <p:nvPr/>
         </p:nvSpPr>
@@ -8073,7 +8224,7 @@
       </p:sp>
       <p:sp>
         <p:nvSpPr>
-          <p:cNvPr id="25" name="Text 23"/>
+          <p:cNvPr id="29" name="Text 27"/>
           <p:cNvSpPr/>
           <p:nvPr/>
         </p:nvSpPr>
@@ -8112,7 +8263,7 @@
       </p:sp>
       <p:sp>
         <p:nvSpPr>
-          <p:cNvPr id="26" name="Shape 24"/>
+          <p:cNvPr id="30" name="Shape 28"/>
           <p:cNvSpPr/>
           <p:nvPr/>
         </p:nvSpPr>
@@ -8139,7 +8290,7 @@
       </p:sp>
       <p:sp>
         <p:nvSpPr>
-          <p:cNvPr id="27" name="Text 25"/>
+          <p:cNvPr id="31" name="Text 29"/>
           <p:cNvSpPr/>
           <p:nvPr/>
         </p:nvSpPr>
@@ -8178,7 +8329,7 @@
       </p:sp>
       <p:sp>
         <p:nvSpPr>
-          <p:cNvPr id="28" name="Shape 26"/>
+          <p:cNvPr id="32" name="Shape 30"/>
           <p:cNvSpPr/>
           <p:nvPr/>
         </p:nvSpPr>
@@ -8205,7 +8356,7 @@
       </p:sp>
       <p:sp>
         <p:nvSpPr>
-          <p:cNvPr id="29" name="Text 27"/>
+          <p:cNvPr id="33" name="Text 31"/>
           <p:cNvSpPr/>
           <p:nvPr/>
         </p:nvSpPr>
@@ -8528,7 +8679,7 @@
                 <a:ea typeface="Calibri" pitchFamily="34" charset="-122"/>
                 <a:cs typeface="Calibri" pitchFamily="34" charset="-120"/>
               </a:rPr>
-              <a:t>Word Labs  •  wordlabs.app  •  Root: 'count' = to number or reckon</a:t>
+              <a:t>Word Labs  •  wordlabs.app  •  Root: 'count' = to number or calculate</a:t>
             </a:r>
             <a:endParaRPr lang="en-US" sz="800" dirty="0"/>
           </a:p>
@@ -8667,7 +8818,7 @@
                 <a:ea typeface="Trebuchet MS" pitchFamily="34" charset="-122"/>
                 <a:cs typeface="Trebuchet MS" pitchFamily="34" charset="-120"/>
               </a:rPr>
-              <a:t>recount</a:t>
+              <a:t>accountant</a:t>
             </a:r>
             <a:endParaRPr lang="en-US" sz="2800" dirty="0"/>
           </a:p>
@@ -8747,7 +8898,7 @@
         </p:nvSpPr>
         <p:spPr>
           <a:xfrm>
-            <a:off x="2938272" y="2258568"/>
+            <a:off x="2221992" y="2258568"/>
             <a:ext cx="1828800" cy="292608"/>
           </a:xfrm>
           <a:prstGeom prst="rect">
@@ -8781,7 +8932,7 @@
         </p:nvSpPr>
         <p:spPr>
           <a:xfrm>
-            <a:off x="2938272" y="2258568"/>
+            <a:off x="2221992" y="2258568"/>
             <a:ext cx="1828800" cy="292608"/>
           </a:xfrm>
           <a:prstGeom prst="rect">
@@ -8806,7 +8957,7 @@
                 <a:ea typeface="Trebuchet MS" pitchFamily="34" charset="-122"/>
                 <a:cs typeface="Trebuchet MS" pitchFamily="34" charset="-120"/>
               </a:rPr>
-              <a:t>re</a:t>
+              <a:t>ac</a:t>
             </a:r>
             <a:endParaRPr lang="en-US" sz="1300" dirty="0"/>
           </a:p>
@@ -8820,7 +8971,7 @@
         </p:nvSpPr>
         <p:spPr>
           <a:xfrm>
-            <a:off x="2938272" y="2569464"/>
+            <a:off x="2221992" y="2569464"/>
             <a:ext cx="1828800" cy="201168"/>
           </a:xfrm>
           <a:prstGeom prst="rect">
@@ -8845,7 +8996,7 @@
                 <a:ea typeface="Calibri" pitchFamily="34" charset="-122"/>
                 <a:cs typeface="Calibri" pitchFamily="34" charset="-120"/>
               </a:rPr>
-              <a:t>again</a:t>
+              <a:t>to, towards</a:t>
             </a:r>
             <a:endParaRPr lang="en-US" sz="850" dirty="0"/>
           </a:p>
@@ -8853,13 +9004,52 @@
       </p:sp>
       <p:sp>
         <p:nvSpPr>
-          <p:cNvPr id="19" name="Shape 17"/>
-          <p:cNvSpPr/>
-          <p:nvPr/>
-        </p:nvSpPr>
-        <p:spPr>
-          <a:xfrm>
-            <a:off x="5803392" y="2258568"/>
+          <p:cNvPr id="19" name="Text 17"/>
+          <p:cNvSpPr/>
+          <p:nvPr/>
+        </p:nvSpPr>
+        <p:spPr>
+          <a:xfrm>
+            <a:off x="2221992" y="2752344"/>
+            <a:ext cx="1828800" cy="182880"/>
+          </a:xfrm>
+          <a:prstGeom prst="rect">
+            <a:avLst/>
+          </a:prstGeom>
+          <a:noFill/>
+          <a:ln/>
+        </p:spPr>
+        <p:txBody>
+          <a:bodyPr wrap="square" lIns="0" tIns="0" rIns="0" bIns="0" rtlCol="0" anchor="t"/>
+          <a:lstStyle/>
+          <a:p>
+            <a:pPr algn="ctr" indent="0" marL="0">
+              <a:buNone/>
+            </a:pPr>
+            <a:r>
+              <a:rPr lang="en-US" sz="700" i="1" dirty="0">
+                <a:solidFill>
+                  <a:srgbClr val="94A3B8"/>
+                </a:solidFill>
+                <a:latin typeface="Calibri" pitchFamily="34" charset="0"/>
+                <a:ea typeface="Calibri" pitchFamily="34" charset="-122"/>
+                <a:cs typeface="Calibri" pitchFamily="34" charset="-120"/>
+              </a:rPr>
+              <a:t>ad → ac before 'c'</a:t>
+            </a:r>
+            <a:endParaRPr lang="en-US" sz="700" dirty="0"/>
+          </a:p>
+        </p:txBody>
+      </p:sp>
+      <p:sp>
+        <p:nvSpPr>
+          <p:cNvPr id="20" name="Shape 18"/>
+          <p:cNvSpPr/>
+          <p:nvPr/>
+        </p:nvSpPr>
+        <p:spPr>
+          <a:xfrm>
+            <a:off x="4370832" y="2258568"/>
             <a:ext cx="1828800" cy="292608"/>
           </a:xfrm>
           <a:prstGeom prst="rect">
@@ -8887,13 +9077,13 @@
       </p:sp>
       <p:sp>
         <p:nvSpPr>
-          <p:cNvPr id="20" name="Text 18"/>
-          <p:cNvSpPr/>
-          <p:nvPr/>
-        </p:nvSpPr>
-        <p:spPr>
-          <a:xfrm>
-            <a:off x="5803392" y="2258568"/>
+          <p:cNvPr id="21" name="Text 19"/>
+          <p:cNvSpPr/>
+          <p:nvPr/>
+        </p:nvSpPr>
+        <p:spPr>
+          <a:xfrm>
+            <a:off x="4370832" y="2258568"/>
             <a:ext cx="1828800" cy="292608"/>
           </a:xfrm>
           <a:prstGeom prst="rect">
@@ -8926,13 +9116,13 @@
       </p:sp>
       <p:sp>
         <p:nvSpPr>
-          <p:cNvPr id="21" name="Text 19"/>
-          <p:cNvSpPr/>
-          <p:nvPr/>
-        </p:nvSpPr>
-        <p:spPr>
-          <a:xfrm>
-            <a:off x="5803392" y="2569464"/>
+          <p:cNvPr id="22" name="Text 20"/>
+          <p:cNvSpPr/>
+          <p:nvPr/>
+        </p:nvSpPr>
+        <p:spPr>
+          <a:xfrm>
+            <a:off x="4370832" y="2569464"/>
             <a:ext cx="1828800" cy="201168"/>
           </a:xfrm>
           <a:prstGeom prst="rect">
@@ -8957,7 +9147,7 @@
                 <a:ea typeface="Calibri" pitchFamily="34" charset="-122"/>
                 <a:cs typeface="Calibri" pitchFamily="34" charset="-120"/>
               </a:rPr>
-              <a:t>to number or reckon</a:t>
+              <a:t>to number or calculate</a:t>
             </a:r>
             <a:endParaRPr lang="en-US" sz="850" dirty="0"/>
           </a:p>
@@ -8965,7 +9155,119 @@
       </p:sp>
       <p:sp>
         <p:nvSpPr>
-          <p:cNvPr id="22" name="Shape 20"/>
+          <p:cNvPr id="23" name="Shape 21"/>
+          <p:cNvSpPr/>
+          <p:nvPr/>
+        </p:nvSpPr>
+        <p:spPr>
+          <a:xfrm>
+            <a:off x="6519672" y="2258568"/>
+            <a:ext cx="1828800" cy="292608"/>
+          </a:xfrm>
+          <a:prstGeom prst="rect">
+            <a:avLst>
+              <a:gd name="adj" fmla="val 25000"/>
+            </a:avLst>
+          </a:prstGeom>
+          <a:solidFill>
+            <a:srgbClr val="FCE7F3"/>
+          </a:solidFill>
+          <a:ln w="19050">
+            <a:solidFill>
+              <a:srgbClr val="DB2777"/>
+            </a:solidFill>
+            <a:prstDash val="solid"/>
+          </a:ln>
+          <a:effectLst>
+            <a:outerShdw sx="100000" sy="100000" kx="0" ky="0" algn="bl" rotWithShape="0" blurRad="101600" dist="38100" dir="8100000">
+              <a:srgbClr val="000000">
+                <a:alpha val="12000"/>
+              </a:srgbClr>
+            </a:outerShdw>
+          </a:effectLst>
+        </p:spPr>
+      </p:sp>
+      <p:sp>
+        <p:nvSpPr>
+          <p:cNvPr id="24" name="Text 22"/>
+          <p:cNvSpPr/>
+          <p:nvPr/>
+        </p:nvSpPr>
+        <p:spPr>
+          <a:xfrm>
+            <a:off x="6519672" y="2258568"/>
+            <a:ext cx="1828800" cy="292608"/>
+          </a:xfrm>
+          <a:prstGeom prst="rect">
+            <a:avLst/>
+          </a:prstGeom>
+          <a:noFill/>
+          <a:ln/>
+        </p:spPr>
+        <p:txBody>
+          <a:bodyPr wrap="square" lIns="0" tIns="0" rIns="0" bIns="0" rtlCol="0" anchor="ctr"/>
+          <a:lstStyle/>
+          <a:p>
+            <a:pPr algn="ctr" indent="0" marL="0">
+              <a:buNone/>
+            </a:pPr>
+            <a:r>
+              <a:rPr lang="en-US" sz="1300" b="1" dirty="0">
+                <a:solidFill>
+                  <a:srgbClr val="9D174D"/>
+                </a:solidFill>
+                <a:latin typeface="Trebuchet MS" pitchFamily="34" charset="0"/>
+                <a:ea typeface="Trebuchet MS" pitchFamily="34" charset="-122"/>
+                <a:cs typeface="Trebuchet MS" pitchFamily="34" charset="-120"/>
+              </a:rPr>
+              <a:t>ant</a:t>
+            </a:r>
+            <a:endParaRPr lang="en-US" sz="1300" dirty="0"/>
+          </a:p>
+        </p:txBody>
+      </p:sp>
+      <p:sp>
+        <p:nvSpPr>
+          <p:cNvPr id="25" name="Text 23"/>
+          <p:cNvSpPr/>
+          <p:nvPr/>
+        </p:nvSpPr>
+        <p:spPr>
+          <a:xfrm>
+            <a:off x="6519672" y="2569464"/>
+            <a:ext cx="1828800" cy="201168"/>
+          </a:xfrm>
+          <a:prstGeom prst="rect">
+            <a:avLst/>
+          </a:prstGeom>
+          <a:noFill/>
+          <a:ln/>
+        </p:spPr>
+        <p:txBody>
+          <a:bodyPr wrap="square" lIns="0" tIns="0" rIns="0" bIns="0" rtlCol="0" anchor="t"/>
+          <a:lstStyle/>
+          <a:p>
+            <a:pPr algn="ctr" indent="0" marL="0">
+              <a:buNone/>
+            </a:pPr>
+            <a:r>
+              <a:rPr lang="en-US" sz="850" dirty="0">
+                <a:solidFill>
+                  <a:srgbClr val="475569"/>
+                </a:solidFill>
+                <a:latin typeface="Calibri" pitchFamily="34" charset="0"/>
+                <a:ea typeface="Calibri" pitchFamily="34" charset="-122"/>
+                <a:cs typeface="Calibri" pitchFamily="34" charset="-120"/>
+              </a:rPr>
+              <a:t>person who does something</a:t>
+            </a:r>
+            <a:endParaRPr lang="en-US" sz="850" dirty="0"/>
+          </a:p>
+        </p:txBody>
+      </p:sp>
+      <p:sp>
+        <p:nvSpPr>
+          <p:cNvPr id="26" name="Shape 24"/>
           <p:cNvSpPr/>
           <p:nvPr/>
         </p:nvSpPr>
@@ -8992,7 +9294,7 @@
       </p:sp>
       <p:sp>
         <p:nvSpPr>
-          <p:cNvPr id="23" name="Text 21"/>
+          <p:cNvPr id="27" name="Text 25"/>
           <p:cNvSpPr/>
           <p:nvPr/>
         </p:nvSpPr>
@@ -9031,7 +9333,7 @@
       </p:sp>
       <p:sp>
         <p:nvSpPr>
-          <p:cNvPr id="24" name="Shape 22"/>
+          <p:cNvPr id="28" name="Shape 26"/>
           <p:cNvSpPr/>
           <p:nvPr/>
         </p:nvSpPr>
@@ -9058,13 +9360,13 @@
       </p:sp>
       <p:sp>
         <p:nvSpPr>
-          <p:cNvPr id="25" name="Shape 23"/>
-          <p:cNvSpPr/>
-          <p:nvPr/>
-        </p:nvSpPr>
-        <p:spPr>
-          <a:xfrm>
-            <a:off x="2999232" y="3364992"/>
+          <p:cNvPr id="29" name="Shape 27"/>
+          <p:cNvSpPr/>
+          <p:nvPr/>
+        </p:nvSpPr>
+        <p:spPr>
+          <a:xfrm>
+            <a:off x="2313432" y="3364992"/>
             <a:ext cx="1645920" cy="475488"/>
           </a:xfrm>
           <a:prstGeom prst="rect">
@@ -9085,13 +9387,13 @@
       </p:sp>
       <p:sp>
         <p:nvSpPr>
-          <p:cNvPr id="26" name="Text 24"/>
-          <p:cNvSpPr/>
-          <p:nvPr/>
-        </p:nvSpPr>
-        <p:spPr>
-          <a:xfrm>
-            <a:off x="2999232" y="3364992"/>
+          <p:cNvPr id="30" name="Text 28"/>
+          <p:cNvSpPr/>
+          <p:nvPr/>
+        </p:nvSpPr>
+        <p:spPr>
+          <a:xfrm>
+            <a:off x="2313432" y="3364992"/>
             <a:ext cx="1645920" cy="475488"/>
           </a:xfrm>
           <a:prstGeom prst="rect">
@@ -9116,7 +9418,7 @@
                 <a:ea typeface="Trebuchet MS" pitchFamily="34" charset="-122"/>
                 <a:cs typeface="Trebuchet MS" pitchFamily="34" charset="-120"/>
               </a:rPr>
-              <a:t>re</a:t>
+              <a:t>ac</a:t>
             </a:r>
             <a:endParaRPr lang="en-US" sz="1400" dirty="0"/>
           </a:p>
@@ -9124,14 +9426,14 @@
       </p:sp>
       <p:sp>
         <p:nvSpPr>
-          <p:cNvPr id="27" name="Text 25"/>
-          <p:cNvSpPr/>
-          <p:nvPr/>
-        </p:nvSpPr>
-        <p:spPr>
-          <a:xfrm>
-            <a:off x="4645152" y="3364992"/>
-            <a:ext cx="1097280" cy="475488"/>
+          <p:cNvPr id="31" name="Text 29"/>
+          <p:cNvSpPr/>
+          <p:nvPr/>
+        </p:nvSpPr>
+        <p:spPr>
+          <a:xfrm>
+            <a:off x="3959352" y="3364992"/>
+            <a:ext cx="411480" cy="475488"/>
           </a:xfrm>
           <a:prstGeom prst="rect">
             <a:avLst/>
@@ -9163,13 +9465,13 @@
       </p:sp>
       <p:sp>
         <p:nvSpPr>
-          <p:cNvPr id="28" name="Shape 26"/>
-          <p:cNvSpPr/>
-          <p:nvPr/>
-        </p:nvSpPr>
-        <p:spPr>
-          <a:xfrm>
-            <a:off x="5742432" y="3364992"/>
+          <p:cNvPr id="32" name="Shape 30"/>
+          <p:cNvSpPr/>
+          <p:nvPr/>
+        </p:nvSpPr>
+        <p:spPr>
+          <a:xfrm>
+            <a:off x="4370832" y="3364992"/>
             <a:ext cx="1645920" cy="475488"/>
           </a:xfrm>
           <a:prstGeom prst="rect">
@@ -9190,13 +9492,13 @@
       </p:sp>
       <p:sp>
         <p:nvSpPr>
-          <p:cNvPr id="29" name="Text 27"/>
-          <p:cNvSpPr/>
-          <p:nvPr/>
-        </p:nvSpPr>
-        <p:spPr>
-          <a:xfrm>
-            <a:off x="5742432" y="3364992"/>
+          <p:cNvPr id="33" name="Text 31"/>
+          <p:cNvSpPr/>
+          <p:nvPr/>
+        </p:nvSpPr>
+        <p:spPr>
+          <a:xfrm>
+            <a:off x="4370832" y="3364992"/>
             <a:ext cx="1645920" cy="475488"/>
           </a:xfrm>
           <a:prstGeom prst="rect">
@@ -9221,7 +9523,7 @@
                 <a:ea typeface="Trebuchet MS" pitchFamily="34" charset="-122"/>
                 <a:cs typeface="Trebuchet MS" pitchFamily="34" charset="-120"/>
               </a:rPr>
-              <a:t>count</a:t>
+              <a:t>coun</a:t>
             </a:r>
             <a:endParaRPr lang="en-US" sz="1400" dirty="0"/>
           </a:p>
@@ -9229,7 +9531,112 @@
       </p:sp>
       <p:sp>
         <p:nvSpPr>
-          <p:cNvPr id="30" name="Shape 28"/>
+          <p:cNvPr id="34" name="Text 32"/>
+          <p:cNvSpPr/>
+          <p:nvPr/>
+        </p:nvSpPr>
+        <p:spPr>
+          <a:xfrm>
+            <a:off x="6016752" y="3364992"/>
+            <a:ext cx="411480" cy="475488"/>
+          </a:xfrm>
+          <a:prstGeom prst="rect">
+            <a:avLst/>
+          </a:prstGeom>
+          <a:noFill/>
+          <a:ln/>
+        </p:spPr>
+        <p:txBody>
+          <a:bodyPr wrap="square" lIns="0" tIns="0" rIns="0" bIns="0" rtlCol="0" anchor="ctr"/>
+          <a:lstStyle/>
+          <a:p>
+            <a:pPr algn="ctr" indent="0" marL="0">
+              <a:buNone/>
+            </a:pPr>
+            <a:r>
+              <a:rPr lang="en-US" sz="1600" b="1" dirty="0">
+                <a:solidFill>
+                  <a:srgbClr val="0D9488"/>
+                </a:solidFill>
+                <a:latin typeface="Trebuchet MS" pitchFamily="34" charset="0"/>
+                <a:ea typeface="Trebuchet MS" pitchFamily="34" charset="-122"/>
+                <a:cs typeface="Trebuchet MS" pitchFamily="34" charset="-120"/>
+              </a:rPr>
+              <a:t>·</a:t>
+            </a:r>
+            <a:endParaRPr lang="en-US" sz="1600" dirty="0"/>
+          </a:p>
+        </p:txBody>
+      </p:sp>
+      <p:sp>
+        <p:nvSpPr>
+          <p:cNvPr id="35" name="Shape 33"/>
+          <p:cNvSpPr/>
+          <p:nvPr/>
+        </p:nvSpPr>
+        <p:spPr>
+          <a:xfrm>
+            <a:off x="6428232" y="3364992"/>
+            <a:ext cx="1645920" cy="475488"/>
+          </a:xfrm>
+          <a:prstGeom prst="rect">
+            <a:avLst>
+              <a:gd name="adj" fmla="val 9615"/>
+            </a:avLst>
+          </a:prstGeom>
+          <a:solidFill>
+            <a:srgbClr val="FFFFFF"/>
+          </a:solidFill>
+          <a:ln w="12700">
+            <a:solidFill>
+              <a:srgbClr val="0D9488"/>
+            </a:solidFill>
+            <a:prstDash val="solid"/>
+          </a:ln>
+        </p:spPr>
+      </p:sp>
+      <p:sp>
+        <p:nvSpPr>
+          <p:cNvPr id="36" name="Text 34"/>
+          <p:cNvSpPr/>
+          <p:nvPr/>
+        </p:nvSpPr>
+        <p:spPr>
+          <a:xfrm>
+            <a:off x="6428232" y="3364992"/>
+            <a:ext cx="1645920" cy="475488"/>
+          </a:xfrm>
+          <a:prstGeom prst="rect">
+            <a:avLst/>
+          </a:prstGeom>
+          <a:noFill/>
+          <a:ln/>
+        </p:spPr>
+        <p:txBody>
+          <a:bodyPr wrap="square" lIns="0" tIns="0" rIns="0" bIns="0" rtlCol="0" anchor="ctr"/>
+          <a:lstStyle/>
+          <a:p>
+            <a:pPr algn="ctr" indent="0" marL="0">
+              <a:buNone/>
+            </a:pPr>
+            <a:r>
+              <a:rPr lang="en-US" sz="1400" b="1" dirty="0">
+                <a:solidFill>
+                  <a:srgbClr val="0D9488"/>
+                </a:solidFill>
+                <a:latin typeface="Trebuchet MS" pitchFamily="34" charset="0"/>
+                <a:ea typeface="Trebuchet MS" pitchFamily="34" charset="-122"/>
+                <a:cs typeface="Trebuchet MS" pitchFamily="34" charset="-120"/>
+              </a:rPr>
+              <a:t>tant</a:t>
+            </a:r>
+            <a:endParaRPr lang="en-US" sz="1400" dirty="0"/>
+          </a:p>
+        </p:txBody>
+      </p:sp>
+      <p:sp>
+        <p:nvSpPr>
+          <p:cNvPr id="37" name="Shape 35"/>
           <p:cNvSpPr/>
           <p:nvPr/>
         </p:nvSpPr>
@@ -9256,7 +9663,7 @@
       </p:sp>
       <p:sp>
         <p:nvSpPr>
-          <p:cNvPr id="31" name="Text 29"/>
+          <p:cNvPr id="38" name="Text 36"/>
           <p:cNvSpPr/>
           <p:nvPr/>
         </p:nvSpPr>
@@ -9295,7 +9702,7 @@
       </p:sp>
       <p:sp>
         <p:nvSpPr>
-          <p:cNvPr id="32" name="Shape 30"/>
+          <p:cNvPr id="39" name="Shape 37"/>
           <p:cNvSpPr/>
           <p:nvPr/>
         </p:nvSpPr>
@@ -9322,7 +9729,7 @@
       </p:sp>
       <p:sp>
         <p:nvSpPr>
-          <p:cNvPr id="33" name="Text 31"/>
+          <p:cNvPr id="40" name="Text 38"/>
           <p:cNvSpPr/>
           <p:nvPr/>
         </p:nvSpPr>
@@ -9645,7 +10052,7 @@
                 <a:ea typeface="Calibri" pitchFamily="34" charset="-122"/>
                 <a:cs typeface="Calibri" pitchFamily="34" charset="-120"/>
               </a:rPr>
-              <a:t>Word Labs  •  wordlabs.app  •  Root: 'count' = to number or reckon</a:t>
+              <a:t>Word Labs  •  wordlabs.app  •  Root: 'count' = to number or calculate</a:t>
             </a:r>
             <a:endParaRPr lang="en-US" sz="800" dirty="0"/>
           </a:p>
@@ -9784,7 +10191,7 @@
                 <a:ea typeface="Trebuchet MS" pitchFamily="34" charset="-122"/>
                 <a:cs typeface="Trebuchet MS" pitchFamily="34" charset="-120"/>
               </a:rPr>
-              <a:t>recount</a:t>
+              <a:t>accountant</a:t>
             </a:r>
             <a:endParaRPr lang="en-US" sz="2800" dirty="0"/>
           </a:p>
@@ -9864,7 +10271,7 @@
         </p:nvSpPr>
         <p:spPr>
           <a:xfrm>
-            <a:off x="2938272" y="2258568"/>
+            <a:off x="2221992" y="2258568"/>
             <a:ext cx="1828800" cy="292608"/>
           </a:xfrm>
           <a:prstGeom prst="rect">
@@ -9898,7 +10305,7 @@
         </p:nvSpPr>
         <p:spPr>
           <a:xfrm>
-            <a:off x="2938272" y="2258568"/>
+            <a:off x="2221992" y="2258568"/>
             <a:ext cx="1828800" cy="292608"/>
           </a:xfrm>
           <a:prstGeom prst="rect">
@@ -9923,7 +10330,7 @@
                 <a:ea typeface="Trebuchet MS" pitchFamily="34" charset="-122"/>
                 <a:cs typeface="Trebuchet MS" pitchFamily="34" charset="-120"/>
               </a:rPr>
-              <a:t>re</a:t>
+              <a:t>ac</a:t>
             </a:r>
             <a:endParaRPr lang="en-US" sz="1300" dirty="0"/>
           </a:p>
@@ -9937,7 +10344,7 @@
         </p:nvSpPr>
         <p:spPr>
           <a:xfrm>
-            <a:off x="2938272" y="2569464"/>
+            <a:off x="2221992" y="2569464"/>
             <a:ext cx="1828800" cy="201168"/>
           </a:xfrm>
           <a:prstGeom prst="rect">
@@ -9962,7 +10369,7 @@
                 <a:ea typeface="Calibri" pitchFamily="34" charset="-122"/>
                 <a:cs typeface="Calibri" pitchFamily="34" charset="-120"/>
               </a:rPr>
-              <a:t>again</a:t>
+              <a:t>to, towards</a:t>
             </a:r>
             <a:endParaRPr lang="en-US" sz="850" dirty="0"/>
           </a:p>
@@ -9970,13 +10377,52 @@
       </p:sp>
       <p:sp>
         <p:nvSpPr>
-          <p:cNvPr id="19" name="Shape 17"/>
-          <p:cNvSpPr/>
-          <p:nvPr/>
-        </p:nvSpPr>
-        <p:spPr>
-          <a:xfrm>
-            <a:off x="5803392" y="2258568"/>
+          <p:cNvPr id="19" name="Text 17"/>
+          <p:cNvSpPr/>
+          <p:nvPr/>
+        </p:nvSpPr>
+        <p:spPr>
+          <a:xfrm>
+            <a:off x="2221992" y="2752344"/>
+            <a:ext cx="1828800" cy="182880"/>
+          </a:xfrm>
+          <a:prstGeom prst="rect">
+            <a:avLst/>
+          </a:prstGeom>
+          <a:noFill/>
+          <a:ln/>
+        </p:spPr>
+        <p:txBody>
+          <a:bodyPr wrap="square" lIns="0" tIns="0" rIns="0" bIns="0" rtlCol="0" anchor="t"/>
+          <a:lstStyle/>
+          <a:p>
+            <a:pPr algn="ctr" indent="0" marL="0">
+              <a:buNone/>
+            </a:pPr>
+            <a:r>
+              <a:rPr lang="en-US" sz="700" i="1" dirty="0">
+                <a:solidFill>
+                  <a:srgbClr val="94A3B8"/>
+                </a:solidFill>
+                <a:latin typeface="Calibri" pitchFamily="34" charset="0"/>
+                <a:ea typeface="Calibri" pitchFamily="34" charset="-122"/>
+                <a:cs typeface="Calibri" pitchFamily="34" charset="-120"/>
+              </a:rPr>
+              <a:t>ad → ac before 'c'</a:t>
+            </a:r>
+            <a:endParaRPr lang="en-US" sz="700" dirty="0"/>
+          </a:p>
+        </p:txBody>
+      </p:sp>
+      <p:sp>
+        <p:nvSpPr>
+          <p:cNvPr id="20" name="Shape 18"/>
+          <p:cNvSpPr/>
+          <p:nvPr/>
+        </p:nvSpPr>
+        <p:spPr>
+          <a:xfrm>
+            <a:off x="4370832" y="2258568"/>
             <a:ext cx="1828800" cy="292608"/>
           </a:xfrm>
           <a:prstGeom prst="rect">
@@ -10004,13 +10450,13 @@
       </p:sp>
       <p:sp>
         <p:nvSpPr>
-          <p:cNvPr id="20" name="Text 18"/>
-          <p:cNvSpPr/>
-          <p:nvPr/>
-        </p:nvSpPr>
-        <p:spPr>
-          <a:xfrm>
-            <a:off x="5803392" y="2258568"/>
+          <p:cNvPr id="21" name="Text 19"/>
+          <p:cNvSpPr/>
+          <p:nvPr/>
+        </p:nvSpPr>
+        <p:spPr>
+          <a:xfrm>
+            <a:off x="4370832" y="2258568"/>
             <a:ext cx="1828800" cy="292608"/>
           </a:xfrm>
           <a:prstGeom prst="rect">
@@ -10043,13 +10489,13 @@
       </p:sp>
       <p:sp>
         <p:nvSpPr>
-          <p:cNvPr id="21" name="Text 19"/>
-          <p:cNvSpPr/>
-          <p:nvPr/>
-        </p:nvSpPr>
-        <p:spPr>
-          <a:xfrm>
-            <a:off x="5803392" y="2569464"/>
+          <p:cNvPr id="22" name="Text 20"/>
+          <p:cNvSpPr/>
+          <p:nvPr/>
+        </p:nvSpPr>
+        <p:spPr>
+          <a:xfrm>
+            <a:off x="4370832" y="2569464"/>
             <a:ext cx="1828800" cy="201168"/>
           </a:xfrm>
           <a:prstGeom prst="rect">
@@ -10074,7 +10520,7 @@
                 <a:ea typeface="Calibri" pitchFamily="34" charset="-122"/>
                 <a:cs typeface="Calibri" pitchFamily="34" charset="-120"/>
               </a:rPr>
-              <a:t>to number or reckon</a:t>
+              <a:t>to number or calculate</a:t>
             </a:r>
             <a:endParaRPr lang="en-US" sz="850" dirty="0"/>
           </a:p>
@@ -10082,7 +10528,119 @@
       </p:sp>
       <p:sp>
         <p:nvSpPr>
-          <p:cNvPr id="22" name="Shape 20"/>
+          <p:cNvPr id="23" name="Shape 21"/>
+          <p:cNvSpPr/>
+          <p:nvPr/>
+        </p:nvSpPr>
+        <p:spPr>
+          <a:xfrm>
+            <a:off x="6519672" y="2258568"/>
+            <a:ext cx="1828800" cy="292608"/>
+          </a:xfrm>
+          <a:prstGeom prst="rect">
+            <a:avLst>
+              <a:gd name="adj" fmla="val 25000"/>
+            </a:avLst>
+          </a:prstGeom>
+          <a:solidFill>
+            <a:srgbClr val="FCE7F3"/>
+          </a:solidFill>
+          <a:ln w="19050">
+            <a:solidFill>
+              <a:srgbClr val="DB2777"/>
+            </a:solidFill>
+            <a:prstDash val="solid"/>
+          </a:ln>
+          <a:effectLst>
+            <a:outerShdw sx="100000" sy="100000" kx="0" ky="0" algn="bl" rotWithShape="0" blurRad="101600" dist="38100" dir="8100000">
+              <a:srgbClr val="000000">
+                <a:alpha val="12000"/>
+              </a:srgbClr>
+            </a:outerShdw>
+          </a:effectLst>
+        </p:spPr>
+      </p:sp>
+      <p:sp>
+        <p:nvSpPr>
+          <p:cNvPr id="24" name="Text 22"/>
+          <p:cNvSpPr/>
+          <p:nvPr/>
+        </p:nvSpPr>
+        <p:spPr>
+          <a:xfrm>
+            <a:off x="6519672" y="2258568"/>
+            <a:ext cx="1828800" cy="292608"/>
+          </a:xfrm>
+          <a:prstGeom prst="rect">
+            <a:avLst/>
+          </a:prstGeom>
+          <a:noFill/>
+          <a:ln/>
+        </p:spPr>
+        <p:txBody>
+          <a:bodyPr wrap="square" lIns="0" tIns="0" rIns="0" bIns="0" rtlCol="0" anchor="ctr"/>
+          <a:lstStyle/>
+          <a:p>
+            <a:pPr algn="ctr" indent="0" marL="0">
+              <a:buNone/>
+            </a:pPr>
+            <a:r>
+              <a:rPr lang="en-US" sz="1300" b="1" dirty="0">
+                <a:solidFill>
+                  <a:srgbClr val="9D174D"/>
+                </a:solidFill>
+                <a:latin typeface="Trebuchet MS" pitchFamily="34" charset="0"/>
+                <a:ea typeface="Trebuchet MS" pitchFamily="34" charset="-122"/>
+                <a:cs typeface="Trebuchet MS" pitchFamily="34" charset="-120"/>
+              </a:rPr>
+              <a:t>ant</a:t>
+            </a:r>
+            <a:endParaRPr lang="en-US" sz="1300" dirty="0"/>
+          </a:p>
+        </p:txBody>
+      </p:sp>
+      <p:sp>
+        <p:nvSpPr>
+          <p:cNvPr id="25" name="Text 23"/>
+          <p:cNvSpPr/>
+          <p:nvPr/>
+        </p:nvSpPr>
+        <p:spPr>
+          <a:xfrm>
+            <a:off x="6519672" y="2569464"/>
+            <a:ext cx="1828800" cy="201168"/>
+          </a:xfrm>
+          <a:prstGeom prst="rect">
+            <a:avLst/>
+          </a:prstGeom>
+          <a:noFill/>
+          <a:ln/>
+        </p:spPr>
+        <p:txBody>
+          <a:bodyPr wrap="square" lIns="0" tIns="0" rIns="0" bIns="0" rtlCol="0" anchor="t"/>
+          <a:lstStyle/>
+          <a:p>
+            <a:pPr algn="ctr" indent="0" marL="0">
+              <a:buNone/>
+            </a:pPr>
+            <a:r>
+              <a:rPr lang="en-US" sz="850" dirty="0">
+                <a:solidFill>
+                  <a:srgbClr val="475569"/>
+                </a:solidFill>
+                <a:latin typeface="Calibri" pitchFamily="34" charset="0"/>
+                <a:ea typeface="Calibri" pitchFamily="34" charset="-122"/>
+                <a:cs typeface="Calibri" pitchFamily="34" charset="-120"/>
+              </a:rPr>
+              <a:t>person who does something</a:t>
+            </a:r>
+            <a:endParaRPr lang="en-US" sz="850" dirty="0"/>
+          </a:p>
+        </p:txBody>
+      </p:sp>
+      <p:sp>
+        <p:nvSpPr>
+          <p:cNvPr id="26" name="Shape 24"/>
           <p:cNvSpPr/>
           <p:nvPr/>
         </p:nvSpPr>
@@ -10109,7 +10667,7 @@
       </p:sp>
       <p:sp>
         <p:nvSpPr>
-          <p:cNvPr id="23" name="Text 21"/>
+          <p:cNvPr id="27" name="Text 25"/>
           <p:cNvSpPr/>
           <p:nvPr/>
         </p:nvSpPr>
@@ -10148,7 +10706,7 @@
       </p:sp>
       <p:sp>
         <p:nvSpPr>
-          <p:cNvPr id="24" name="Shape 22"/>
+          <p:cNvPr id="28" name="Shape 26"/>
           <p:cNvSpPr/>
           <p:nvPr/>
         </p:nvSpPr>
@@ -10175,13 +10733,13 @@
       </p:sp>
       <p:sp>
         <p:nvSpPr>
-          <p:cNvPr id="25" name="Shape 23"/>
-          <p:cNvSpPr/>
-          <p:nvPr/>
-        </p:nvSpPr>
-        <p:spPr>
-          <a:xfrm>
-            <a:off x="2999232" y="3364992"/>
+          <p:cNvPr id="29" name="Shape 27"/>
+          <p:cNvSpPr/>
+          <p:nvPr/>
+        </p:nvSpPr>
+        <p:spPr>
+          <a:xfrm>
+            <a:off x="2313432" y="3364992"/>
             <a:ext cx="1645920" cy="475488"/>
           </a:xfrm>
           <a:prstGeom prst="rect">
@@ -10202,13 +10760,13 @@
       </p:sp>
       <p:sp>
         <p:nvSpPr>
-          <p:cNvPr id="26" name="Text 24"/>
-          <p:cNvSpPr/>
-          <p:nvPr/>
-        </p:nvSpPr>
-        <p:spPr>
-          <a:xfrm>
-            <a:off x="2999232" y="3364992"/>
+          <p:cNvPr id="30" name="Text 28"/>
+          <p:cNvSpPr/>
+          <p:nvPr/>
+        </p:nvSpPr>
+        <p:spPr>
+          <a:xfrm>
+            <a:off x="2313432" y="3364992"/>
             <a:ext cx="1645920" cy="475488"/>
           </a:xfrm>
           <a:prstGeom prst="rect">
@@ -10233,7 +10791,7 @@
                 <a:ea typeface="Trebuchet MS" pitchFamily="34" charset="-122"/>
                 <a:cs typeface="Trebuchet MS" pitchFamily="34" charset="-120"/>
               </a:rPr>
-              <a:t>re</a:t>
+              <a:t>ac</a:t>
             </a:r>
             <a:endParaRPr lang="en-US" sz="1400" dirty="0"/>
           </a:p>
@@ -10241,14 +10799,14 @@
       </p:sp>
       <p:sp>
         <p:nvSpPr>
-          <p:cNvPr id="27" name="Text 25"/>
-          <p:cNvSpPr/>
-          <p:nvPr/>
-        </p:nvSpPr>
-        <p:spPr>
-          <a:xfrm>
-            <a:off x="4645152" y="3364992"/>
-            <a:ext cx="1097280" cy="475488"/>
+          <p:cNvPr id="31" name="Text 29"/>
+          <p:cNvSpPr/>
+          <p:nvPr/>
+        </p:nvSpPr>
+        <p:spPr>
+          <a:xfrm>
+            <a:off x="3959352" y="3364992"/>
+            <a:ext cx="411480" cy="475488"/>
           </a:xfrm>
           <a:prstGeom prst="rect">
             <a:avLst/>
@@ -10280,13 +10838,13 @@
       </p:sp>
       <p:sp>
         <p:nvSpPr>
-          <p:cNvPr id="28" name="Shape 26"/>
-          <p:cNvSpPr/>
-          <p:nvPr/>
-        </p:nvSpPr>
-        <p:spPr>
-          <a:xfrm>
-            <a:off x="5742432" y="3364992"/>
+          <p:cNvPr id="32" name="Shape 30"/>
+          <p:cNvSpPr/>
+          <p:nvPr/>
+        </p:nvSpPr>
+        <p:spPr>
+          <a:xfrm>
+            <a:off x="4370832" y="3364992"/>
             <a:ext cx="1645920" cy="475488"/>
           </a:xfrm>
           <a:prstGeom prst="rect">
@@ -10307,13 +10865,13 @@
       </p:sp>
       <p:sp>
         <p:nvSpPr>
-          <p:cNvPr id="29" name="Text 27"/>
-          <p:cNvSpPr/>
-          <p:nvPr/>
-        </p:nvSpPr>
-        <p:spPr>
-          <a:xfrm>
-            <a:off x="5742432" y="3364992"/>
+          <p:cNvPr id="33" name="Text 31"/>
+          <p:cNvSpPr/>
+          <p:nvPr/>
+        </p:nvSpPr>
+        <p:spPr>
+          <a:xfrm>
+            <a:off x="4370832" y="3364992"/>
             <a:ext cx="1645920" cy="475488"/>
           </a:xfrm>
           <a:prstGeom prst="rect">
@@ -10338,7 +10896,7 @@
                 <a:ea typeface="Trebuchet MS" pitchFamily="34" charset="-122"/>
                 <a:cs typeface="Trebuchet MS" pitchFamily="34" charset="-120"/>
               </a:rPr>
-              <a:t>count</a:t>
+              <a:t>coun</a:t>
             </a:r>
             <a:endParaRPr lang="en-US" sz="1400" dirty="0"/>
           </a:p>
@@ -10346,7 +10904,112 @@
       </p:sp>
       <p:sp>
         <p:nvSpPr>
-          <p:cNvPr id="30" name="Shape 28"/>
+          <p:cNvPr id="34" name="Text 32"/>
+          <p:cNvSpPr/>
+          <p:nvPr/>
+        </p:nvSpPr>
+        <p:spPr>
+          <a:xfrm>
+            <a:off x="6016752" y="3364992"/>
+            <a:ext cx="411480" cy="475488"/>
+          </a:xfrm>
+          <a:prstGeom prst="rect">
+            <a:avLst/>
+          </a:prstGeom>
+          <a:noFill/>
+          <a:ln/>
+        </p:spPr>
+        <p:txBody>
+          <a:bodyPr wrap="square" lIns="0" tIns="0" rIns="0" bIns="0" rtlCol="0" anchor="ctr"/>
+          <a:lstStyle/>
+          <a:p>
+            <a:pPr algn="ctr" indent="0" marL="0">
+              <a:buNone/>
+            </a:pPr>
+            <a:r>
+              <a:rPr lang="en-US" sz="1600" b="1" dirty="0">
+                <a:solidFill>
+                  <a:srgbClr val="0D9488"/>
+                </a:solidFill>
+                <a:latin typeface="Trebuchet MS" pitchFamily="34" charset="0"/>
+                <a:ea typeface="Trebuchet MS" pitchFamily="34" charset="-122"/>
+                <a:cs typeface="Trebuchet MS" pitchFamily="34" charset="-120"/>
+              </a:rPr>
+              <a:t>·</a:t>
+            </a:r>
+            <a:endParaRPr lang="en-US" sz="1600" dirty="0"/>
+          </a:p>
+        </p:txBody>
+      </p:sp>
+      <p:sp>
+        <p:nvSpPr>
+          <p:cNvPr id="35" name="Shape 33"/>
+          <p:cNvSpPr/>
+          <p:nvPr/>
+        </p:nvSpPr>
+        <p:spPr>
+          <a:xfrm>
+            <a:off x="6428232" y="3364992"/>
+            <a:ext cx="1645920" cy="475488"/>
+          </a:xfrm>
+          <a:prstGeom prst="rect">
+            <a:avLst>
+              <a:gd name="adj" fmla="val 9615"/>
+            </a:avLst>
+          </a:prstGeom>
+          <a:solidFill>
+            <a:srgbClr val="FFFFFF"/>
+          </a:solidFill>
+          <a:ln w="12700">
+            <a:solidFill>
+              <a:srgbClr val="0D9488"/>
+            </a:solidFill>
+            <a:prstDash val="solid"/>
+          </a:ln>
+        </p:spPr>
+      </p:sp>
+      <p:sp>
+        <p:nvSpPr>
+          <p:cNvPr id="36" name="Text 34"/>
+          <p:cNvSpPr/>
+          <p:nvPr/>
+        </p:nvSpPr>
+        <p:spPr>
+          <a:xfrm>
+            <a:off x="6428232" y="3364992"/>
+            <a:ext cx="1645920" cy="475488"/>
+          </a:xfrm>
+          <a:prstGeom prst="rect">
+            <a:avLst/>
+          </a:prstGeom>
+          <a:noFill/>
+          <a:ln/>
+        </p:spPr>
+        <p:txBody>
+          <a:bodyPr wrap="square" lIns="0" tIns="0" rIns="0" bIns="0" rtlCol="0" anchor="ctr"/>
+          <a:lstStyle/>
+          <a:p>
+            <a:pPr algn="ctr" indent="0" marL="0">
+              <a:buNone/>
+            </a:pPr>
+            <a:r>
+              <a:rPr lang="en-US" sz="1400" b="1" dirty="0">
+                <a:solidFill>
+                  <a:srgbClr val="0D9488"/>
+                </a:solidFill>
+                <a:latin typeface="Trebuchet MS" pitchFamily="34" charset="0"/>
+                <a:ea typeface="Trebuchet MS" pitchFamily="34" charset="-122"/>
+                <a:cs typeface="Trebuchet MS" pitchFamily="34" charset="-120"/>
+              </a:rPr>
+              <a:t>tant</a:t>
+            </a:r>
+            <a:endParaRPr lang="en-US" sz="1400" dirty="0"/>
+          </a:p>
+        </p:txBody>
+      </p:sp>
+      <p:sp>
+        <p:nvSpPr>
+          <p:cNvPr id="37" name="Shape 35"/>
           <p:cNvSpPr/>
           <p:nvPr/>
         </p:nvSpPr>
@@ -10373,7 +11036,7 @@
       </p:sp>
       <p:sp>
         <p:nvSpPr>
-          <p:cNvPr id="31" name="Text 29"/>
+          <p:cNvPr id="38" name="Text 36"/>
           <p:cNvSpPr/>
           <p:nvPr/>
         </p:nvSpPr>
@@ -10412,18 +11075,18 @@
       </p:sp>
       <p:sp>
         <p:nvSpPr>
-          <p:cNvPr id="32" name="Shape 30"/>
+          <p:cNvPr id="39" name="Shape 37"/>
           <p:cNvSpPr/>
           <p:nvPr/>
         </p:nvSpPr>
         <p:spPr>
           <a:xfrm>
             <a:off x="1874520" y="4096512"/>
-            <a:ext cx="6903720" cy="658368"/>
+            <a:ext cx="6903720" cy="804672"/>
           </a:xfrm>
           <a:prstGeom prst="rect">
             <a:avLst>
-              <a:gd name="adj" fmla="val 8333"/>
+              <a:gd name="adj" fmla="val 6818"/>
             </a:avLst>
           </a:prstGeom>
           <a:solidFill>
@@ -10439,18 +11102,18 @@
       </p:sp>
       <p:sp>
         <p:nvSpPr>
-          <p:cNvPr id="33" name="Shape 31"/>
-          <p:cNvSpPr/>
-          <p:nvPr/>
-        </p:nvSpPr>
-        <p:spPr>
-          <a:xfrm>
-            <a:off x="2254649" y="4169664"/>
-            <a:ext cx="685800" cy="475488"/>
+          <p:cNvPr id="40" name="Shape 38"/>
+          <p:cNvSpPr/>
+          <p:nvPr/>
+        </p:nvSpPr>
+        <p:spPr>
+          <a:xfrm>
+            <a:off x="1951330" y="4169664"/>
+            <a:ext cx="676656" cy="384048"/>
           </a:xfrm>
           <a:prstGeom prst="rect">
             <a:avLst>
-              <a:gd name="adj" fmla="val 7692"/>
+              <a:gd name="adj" fmla="val 9524"/>
             </a:avLst>
           </a:prstGeom>
           <a:solidFill>
@@ -10466,14 +11129,14 @@
       </p:sp>
       <p:sp>
         <p:nvSpPr>
-          <p:cNvPr id="34" name="Text 32"/>
-          <p:cNvSpPr/>
-          <p:nvPr/>
-        </p:nvSpPr>
-        <p:spPr>
-          <a:xfrm>
-            <a:off x="2254649" y="4169664"/>
-            <a:ext cx="685800" cy="475488"/>
+          <p:cNvPr id="41" name="Text 39"/>
+          <p:cNvSpPr/>
+          <p:nvPr/>
+        </p:nvSpPr>
+        <p:spPr>
+          <a:xfrm>
+            <a:off x="1951330" y="4169664"/>
+            <a:ext cx="676656" cy="384048"/>
           </a:xfrm>
           <a:prstGeom prst="rect">
             <a:avLst/>
@@ -10497,7 +11160,7 @@
                 <a:ea typeface="Trebuchet MS" pitchFamily="34" charset="-122"/>
                 <a:cs typeface="Trebuchet MS" pitchFamily="34" charset="-120"/>
               </a:rPr>
-              <a:t>r</a:t>
+              <a:t>a</a:t>
             </a:r>
             <a:endParaRPr lang="en-US" sz="900" dirty="0"/>
           </a:p>
@@ -10505,18 +11168,18 @@
       </p:sp>
       <p:sp>
         <p:nvSpPr>
-          <p:cNvPr id="35" name="Shape 33"/>
-          <p:cNvSpPr/>
-          <p:nvPr/>
-        </p:nvSpPr>
-        <p:spPr>
-          <a:xfrm>
-            <a:off x="3293146" y="4169664"/>
-            <a:ext cx="685800" cy="475488"/>
+          <p:cNvPr id="42" name="Shape 40"/>
+          <p:cNvSpPr/>
+          <p:nvPr/>
+        </p:nvSpPr>
+        <p:spPr>
+          <a:xfrm>
+            <a:off x="2677363" y="4169664"/>
+            <a:ext cx="676656" cy="384048"/>
           </a:xfrm>
           <a:prstGeom prst="rect">
             <a:avLst>
-              <a:gd name="adj" fmla="val 7692"/>
+              <a:gd name="adj" fmla="val 9524"/>
             </a:avLst>
           </a:prstGeom>
           <a:solidFill>
@@ -10532,14 +11195,14 @@
       </p:sp>
       <p:sp>
         <p:nvSpPr>
-          <p:cNvPr id="36" name="Text 34"/>
-          <p:cNvSpPr/>
-          <p:nvPr/>
-        </p:nvSpPr>
-        <p:spPr>
-          <a:xfrm>
-            <a:off x="3293146" y="4169664"/>
-            <a:ext cx="685800" cy="475488"/>
+          <p:cNvPr id="43" name="Text 41"/>
+          <p:cNvSpPr/>
+          <p:nvPr/>
+        </p:nvSpPr>
+        <p:spPr>
+          <a:xfrm>
+            <a:off x="2677363" y="4169664"/>
+            <a:ext cx="676656" cy="384048"/>
           </a:xfrm>
           <a:prstGeom prst="rect">
             <a:avLst/>
@@ -10563,7 +11226,7 @@
                 <a:ea typeface="Trebuchet MS" pitchFamily="34" charset="-122"/>
                 <a:cs typeface="Trebuchet MS" pitchFamily="34" charset="-120"/>
               </a:rPr>
-              <a:t>e</a:t>
+              <a:t>c</a:t>
             </a:r>
             <a:endParaRPr lang="en-US" sz="900" dirty="0"/>
           </a:p>
@@ -10571,18 +11234,18 @@
       </p:sp>
       <p:sp>
         <p:nvSpPr>
-          <p:cNvPr id="37" name="Shape 35"/>
-          <p:cNvSpPr/>
-          <p:nvPr/>
-        </p:nvSpPr>
-        <p:spPr>
-          <a:xfrm>
-            <a:off x="4331643" y="4169664"/>
-            <a:ext cx="685800" cy="475488"/>
+          <p:cNvPr id="44" name="Shape 42"/>
+          <p:cNvSpPr/>
+          <p:nvPr/>
+        </p:nvSpPr>
+        <p:spPr>
+          <a:xfrm>
+            <a:off x="3403397" y="4169664"/>
+            <a:ext cx="676656" cy="384048"/>
           </a:xfrm>
           <a:prstGeom prst="rect">
             <a:avLst>
-              <a:gd name="adj" fmla="val 7692"/>
+              <a:gd name="adj" fmla="val 9524"/>
             </a:avLst>
           </a:prstGeom>
           <a:solidFill>
@@ -10598,14 +11261,14 @@
       </p:sp>
       <p:sp>
         <p:nvSpPr>
-          <p:cNvPr id="38" name="Text 36"/>
-          <p:cNvSpPr/>
-          <p:nvPr/>
-        </p:nvSpPr>
-        <p:spPr>
-          <a:xfrm>
-            <a:off x="4331643" y="4169664"/>
-            <a:ext cx="685800" cy="475488"/>
+          <p:cNvPr id="45" name="Text 43"/>
+          <p:cNvSpPr/>
+          <p:nvPr/>
+        </p:nvSpPr>
+        <p:spPr>
+          <a:xfrm>
+            <a:off x="3403397" y="4169664"/>
+            <a:ext cx="676656" cy="384048"/>
           </a:xfrm>
           <a:prstGeom prst="rect">
             <a:avLst/>
@@ -10637,18 +11300,57 @@
       </p:sp>
       <p:sp>
         <p:nvSpPr>
-          <p:cNvPr id="39" name="Shape 37"/>
-          <p:cNvSpPr/>
-          <p:nvPr/>
-        </p:nvSpPr>
-        <p:spPr>
-          <a:xfrm>
-            <a:off x="5370141" y="4169664"/>
-            <a:ext cx="685800" cy="475488"/>
+          <p:cNvPr id="46" name="Text 44"/>
+          <p:cNvSpPr/>
+          <p:nvPr/>
+        </p:nvSpPr>
+        <p:spPr>
+          <a:xfrm>
+            <a:off x="3403397" y="4572000"/>
+            <a:ext cx="676656" cy="219456"/>
+          </a:xfrm>
+          <a:prstGeom prst="rect">
+            <a:avLst/>
+          </a:prstGeom>
+          <a:noFill/>
+          <a:ln/>
+        </p:spPr>
+        <p:txBody>
+          <a:bodyPr wrap="square" lIns="0" tIns="0" rIns="0" bIns="0" rtlCol="0" anchor="t"/>
+          <a:lstStyle/>
+          <a:p>
+            <a:pPr algn="ctr" indent="0" marL="0">
+              <a:buNone/>
+            </a:pPr>
+            <a:r>
+              <a:rPr lang="en-US" sz="750" i="1" dirty="0">
+                <a:solidFill>
+                  <a:srgbClr val="94A3B8"/>
+                </a:solidFill>
+                <a:latin typeface="Calibri" pitchFamily="34" charset="0"/>
+                <a:ea typeface="Calibri" pitchFamily="34" charset="-122"/>
+                <a:cs typeface="Calibri" pitchFamily="34" charset="-120"/>
+              </a:rPr>
+              <a:t>/k/</a:t>
+            </a:r>
+            <a:endParaRPr lang="en-US" sz="750" dirty="0"/>
+          </a:p>
+        </p:txBody>
+      </p:sp>
+      <p:sp>
+        <p:nvSpPr>
+          <p:cNvPr id="47" name="Shape 45"/>
+          <p:cNvSpPr/>
+          <p:nvPr/>
+        </p:nvSpPr>
+        <p:spPr>
+          <a:xfrm>
+            <a:off x="4129430" y="4169664"/>
+            <a:ext cx="676656" cy="384048"/>
           </a:xfrm>
           <a:prstGeom prst="rect">
             <a:avLst>
-              <a:gd name="adj" fmla="val 7692"/>
+              <a:gd name="adj" fmla="val 9524"/>
             </a:avLst>
           </a:prstGeom>
           <a:solidFill>
@@ -10664,14 +11366,14 @@
       </p:sp>
       <p:sp>
         <p:nvSpPr>
-          <p:cNvPr id="40" name="Text 38"/>
-          <p:cNvSpPr/>
-          <p:nvPr/>
-        </p:nvSpPr>
-        <p:spPr>
-          <a:xfrm>
-            <a:off x="5370141" y="4169664"/>
-            <a:ext cx="685800" cy="475488"/>
+          <p:cNvPr id="48" name="Text 46"/>
+          <p:cNvSpPr/>
+          <p:nvPr/>
+        </p:nvSpPr>
+        <p:spPr>
+          <a:xfrm>
+            <a:off x="4129430" y="4169664"/>
+            <a:ext cx="676656" cy="384048"/>
           </a:xfrm>
           <a:prstGeom prst="rect">
             <a:avLst/>
@@ -10703,18 +11405,18 @@
       </p:sp>
       <p:sp>
         <p:nvSpPr>
-          <p:cNvPr id="41" name="Shape 39"/>
-          <p:cNvSpPr/>
-          <p:nvPr/>
-        </p:nvSpPr>
-        <p:spPr>
-          <a:xfrm>
-            <a:off x="6408638" y="4169664"/>
-            <a:ext cx="685800" cy="475488"/>
+          <p:cNvPr id="49" name="Shape 47"/>
+          <p:cNvSpPr/>
+          <p:nvPr/>
+        </p:nvSpPr>
+        <p:spPr>
+          <a:xfrm>
+            <a:off x="4855464" y="4169664"/>
+            <a:ext cx="676656" cy="384048"/>
           </a:xfrm>
           <a:prstGeom prst="rect">
             <a:avLst>
-              <a:gd name="adj" fmla="val 7692"/>
+              <a:gd name="adj" fmla="val 9524"/>
             </a:avLst>
           </a:prstGeom>
           <a:solidFill>
@@ -10730,14 +11432,14 @@
       </p:sp>
       <p:sp>
         <p:nvSpPr>
-          <p:cNvPr id="42" name="Text 40"/>
-          <p:cNvSpPr/>
-          <p:nvPr/>
-        </p:nvSpPr>
-        <p:spPr>
-          <a:xfrm>
-            <a:off x="6408638" y="4169664"/>
-            <a:ext cx="685800" cy="475488"/>
+          <p:cNvPr id="50" name="Text 48"/>
+          <p:cNvSpPr/>
+          <p:nvPr/>
+        </p:nvSpPr>
+        <p:spPr>
+          <a:xfrm>
+            <a:off x="4855464" y="4169664"/>
+            <a:ext cx="676656" cy="384048"/>
           </a:xfrm>
           <a:prstGeom prst="rect">
             <a:avLst/>
@@ -10769,18 +11471,18 @@
       </p:sp>
       <p:sp>
         <p:nvSpPr>
-          <p:cNvPr id="43" name="Shape 41"/>
-          <p:cNvSpPr/>
-          <p:nvPr/>
-        </p:nvSpPr>
-        <p:spPr>
-          <a:xfrm>
-            <a:off x="7447135" y="4169664"/>
-            <a:ext cx="685800" cy="475488"/>
+          <p:cNvPr id="51" name="Shape 49"/>
+          <p:cNvSpPr/>
+          <p:nvPr/>
+        </p:nvSpPr>
+        <p:spPr>
+          <a:xfrm>
+            <a:off x="5581498" y="4169664"/>
+            <a:ext cx="676656" cy="384048"/>
           </a:xfrm>
           <a:prstGeom prst="rect">
             <a:avLst>
-              <a:gd name="adj" fmla="val 7692"/>
+              <a:gd name="adj" fmla="val 9524"/>
             </a:avLst>
           </a:prstGeom>
           <a:solidFill>
@@ -10796,14 +11498,212 @@
       </p:sp>
       <p:sp>
         <p:nvSpPr>
-          <p:cNvPr id="44" name="Text 42"/>
-          <p:cNvSpPr/>
-          <p:nvPr/>
-        </p:nvSpPr>
-        <p:spPr>
-          <a:xfrm>
-            <a:off x="7447135" y="4169664"/>
-            <a:ext cx="685800" cy="475488"/>
+          <p:cNvPr id="52" name="Text 50"/>
+          <p:cNvSpPr/>
+          <p:nvPr/>
+        </p:nvSpPr>
+        <p:spPr>
+          <a:xfrm>
+            <a:off x="5581498" y="4169664"/>
+            <a:ext cx="676656" cy="384048"/>
+          </a:xfrm>
+          <a:prstGeom prst="rect">
+            <a:avLst/>
+          </a:prstGeom>
+          <a:noFill/>
+          <a:ln/>
+        </p:spPr>
+        <p:txBody>
+          <a:bodyPr wrap="square" lIns="0" tIns="0" rIns="0" bIns="0" rtlCol="0" anchor="ctr"/>
+          <a:lstStyle/>
+          <a:p>
+            <a:pPr algn="ctr" indent="0" marL="0">
+              <a:buNone/>
+            </a:pPr>
+            <a:r>
+              <a:rPr lang="en-US" sz="900" b="1" dirty="0">
+                <a:solidFill>
+                  <a:srgbClr val="9D174D"/>
+                </a:solidFill>
+                <a:latin typeface="Trebuchet MS" pitchFamily="34" charset="0"/>
+                <a:ea typeface="Trebuchet MS" pitchFamily="34" charset="-122"/>
+                <a:cs typeface="Trebuchet MS" pitchFamily="34" charset="-120"/>
+              </a:rPr>
+              <a:t>t</a:t>
+            </a:r>
+            <a:endParaRPr lang="en-US" sz="900" dirty="0"/>
+          </a:p>
+        </p:txBody>
+      </p:sp>
+      <p:sp>
+        <p:nvSpPr>
+          <p:cNvPr id="53" name="Shape 51"/>
+          <p:cNvSpPr/>
+          <p:nvPr/>
+        </p:nvSpPr>
+        <p:spPr>
+          <a:xfrm>
+            <a:off x="6307531" y="4169664"/>
+            <a:ext cx="676656" cy="384048"/>
+          </a:xfrm>
+          <a:prstGeom prst="rect">
+            <a:avLst>
+              <a:gd name="adj" fmla="val 9524"/>
+            </a:avLst>
+          </a:prstGeom>
+          <a:solidFill>
+            <a:srgbClr val="FFFFFF"/>
+          </a:solidFill>
+          <a:ln w="12700">
+            <a:solidFill>
+              <a:srgbClr val="DB2777"/>
+            </a:solidFill>
+            <a:prstDash val="solid"/>
+          </a:ln>
+        </p:spPr>
+      </p:sp>
+      <p:sp>
+        <p:nvSpPr>
+          <p:cNvPr id="54" name="Text 52"/>
+          <p:cNvSpPr/>
+          <p:nvPr/>
+        </p:nvSpPr>
+        <p:spPr>
+          <a:xfrm>
+            <a:off x="6307531" y="4169664"/>
+            <a:ext cx="676656" cy="384048"/>
+          </a:xfrm>
+          <a:prstGeom prst="rect">
+            <a:avLst/>
+          </a:prstGeom>
+          <a:noFill/>
+          <a:ln/>
+        </p:spPr>
+        <p:txBody>
+          <a:bodyPr wrap="square" lIns="0" tIns="0" rIns="0" bIns="0" rtlCol="0" anchor="ctr"/>
+          <a:lstStyle/>
+          <a:p>
+            <a:pPr algn="ctr" indent="0" marL="0">
+              <a:buNone/>
+            </a:pPr>
+            <a:r>
+              <a:rPr lang="en-US" sz="900" b="1" dirty="0">
+                <a:solidFill>
+                  <a:srgbClr val="9D174D"/>
+                </a:solidFill>
+                <a:latin typeface="Trebuchet MS" pitchFamily="34" charset="0"/>
+                <a:ea typeface="Trebuchet MS" pitchFamily="34" charset="-122"/>
+                <a:cs typeface="Trebuchet MS" pitchFamily="34" charset="-120"/>
+              </a:rPr>
+              <a:t>a</a:t>
+            </a:r>
+            <a:endParaRPr lang="en-US" sz="900" dirty="0"/>
+          </a:p>
+        </p:txBody>
+      </p:sp>
+      <p:sp>
+        <p:nvSpPr>
+          <p:cNvPr id="55" name="Shape 53"/>
+          <p:cNvSpPr/>
+          <p:nvPr/>
+        </p:nvSpPr>
+        <p:spPr>
+          <a:xfrm>
+            <a:off x="7033565" y="4169664"/>
+            <a:ext cx="676656" cy="384048"/>
+          </a:xfrm>
+          <a:prstGeom prst="rect">
+            <a:avLst>
+              <a:gd name="adj" fmla="val 9524"/>
+            </a:avLst>
+          </a:prstGeom>
+          <a:solidFill>
+            <a:srgbClr val="FFFFFF"/>
+          </a:solidFill>
+          <a:ln w="12700">
+            <a:solidFill>
+              <a:srgbClr val="DB2777"/>
+            </a:solidFill>
+            <a:prstDash val="solid"/>
+          </a:ln>
+        </p:spPr>
+      </p:sp>
+      <p:sp>
+        <p:nvSpPr>
+          <p:cNvPr id="56" name="Text 54"/>
+          <p:cNvSpPr/>
+          <p:nvPr/>
+        </p:nvSpPr>
+        <p:spPr>
+          <a:xfrm>
+            <a:off x="7033565" y="4169664"/>
+            <a:ext cx="676656" cy="384048"/>
+          </a:xfrm>
+          <a:prstGeom prst="rect">
+            <a:avLst/>
+          </a:prstGeom>
+          <a:noFill/>
+          <a:ln/>
+        </p:spPr>
+        <p:txBody>
+          <a:bodyPr wrap="square" lIns="0" tIns="0" rIns="0" bIns="0" rtlCol="0" anchor="ctr"/>
+          <a:lstStyle/>
+          <a:p>
+            <a:pPr algn="ctr" indent="0" marL="0">
+              <a:buNone/>
+            </a:pPr>
+            <a:r>
+              <a:rPr lang="en-US" sz="900" b="1" dirty="0">
+                <a:solidFill>
+                  <a:srgbClr val="9D174D"/>
+                </a:solidFill>
+                <a:latin typeface="Trebuchet MS" pitchFamily="34" charset="0"/>
+                <a:ea typeface="Trebuchet MS" pitchFamily="34" charset="-122"/>
+                <a:cs typeface="Trebuchet MS" pitchFamily="34" charset="-120"/>
+              </a:rPr>
+              <a:t>n</a:t>
+            </a:r>
+            <a:endParaRPr lang="en-US" sz="900" dirty="0"/>
+          </a:p>
+        </p:txBody>
+      </p:sp>
+      <p:sp>
+        <p:nvSpPr>
+          <p:cNvPr id="57" name="Shape 55"/>
+          <p:cNvSpPr/>
+          <p:nvPr/>
+        </p:nvSpPr>
+        <p:spPr>
+          <a:xfrm>
+            <a:off x="7759598" y="4169664"/>
+            <a:ext cx="676656" cy="384048"/>
+          </a:xfrm>
+          <a:prstGeom prst="rect">
+            <a:avLst>
+              <a:gd name="adj" fmla="val 9524"/>
+            </a:avLst>
+          </a:prstGeom>
+          <a:solidFill>
+            <a:srgbClr val="FFFFFF"/>
+          </a:solidFill>
+          <a:ln w="12700">
+            <a:solidFill>
+              <a:srgbClr val="DB2777"/>
+            </a:solidFill>
+            <a:prstDash val="solid"/>
+          </a:ln>
+        </p:spPr>
+      </p:sp>
+      <p:sp>
+        <p:nvSpPr>
+          <p:cNvPr id="58" name="Text 56"/>
+          <p:cNvSpPr/>
+          <p:nvPr/>
+        </p:nvSpPr>
+        <p:spPr>
+          <a:xfrm>
+            <a:off x="7759598" y="4169664"/>
+            <a:ext cx="676656" cy="384048"/>
           </a:xfrm>
           <a:prstGeom prst="rect">
             <a:avLst/>
@@ -11119,7 +12019,7 @@
                 <a:ea typeface="Calibri" pitchFamily="34" charset="-122"/>
                 <a:cs typeface="Calibri" pitchFamily="34" charset="-120"/>
               </a:rPr>
-              <a:t>Word Labs  •  wordlabs.app  •  Root: 'count' = to number or reckon</a:t>
+              <a:t>Word Labs  •  wordlabs.app  •  Root: 'count' = to number or calculate</a:t>
             </a:r>
             <a:endParaRPr lang="en-US" sz="800" dirty="0"/>
           </a:p>
@@ -11258,7 +12158,7 @@
                 <a:ea typeface="Trebuchet MS" pitchFamily="34" charset="-122"/>
                 <a:cs typeface="Trebuchet MS" pitchFamily="34" charset="-120"/>
               </a:rPr>
-              <a:t>countless</a:t>
+              <a:t>discount</a:t>
             </a:r>
             <a:endParaRPr lang="en-US" sz="2800" dirty="0"/>
           </a:p>
@@ -11946,7 +12846,7 @@
                 <a:ea typeface="Calibri" pitchFamily="34" charset="-122"/>
                 <a:cs typeface="Calibri" pitchFamily="34" charset="-120"/>
               </a:rPr>
-              <a:t>Word Labs  •  wordlabs.app  •  Root: 'count' = to number or reckon</a:t>
+              <a:t>Word Labs  •  wordlabs.app  •  Root: 'count' = to number or calculate</a:t>
             </a:r>
             <a:endParaRPr lang="en-US" sz="800" dirty="0"/>
           </a:p>
@@ -12085,7 +12985,7 @@
                 <a:ea typeface="Trebuchet MS" pitchFamily="34" charset="-122"/>
                 <a:cs typeface="Trebuchet MS" pitchFamily="34" charset="-120"/>
               </a:rPr>
-              <a:t>countless</a:t>
+              <a:t>discount</a:t>
             </a:r>
             <a:endParaRPr lang="en-US" sz="2800" dirty="0"/>
           </a:p>
@@ -12174,11 +13074,11 @@
             </a:avLst>
           </a:prstGeom>
           <a:solidFill>
-            <a:srgbClr val="CCFBF1"/>
+            <a:srgbClr val="DDD6FE"/>
           </a:solidFill>
           <a:ln w="19050">
             <a:solidFill>
-              <a:srgbClr val="0D9488"/>
+              <a:srgbClr val="7C3AED"/>
             </a:solidFill>
             <a:prstDash val="solid"/>
           </a:ln>
@@ -12218,13 +13118,13 @@
             <a:r>
               <a:rPr lang="en-US" sz="1300" b="1" dirty="0">
                 <a:solidFill>
-                  <a:srgbClr val="0F766E"/>
+                  <a:srgbClr val="4C1D95"/>
                 </a:solidFill>
                 <a:latin typeface="Trebuchet MS" pitchFamily="34" charset="0"/>
                 <a:ea typeface="Trebuchet MS" pitchFamily="34" charset="-122"/>
                 <a:cs typeface="Trebuchet MS" pitchFamily="34" charset="-120"/>
               </a:rPr>
-              <a:t>count</a:t>
+              <a:t>dis</a:t>
             </a:r>
             <a:endParaRPr lang="en-US" sz="1300" dirty="0"/>
           </a:p>
@@ -12263,7 +13163,7 @@
                 <a:ea typeface="Calibri" pitchFamily="34" charset="-122"/>
                 <a:cs typeface="Calibri" pitchFamily="34" charset="-120"/>
               </a:rPr>
-              <a:t>to number or reckon</a:t>
+              <a:t>away, apart, not</a:t>
             </a:r>
             <a:endParaRPr lang="en-US" sz="850" dirty="0"/>
           </a:p>
@@ -12286,11 +13186,11 @@
             </a:avLst>
           </a:prstGeom>
           <a:solidFill>
-            <a:srgbClr val="DDD6FE"/>
+            <a:srgbClr val="CCFBF1"/>
           </a:solidFill>
           <a:ln w="19050">
             <a:solidFill>
-              <a:srgbClr val="7C3AED"/>
+              <a:srgbClr val="0D9488"/>
             </a:solidFill>
             <a:prstDash val="solid"/>
           </a:ln>
@@ -12330,13 +13230,13 @@
             <a:r>
               <a:rPr lang="en-US" sz="1300" b="1" dirty="0">
                 <a:solidFill>
-                  <a:srgbClr val="4C1D95"/>
+                  <a:srgbClr val="0F766E"/>
                 </a:solidFill>
                 <a:latin typeface="Trebuchet MS" pitchFamily="34" charset="0"/>
                 <a:ea typeface="Trebuchet MS" pitchFamily="34" charset="-122"/>
                 <a:cs typeface="Trebuchet MS" pitchFamily="34" charset="-120"/>
               </a:rPr>
-              <a:t>less</a:t>
+              <a:t>count</a:t>
             </a:r>
             <a:endParaRPr lang="en-US" sz="1300" dirty="0"/>
           </a:p>
@@ -12375,7 +13275,7 @@
                 <a:ea typeface="Calibri" pitchFamily="34" charset="-122"/>
                 <a:cs typeface="Calibri" pitchFamily="34" charset="-120"/>
               </a:rPr>
-              <a:t>without</a:t>
+              <a:t>to number or calculate</a:t>
             </a:r>
             <a:endParaRPr lang="en-US" sz="850" dirty="0"/>
           </a:p>
@@ -12931,7 +13831,7 @@
                 <a:ea typeface="Calibri" pitchFamily="34" charset="-122"/>
                 <a:cs typeface="Calibri" pitchFamily="34" charset="-120"/>
               </a:rPr>
-              <a:t>Word Labs  •  wordlabs.app  •  Root: 'count' = to number or reckon</a:t>
+              <a:t>Word Labs  •  wordlabs.app  •  Root: 'count' = to number or calculate</a:t>
             </a:r>
             <a:endParaRPr lang="en-US" sz="800" dirty="0"/>
           </a:p>
@@ -13070,7 +13970,7 @@
                 <a:ea typeface="Trebuchet MS" pitchFamily="34" charset="-122"/>
                 <a:cs typeface="Trebuchet MS" pitchFamily="34" charset="-120"/>
               </a:rPr>
-              <a:t>countless</a:t>
+              <a:t>discount</a:t>
             </a:r>
             <a:endParaRPr lang="en-US" sz="2800" dirty="0"/>
           </a:p>
@@ -13159,11 +14059,11 @@
             </a:avLst>
           </a:prstGeom>
           <a:solidFill>
-            <a:srgbClr val="CCFBF1"/>
+            <a:srgbClr val="DDD6FE"/>
           </a:solidFill>
           <a:ln w="19050">
             <a:solidFill>
-              <a:srgbClr val="0D9488"/>
+              <a:srgbClr val="7C3AED"/>
             </a:solidFill>
             <a:prstDash val="solid"/>
           </a:ln>
@@ -13203,13 +14103,13 @@
             <a:r>
               <a:rPr lang="en-US" sz="1300" b="1" dirty="0">
                 <a:solidFill>
-                  <a:srgbClr val="0F766E"/>
+                  <a:srgbClr val="4C1D95"/>
                 </a:solidFill>
                 <a:latin typeface="Trebuchet MS" pitchFamily="34" charset="0"/>
                 <a:ea typeface="Trebuchet MS" pitchFamily="34" charset="-122"/>
                 <a:cs typeface="Trebuchet MS" pitchFamily="34" charset="-120"/>
               </a:rPr>
-              <a:t>count</a:t>
+              <a:t>dis</a:t>
             </a:r>
             <a:endParaRPr lang="en-US" sz="1300" dirty="0"/>
           </a:p>
@@ -13248,7 +14148,7 @@
                 <a:ea typeface="Calibri" pitchFamily="34" charset="-122"/>
                 <a:cs typeface="Calibri" pitchFamily="34" charset="-120"/>
               </a:rPr>
-              <a:t>to number or reckon</a:t>
+              <a:t>away, apart, not</a:t>
             </a:r>
             <a:endParaRPr lang="en-US" sz="850" dirty="0"/>
           </a:p>
@@ -13271,11 +14171,11 @@
             </a:avLst>
           </a:prstGeom>
           <a:solidFill>
-            <a:srgbClr val="DDD6FE"/>
+            <a:srgbClr val="CCFBF1"/>
           </a:solidFill>
           <a:ln w="19050">
             <a:solidFill>
-              <a:srgbClr val="7C3AED"/>
+              <a:srgbClr val="0D9488"/>
             </a:solidFill>
             <a:prstDash val="solid"/>
           </a:ln>
@@ -13315,13 +14215,13 @@
             <a:r>
               <a:rPr lang="en-US" sz="1300" b="1" dirty="0">
                 <a:solidFill>
-                  <a:srgbClr val="4C1D95"/>
+                  <a:srgbClr val="0F766E"/>
                 </a:solidFill>
                 <a:latin typeface="Trebuchet MS" pitchFamily="34" charset="0"/>
                 <a:ea typeface="Trebuchet MS" pitchFamily="34" charset="-122"/>
                 <a:cs typeface="Trebuchet MS" pitchFamily="34" charset="-120"/>
               </a:rPr>
-              <a:t>less</a:t>
+              <a:t>count</a:t>
             </a:r>
             <a:endParaRPr lang="en-US" sz="1300" dirty="0"/>
           </a:p>
@@ -13360,7 +14260,7 @@
                 <a:ea typeface="Calibri" pitchFamily="34" charset="-122"/>
                 <a:cs typeface="Calibri" pitchFamily="34" charset="-120"/>
               </a:rPr>
-              <a:t>without</a:t>
+              <a:t>to number or calculate</a:t>
             </a:r>
             <a:endParaRPr lang="en-US" sz="850" dirty="0"/>
           </a:p>
@@ -13519,7 +14419,7 @@
                 <a:ea typeface="Trebuchet MS" pitchFamily="34" charset="-122"/>
                 <a:cs typeface="Trebuchet MS" pitchFamily="34" charset="-120"/>
               </a:rPr>
-              <a:t>count</a:t>
+              <a:t>dis</a:t>
             </a:r>
             <a:endParaRPr lang="en-US" sz="1400" dirty="0"/>
           </a:p>
@@ -13624,7 +14524,7 @@
                 <a:ea typeface="Trebuchet MS" pitchFamily="34" charset="-122"/>
                 <a:cs typeface="Trebuchet MS" pitchFamily="34" charset="-120"/>
               </a:rPr>
-              <a:t>less</a:t>
+              <a:t>count</a:t>
             </a:r>
             <a:endParaRPr lang="en-US" sz="1400" dirty="0"/>
           </a:p>
@@ -13957,7 +14857,7 @@
                 <a:ea typeface="Calibri" pitchFamily="34" charset="-122"/>
                 <a:cs typeface="Calibri" pitchFamily="34" charset="-120"/>
               </a:rPr>
-              <a:t>Root 'count' — to number or reckon</a:t>
+              <a:t>Root 'count' — to number or calculate</a:t>
             </a:r>
             <a:endParaRPr lang="en-US" sz="1600" dirty="0"/>
           </a:p>
@@ -14313,7 +15213,7 @@
                 <a:ea typeface="Calibri" pitchFamily="34" charset="-122"/>
                 <a:cs typeface="Calibri" pitchFamily="34" charset="-120"/>
               </a:rPr>
-              <a:t>Word Labs  •  wordlabs.app  •  Root: 'count' = to number or reckon</a:t>
+              <a:t>Word Labs  •  wordlabs.app  •  Root: 'count' = to number or calculate</a:t>
             </a:r>
             <a:endParaRPr lang="en-US" sz="800" dirty="0"/>
           </a:p>
@@ -14452,7 +15352,7 @@
                 <a:ea typeface="Trebuchet MS" pitchFamily="34" charset="-122"/>
                 <a:cs typeface="Trebuchet MS" pitchFamily="34" charset="-120"/>
               </a:rPr>
-              <a:t>countless</a:t>
+              <a:t>discount</a:t>
             </a:r>
             <a:endParaRPr lang="en-US" sz="2800" dirty="0"/>
           </a:p>
@@ -14541,11 +15441,11 @@
             </a:avLst>
           </a:prstGeom>
           <a:solidFill>
-            <a:srgbClr val="CCFBF1"/>
+            <a:srgbClr val="DDD6FE"/>
           </a:solidFill>
           <a:ln w="19050">
             <a:solidFill>
-              <a:srgbClr val="0D9488"/>
+              <a:srgbClr val="7C3AED"/>
             </a:solidFill>
             <a:prstDash val="solid"/>
           </a:ln>
@@ -14585,13 +15485,13 @@
             <a:r>
               <a:rPr lang="en-US" sz="1300" b="1" dirty="0">
                 <a:solidFill>
-                  <a:srgbClr val="0F766E"/>
+                  <a:srgbClr val="4C1D95"/>
                 </a:solidFill>
                 <a:latin typeface="Trebuchet MS" pitchFamily="34" charset="0"/>
                 <a:ea typeface="Trebuchet MS" pitchFamily="34" charset="-122"/>
                 <a:cs typeface="Trebuchet MS" pitchFamily="34" charset="-120"/>
               </a:rPr>
-              <a:t>count</a:t>
+              <a:t>dis</a:t>
             </a:r>
             <a:endParaRPr lang="en-US" sz="1300" dirty="0"/>
           </a:p>
@@ -14630,7 +15530,7 @@
                 <a:ea typeface="Calibri" pitchFamily="34" charset="-122"/>
                 <a:cs typeface="Calibri" pitchFamily="34" charset="-120"/>
               </a:rPr>
-              <a:t>to number or reckon</a:t>
+              <a:t>away, apart, not</a:t>
             </a:r>
             <a:endParaRPr lang="en-US" sz="850" dirty="0"/>
           </a:p>
@@ -14653,11 +15553,11 @@
             </a:avLst>
           </a:prstGeom>
           <a:solidFill>
-            <a:srgbClr val="DDD6FE"/>
+            <a:srgbClr val="CCFBF1"/>
           </a:solidFill>
           <a:ln w="19050">
             <a:solidFill>
-              <a:srgbClr val="7C3AED"/>
+              <a:srgbClr val="0D9488"/>
             </a:solidFill>
             <a:prstDash val="solid"/>
           </a:ln>
@@ -14697,13 +15597,13 @@
             <a:r>
               <a:rPr lang="en-US" sz="1300" b="1" dirty="0">
                 <a:solidFill>
-                  <a:srgbClr val="4C1D95"/>
+                  <a:srgbClr val="0F766E"/>
                 </a:solidFill>
                 <a:latin typeface="Trebuchet MS" pitchFamily="34" charset="0"/>
                 <a:ea typeface="Trebuchet MS" pitchFamily="34" charset="-122"/>
                 <a:cs typeface="Trebuchet MS" pitchFamily="34" charset="-120"/>
               </a:rPr>
-              <a:t>less</a:t>
+              <a:t>count</a:t>
             </a:r>
             <a:endParaRPr lang="en-US" sz="1300" dirty="0"/>
           </a:p>
@@ -14742,7 +15642,7 @@
                 <a:ea typeface="Calibri" pitchFamily="34" charset="-122"/>
                 <a:cs typeface="Calibri" pitchFamily="34" charset="-120"/>
               </a:rPr>
-              <a:t>without</a:t>
+              <a:t>to number or calculate</a:t>
             </a:r>
             <a:endParaRPr lang="en-US" sz="850" dirty="0"/>
           </a:p>
@@ -14901,7 +15801,7 @@
                 <a:ea typeface="Trebuchet MS" pitchFamily="34" charset="-122"/>
                 <a:cs typeface="Trebuchet MS" pitchFamily="34" charset="-120"/>
               </a:rPr>
-              <a:t>count</a:t>
+              <a:t>dis</a:t>
             </a:r>
             <a:endParaRPr lang="en-US" sz="1400" dirty="0"/>
           </a:p>
@@ -15006,7 +15906,7 @@
                 <a:ea typeface="Trebuchet MS" pitchFamily="34" charset="-122"/>
                 <a:cs typeface="Trebuchet MS" pitchFamily="34" charset="-120"/>
               </a:rPr>
-              <a:t>less</a:t>
+              <a:t>count</a:t>
             </a:r>
             <a:endParaRPr lang="en-US" sz="1400" dirty="0"/>
           </a:p>
@@ -15087,11 +15987,11 @@
         <p:spPr>
           <a:xfrm>
             <a:off x="1874520" y="4096512"/>
-            <a:ext cx="6903720" cy="658368"/>
+            <a:ext cx="6903720" cy="804672"/>
           </a:xfrm>
           <a:prstGeom prst="rect">
             <a:avLst>
-              <a:gd name="adj" fmla="val 8333"/>
+              <a:gd name="adj" fmla="val 6818"/>
             </a:avLst>
           </a:prstGeom>
           <a:solidFill>
@@ -15114,11 +16014,11 @@
         <p:spPr>
           <a:xfrm>
             <a:off x="2124837" y="4169664"/>
-            <a:ext cx="685800" cy="475488"/>
+            <a:ext cx="685800" cy="384048"/>
           </a:xfrm>
           <a:prstGeom prst="rect">
             <a:avLst>
-              <a:gd name="adj" fmla="val 7692"/>
+              <a:gd name="adj" fmla="val 9524"/>
             </a:avLst>
           </a:prstGeom>
           <a:solidFill>
@@ -15141,7 +16041,7 @@
         <p:spPr>
           <a:xfrm>
             <a:off x="2124837" y="4169664"/>
-            <a:ext cx="685800" cy="475488"/>
+            <a:ext cx="685800" cy="384048"/>
           </a:xfrm>
           <a:prstGeom prst="rect">
             <a:avLst/>
@@ -15165,7 +16065,7 @@
                 <a:ea typeface="Trebuchet MS" pitchFamily="34" charset="-122"/>
                 <a:cs typeface="Trebuchet MS" pitchFamily="34" charset="-120"/>
               </a:rPr>
-              <a:t>c</a:t>
+              <a:t>d</a:t>
             </a:r>
             <a:endParaRPr lang="en-US" sz="900" dirty="0"/>
           </a:p>
@@ -15180,11 +16080,11 @@
         <p:spPr>
           <a:xfrm>
             <a:off x="3033522" y="4169664"/>
-            <a:ext cx="685800" cy="475488"/>
+            <a:ext cx="685800" cy="384048"/>
           </a:xfrm>
           <a:prstGeom prst="rect">
             <a:avLst>
-              <a:gd name="adj" fmla="val 7692"/>
+              <a:gd name="adj" fmla="val 9524"/>
             </a:avLst>
           </a:prstGeom>
           <a:solidFill>
@@ -15207,7 +16107,7 @@
         <p:spPr>
           <a:xfrm>
             <a:off x="3033522" y="4169664"/>
-            <a:ext cx="685800" cy="475488"/>
+            <a:ext cx="685800" cy="384048"/>
           </a:xfrm>
           <a:prstGeom prst="rect">
             <a:avLst/>
@@ -15231,7 +16131,7 @@
                 <a:ea typeface="Trebuchet MS" pitchFamily="34" charset="-122"/>
                 <a:cs typeface="Trebuchet MS" pitchFamily="34" charset="-120"/>
               </a:rPr>
-              <a:t>ou</a:t>
+              <a:t>i</a:t>
             </a:r>
             <a:endParaRPr lang="en-US" sz="900" dirty="0"/>
           </a:p>
@@ -15246,11 +16146,11 @@
         <p:spPr>
           <a:xfrm>
             <a:off x="3942207" y="4169664"/>
-            <a:ext cx="685800" cy="475488"/>
+            <a:ext cx="685800" cy="384048"/>
           </a:xfrm>
           <a:prstGeom prst="rect">
             <a:avLst>
-              <a:gd name="adj" fmla="val 7692"/>
+              <a:gd name="adj" fmla="val 9524"/>
             </a:avLst>
           </a:prstGeom>
           <a:solidFill>
@@ -15273,7 +16173,7 @@
         <p:spPr>
           <a:xfrm>
             <a:off x="3942207" y="4169664"/>
-            <a:ext cx="685800" cy="475488"/>
+            <a:ext cx="685800" cy="384048"/>
           </a:xfrm>
           <a:prstGeom prst="rect">
             <a:avLst/>
@@ -15297,7 +16197,7 @@
                 <a:ea typeface="Trebuchet MS" pitchFamily="34" charset="-122"/>
                 <a:cs typeface="Trebuchet MS" pitchFamily="34" charset="-120"/>
               </a:rPr>
-              <a:t>n</a:t>
+              <a:t>s</a:t>
             </a:r>
             <a:endParaRPr lang="en-US" sz="900" dirty="0"/>
           </a:p>
@@ -15312,11 +16212,11 @@
         <p:spPr>
           <a:xfrm>
             <a:off x="4850892" y="4169664"/>
-            <a:ext cx="685800" cy="475488"/>
+            <a:ext cx="685800" cy="384048"/>
           </a:xfrm>
           <a:prstGeom prst="rect">
             <a:avLst>
-              <a:gd name="adj" fmla="val 7692"/>
+              <a:gd name="adj" fmla="val 9524"/>
             </a:avLst>
           </a:prstGeom>
           <a:solidFill>
@@ -15339,7 +16239,7 @@
         <p:spPr>
           <a:xfrm>
             <a:off x="4850892" y="4169664"/>
-            <a:ext cx="685800" cy="475488"/>
+            <a:ext cx="685800" cy="384048"/>
           </a:xfrm>
           <a:prstGeom prst="rect">
             <a:avLst/>
@@ -15363,7 +16263,7 @@
                 <a:ea typeface="Trebuchet MS" pitchFamily="34" charset="-122"/>
                 <a:cs typeface="Trebuchet MS" pitchFamily="34" charset="-120"/>
               </a:rPr>
-              <a:t>t</a:t>
+              <a:t>c</a:t>
             </a:r>
             <a:endParaRPr lang="en-US" sz="900" dirty="0"/>
           </a:p>
@@ -15371,18 +16271,57 @@
       </p:sp>
       <p:sp>
         <p:nvSpPr>
-          <p:cNvPr id="41" name="Shape 39"/>
+          <p:cNvPr id="41" name="Text 39"/>
+          <p:cNvSpPr/>
+          <p:nvPr/>
+        </p:nvSpPr>
+        <p:spPr>
+          <a:xfrm>
+            <a:off x="4850892" y="4572000"/>
+            <a:ext cx="685800" cy="219456"/>
+          </a:xfrm>
+          <a:prstGeom prst="rect">
+            <a:avLst/>
+          </a:prstGeom>
+          <a:noFill/>
+          <a:ln/>
+        </p:spPr>
+        <p:txBody>
+          <a:bodyPr wrap="square" lIns="0" tIns="0" rIns="0" bIns="0" rtlCol="0" anchor="t"/>
+          <a:lstStyle/>
+          <a:p>
+            <a:pPr algn="ctr" indent="0" marL="0">
+              <a:buNone/>
+            </a:pPr>
+            <a:r>
+              <a:rPr lang="en-US" sz="750" i="1" dirty="0">
+                <a:solidFill>
+                  <a:srgbClr val="94A3B8"/>
+                </a:solidFill>
+                <a:latin typeface="Calibri" pitchFamily="34" charset="0"/>
+                <a:ea typeface="Calibri" pitchFamily="34" charset="-122"/>
+                <a:cs typeface="Calibri" pitchFamily="34" charset="-120"/>
+              </a:rPr>
+              <a:t>/k/</a:t>
+            </a:r>
+            <a:endParaRPr lang="en-US" sz="750" dirty="0"/>
+          </a:p>
+        </p:txBody>
+      </p:sp>
+      <p:sp>
+        <p:nvSpPr>
+          <p:cNvPr id="42" name="Shape 40"/>
           <p:cNvSpPr/>
           <p:nvPr/>
         </p:nvSpPr>
         <p:spPr>
           <a:xfrm>
             <a:off x="5759577" y="4169664"/>
-            <a:ext cx="685800" cy="475488"/>
+            <a:ext cx="685800" cy="384048"/>
           </a:xfrm>
           <a:prstGeom prst="rect">
             <a:avLst>
-              <a:gd name="adj" fmla="val 7692"/>
+              <a:gd name="adj" fmla="val 9524"/>
             </a:avLst>
           </a:prstGeom>
           <a:solidFill>
@@ -15398,14 +16337,14 @@
       </p:sp>
       <p:sp>
         <p:nvSpPr>
-          <p:cNvPr id="42" name="Text 40"/>
+          <p:cNvPr id="43" name="Text 41"/>
           <p:cNvSpPr/>
           <p:nvPr/>
         </p:nvSpPr>
         <p:spPr>
           <a:xfrm>
             <a:off x="5759577" y="4169664"/>
-            <a:ext cx="685800" cy="475488"/>
+            <a:ext cx="685800" cy="384048"/>
           </a:xfrm>
           <a:prstGeom prst="rect">
             <a:avLst/>
@@ -15429,7 +16368,7 @@
                 <a:ea typeface="Trebuchet MS" pitchFamily="34" charset="-122"/>
                 <a:cs typeface="Trebuchet MS" pitchFamily="34" charset="-120"/>
               </a:rPr>
-              <a:t>l</a:t>
+              <a:t>ou</a:t>
             </a:r>
             <a:endParaRPr lang="en-US" sz="900" dirty="0"/>
           </a:p>
@@ -15437,18 +16376,18 @@
       </p:sp>
       <p:sp>
         <p:nvSpPr>
-          <p:cNvPr id="43" name="Shape 41"/>
+          <p:cNvPr id="44" name="Shape 42"/>
           <p:cNvSpPr/>
           <p:nvPr/>
         </p:nvSpPr>
         <p:spPr>
           <a:xfrm>
             <a:off x="6668262" y="4169664"/>
-            <a:ext cx="685800" cy="475488"/>
+            <a:ext cx="685800" cy="384048"/>
           </a:xfrm>
           <a:prstGeom prst="rect">
             <a:avLst>
-              <a:gd name="adj" fmla="val 7692"/>
+              <a:gd name="adj" fmla="val 9524"/>
             </a:avLst>
           </a:prstGeom>
           <a:solidFill>
@@ -15464,14 +16403,14 @@
       </p:sp>
       <p:sp>
         <p:nvSpPr>
-          <p:cNvPr id="44" name="Text 42"/>
+          <p:cNvPr id="45" name="Text 43"/>
           <p:cNvSpPr/>
           <p:nvPr/>
         </p:nvSpPr>
         <p:spPr>
           <a:xfrm>
             <a:off x="6668262" y="4169664"/>
-            <a:ext cx="685800" cy="475488"/>
+            <a:ext cx="685800" cy="384048"/>
           </a:xfrm>
           <a:prstGeom prst="rect">
             <a:avLst/>
@@ -15495,7 +16434,7 @@
                 <a:ea typeface="Trebuchet MS" pitchFamily="34" charset="-122"/>
                 <a:cs typeface="Trebuchet MS" pitchFamily="34" charset="-120"/>
               </a:rPr>
-              <a:t>e</a:t>
+              <a:t>n</a:t>
             </a:r>
             <a:endParaRPr lang="en-US" sz="900" dirty="0"/>
           </a:p>
@@ -15503,18 +16442,18 @@
       </p:sp>
       <p:sp>
         <p:nvSpPr>
-          <p:cNvPr id="45" name="Shape 43"/>
+          <p:cNvPr id="46" name="Shape 44"/>
           <p:cNvSpPr/>
           <p:nvPr/>
         </p:nvSpPr>
         <p:spPr>
           <a:xfrm>
             <a:off x="7576947" y="4169664"/>
-            <a:ext cx="685800" cy="475488"/>
+            <a:ext cx="685800" cy="384048"/>
           </a:xfrm>
           <a:prstGeom prst="rect">
             <a:avLst>
-              <a:gd name="adj" fmla="val 7692"/>
+              <a:gd name="adj" fmla="val 9524"/>
             </a:avLst>
           </a:prstGeom>
           <a:solidFill>
@@ -15530,14 +16469,14 @@
       </p:sp>
       <p:sp>
         <p:nvSpPr>
-          <p:cNvPr id="46" name="Text 44"/>
+          <p:cNvPr id="47" name="Text 45"/>
           <p:cNvSpPr/>
           <p:nvPr/>
         </p:nvSpPr>
         <p:spPr>
           <a:xfrm>
             <a:off x="7576947" y="4169664"/>
-            <a:ext cx="685800" cy="475488"/>
+            <a:ext cx="685800" cy="384048"/>
           </a:xfrm>
           <a:prstGeom prst="rect">
             <a:avLst/>
@@ -15561,7 +16500,7 @@
                 <a:ea typeface="Trebuchet MS" pitchFamily="34" charset="-122"/>
                 <a:cs typeface="Trebuchet MS" pitchFamily="34" charset="-120"/>
               </a:rPr>
-              <a:t>ss</a:t>
+              <a:t>t</a:t>
             </a:r>
             <a:endParaRPr lang="en-US" sz="900" dirty="0"/>
           </a:p>
@@ -16135,7 +17074,7 @@
                 <a:ea typeface="Calibri" pitchFamily="34" charset="-122"/>
                 <a:cs typeface="Calibri" pitchFamily="34" charset="-120"/>
               </a:rPr>
-              <a:t>Word Labs  •  wordlabs.app  •  Root: 'count' = to number or reckon</a:t>
+              <a:t>Word Labs  •  wordlabs.app  •  Root: 'count' = to number or calculate</a:t>
             </a:r>
             <a:endParaRPr lang="en-US" sz="800" dirty="0"/>
           </a:p>
@@ -16775,7 +17714,7 @@
                 <a:ea typeface="Calibri" pitchFamily="34" charset="-122"/>
                 <a:cs typeface="Calibri" pitchFamily="34" charset="-120"/>
               </a:rPr>
-              <a:t>Word Labs  •  wordlabs.app  •  Root: 'count' = to number or reckon</a:t>
+              <a:t>Word Labs  •  wordlabs.app  •  Root: 'count' = to number or calculate</a:t>
             </a:r>
             <a:endParaRPr lang="en-US" sz="800" dirty="0"/>
           </a:p>
@@ -16887,7 +17826,7 @@
                 <a:ea typeface="Calibri" pitchFamily="34" charset="-122"/>
                 <a:cs typeface="Calibri" pitchFamily="34" charset="-120"/>
               </a:rPr>
-              <a:t>The </a:t>
+              <a:t>She was </a:t>
             </a:r>
             <a:pPr algn="l" indent="0" marL="0">
               <a:buNone/>
@@ -16904,7 +17843,7 @@
                 <a:ea typeface="Calibri" pitchFamily="34" charset="-122"/>
                 <a:cs typeface="Calibri" pitchFamily="34" charset="-120"/>
               </a:rPr>
-              <a:t>accountant</a:t>
+              <a:t>accountable</a:t>
             </a:r>
             <a:pPr algn="l" indent="0" marL="0">
               <a:buNone/>
@@ -16918,7 +17857,7 @@
                 <a:ea typeface="Calibri" pitchFamily="34" charset="-122"/>
                 <a:cs typeface="Calibri" pitchFamily="34" charset="-120"/>
               </a:rPr>
-              <a:t> had </a:t>
+              <a:t> for the </a:t>
             </a:r>
             <a:pPr algn="l" indent="0" marL="0">
               <a:buNone/>
@@ -16935,7 +17874,7 @@
                 <a:ea typeface="Calibri" pitchFamily="34" charset="-122"/>
                 <a:cs typeface="Calibri" pitchFamily="34" charset="-120"/>
               </a:rPr>
-              <a:t>miscounted</a:t>
+              <a:t>recount</a:t>
             </a:r>
             <a:pPr algn="l" indent="0" marL="0">
               <a:buNone/>
@@ -16949,7 +17888,7 @@
                 <a:ea typeface="Calibri" pitchFamily="34" charset="-122"/>
                 <a:cs typeface="Calibri" pitchFamily="34" charset="-120"/>
               </a:rPr>
-              <a:t> the </a:t>
+              <a:t>, but there were </a:t>
             </a:r>
             <a:pPr algn="l" indent="0" marL="0">
               <a:buNone/>
@@ -16966,7 +17905,7 @@
                 <a:ea typeface="Calibri" pitchFamily="34" charset="-122"/>
                 <a:cs typeface="Calibri" pitchFamily="34" charset="-120"/>
               </a:rPr>
-              <a:t>discount</a:t>
+              <a:t>countless</a:t>
             </a:r>
             <a:pPr algn="l" indent="0" marL="0">
               <a:buNone/>
@@ -16980,7 +17919,7 @@
                 <a:ea typeface="Calibri" pitchFamily="34" charset="-122"/>
                 <a:cs typeface="Calibri" pitchFamily="34" charset="-120"/>
               </a:rPr>
-              <a:t>, so she needed to recount all the figures.</a:t>
+              <a:t> errors to fix!</a:t>
             </a:r>
             <a:endParaRPr lang="en-US" sz="1800" dirty="0"/>
           </a:p>
@@ -17135,7 +18074,7 @@
                 <a:ea typeface="Trebuchet MS" pitchFamily="34" charset="-122"/>
                 <a:cs typeface="Trebuchet MS" pitchFamily="34" charset="-120"/>
               </a:rPr>
-              <a:t>accountant</a:t>
+              <a:t>accountable</a:t>
             </a:r>
             <a:endParaRPr lang="en-US" sz="1400" dirty="0"/>
           </a:p>
@@ -17263,7 +18202,7 @@
                 <a:ea typeface="Trebuchet MS" pitchFamily="34" charset="-122"/>
                 <a:cs typeface="Trebuchet MS" pitchFamily="34" charset="-120"/>
               </a:rPr>
-              <a:t>miscounted</a:t>
+              <a:t>recount</a:t>
             </a:r>
             <a:endParaRPr lang="en-US" sz="1400" dirty="0"/>
           </a:p>
@@ -17391,7 +18330,7 @@
                 <a:ea typeface="Trebuchet MS" pitchFamily="34" charset="-122"/>
                 <a:cs typeface="Trebuchet MS" pitchFamily="34" charset="-120"/>
               </a:rPr>
-              <a:t>discount</a:t>
+              <a:t>countless</a:t>
             </a:r>
             <a:endParaRPr lang="en-US" sz="1400" dirty="0"/>
           </a:p>
@@ -17722,7 +18661,7 @@
                 <a:ea typeface="Calibri" pitchFamily="34" charset="-122"/>
                 <a:cs typeface="Calibri" pitchFamily="34" charset="-120"/>
               </a:rPr>
-              <a:t>Word Labs  •  wordlabs.app  •  Root: 'count' = to number or reckon</a:t>
+              <a:t>Word Labs  •  wordlabs.app  •  Root: 'count' = to number or calculate</a:t>
             </a:r>
             <a:endParaRPr lang="en-US" sz="800" dirty="0"/>
           </a:p>
@@ -17861,7 +18800,7 @@
                 <a:ea typeface="Trebuchet MS" pitchFamily="34" charset="-122"/>
                 <a:cs typeface="Trebuchet MS" pitchFamily="34" charset="-120"/>
               </a:rPr>
-              <a:t>accountant</a:t>
+              <a:t>accountable</a:t>
             </a:r>
             <a:endParaRPr lang="en-US" sz="2800" dirty="0"/>
           </a:p>
@@ -18549,7 +19488,7 @@
                 <a:ea typeface="Calibri" pitchFamily="34" charset="-122"/>
                 <a:cs typeface="Calibri" pitchFamily="34" charset="-120"/>
               </a:rPr>
-              <a:t>Word Labs  •  wordlabs.app  •  Root: 'count' = to number or reckon</a:t>
+              <a:t>Word Labs  •  wordlabs.app  •  Root: 'count' = to number or calculate</a:t>
             </a:r>
             <a:endParaRPr lang="en-US" sz="800" dirty="0"/>
           </a:p>
@@ -18688,7 +19627,7 @@
                 <a:ea typeface="Trebuchet MS" pitchFamily="34" charset="-122"/>
                 <a:cs typeface="Trebuchet MS" pitchFamily="34" charset="-120"/>
               </a:rPr>
-              <a:t>accountant</a:t>
+              <a:t>accountable</a:t>
             </a:r>
             <a:endParaRPr lang="en-US" sz="2800" dirty="0"/>
           </a:p>
@@ -19017,7 +19956,7 @@
                 <a:ea typeface="Calibri" pitchFamily="34" charset="-122"/>
                 <a:cs typeface="Calibri" pitchFamily="34" charset="-120"/>
               </a:rPr>
-              <a:t>to number or reckon</a:t>
+              <a:t>to number or calculate</a:t>
             </a:r>
             <a:endParaRPr lang="en-US" sz="850" dirty="0"/>
           </a:p>
@@ -19090,7 +20029,7 @@
                 <a:ea typeface="Trebuchet MS" pitchFamily="34" charset="-122"/>
                 <a:cs typeface="Trebuchet MS" pitchFamily="34" charset="-120"/>
               </a:rPr>
-              <a:t>ant</a:t>
+              <a:t>able</a:t>
             </a:r>
             <a:endParaRPr lang="en-US" sz="1300" dirty="0"/>
           </a:p>
@@ -19129,7 +20068,7 @@
                 <a:ea typeface="Calibri" pitchFamily="34" charset="-122"/>
                 <a:cs typeface="Calibri" pitchFamily="34" charset="-120"/>
               </a:rPr>
-              <a:t>person who does something</a:t>
+              <a:t>able to be, capable of</a:t>
             </a:r>
             <a:endParaRPr lang="en-US" sz="850" dirty="0"/>
           </a:p>
@@ -19685,7 +20624,7 @@
                 <a:ea typeface="Calibri" pitchFamily="34" charset="-122"/>
                 <a:cs typeface="Calibri" pitchFamily="34" charset="-120"/>
               </a:rPr>
-              <a:t>Word Labs  •  wordlabs.app  •  Root: 'count' = to number or reckon</a:t>
+              <a:t>Word Labs  •  wordlabs.app  •  Root: 'count' = to number or calculate</a:t>
             </a:r>
             <a:endParaRPr lang="en-US" sz="800" dirty="0"/>
           </a:p>
@@ -19824,7 +20763,7 @@
                 <a:ea typeface="Trebuchet MS" pitchFamily="34" charset="-122"/>
                 <a:cs typeface="Trebuchet MS" pitchFamily="34" charset="-120"/>
               </a:rPr>
-              <a:t>accountant</a:t>
+              <a:t>accountable</a:t>
             </a:r>
             <a:endParaRPr lang="en-US" sz="2800" dirty="0"/>
           </a:p>
@@ -20153,7 +21092,7 @@
                 <a:ea typeface="Calibri" pitchFamily="34" charset="-122"/>
                 <a:cs typeface="Calibri" pitchFamily="34" charset="-120"/>
               </a:rPr>
-              <a:t>to number or reckon</a:t>
+              <a:t>to number or calculate</a:t>
             </a:r>
             <a:endParaRPr lang="en-US" sz="850" dirty="0"/>
           </a:p>
@@ -20226,7 +21165,7 @@
                 <a:ea typeface="Trebuchet MS" pitchFamily="34" charset="-122"/>
                 <a:cs typeface="Trebuchet MS" pitchFamily="34" charset="-120"/>
               </a:rPr>
-              <a:t>ant</a:t>
+              <a:t>able</a:t>
             </a:r>
             <a:endParaRPr lang="en-US" sz="1300" dirty="0"/>
           </a:p>
@@ -20265,7 +21204,7 @@
                 <a:ea typeface="Calibri" pitchFamily="34" charset="-122"/>
                 <a:cs typeface="Calibri" pitchFamily="34" charset="-120"/>
               </a:rPr>
-              <a:t>person who does something</a:t>
+              <a:t>able to be, capable of</a:t>
             </a:r>
             <a:endParaRPr lang="en-US" sz="850" dirty="0"/>
           </a:p>
@@ -20372,8 +21311,8 @@
         </p:nvSpPr>
         <p:spPr>
           <a:xfrm>
-            <a:off x="2313432" y="3364992"/>
-            <a:ext cx="1645920" cy="475488"/>
+            <a:off x="1975104" y="3364992"/>
+            <a:ext cx="1554480" cy="475488"/>
           </a:xfrm>
           <a:prstGeom prst="rect">
             <a:avLst>
@@ -20399,8 +21338,8 @@
         </p:nvSpPr>
         <p:spPr>
           <a:xfrm>
-            <a:off x="2313432" y="3364992"/>
-            <a:ext cx="1645920" cy="475488"/>
+            <a:off x="1975104" y="3364992"/>
+            <a:ext cx="1554480" cy="475488"/>
           </a:xfrm>
           <a:prstGeom prst="rect">
             <a:avLst/>
@@ -20438,8 +21377,8 @@
         </p:nvSpPr>
         <p:spPr>
           <a:xfrm>
-            <a:off x="3959352" y="3364992"/>
-            <a:ext cx="411480" cy="475488"/>
+            <a:off x="3529584" y="3364992"/>
+            <a:ext cx="73152" cy="475488"/>
           </a:xfrm>
           <a:prstGeom prst="rect">
             <a:avLst/>
@@ -20477,8 +21416,8 @@
         </p:nvSpPr>
         <p:spPr>
           <a:xfrm>
-            <a:off x="4370832" y="3364992"/>
-            <a:ext cx="1645920" cy="475488"/>
+            <a:off x="3602736" y="3364992"/>
+            <a:ext cx="1554480" cy="475488"/>
           </a:xfrm>
           <a:prstGeom prst="rect">
             <a:avLst>
@@ -20504,8 +21443,8 @@
         </p:nvSpPr>
         <p:spPr>
           <a:xfrm>
-            <a:off x="4370832" y="3364992"/>
-            <a:ext cx="1645920" cy="475488"/>
+            <a:off x="3602736" y="3364992"/>
+            <a:ext cx="1554480" cy="475488"/>
           </a:xfrm>
           <a:prstGeom prst="rect">
             <a:avLst/>
@@ -20529,7 +21468,7 @@
                 <a:ea typeface="Trebuchet MS" pitchFamily="34" charset="-122"/>
                 <a:cs typeface="Trebuchet MS" pitchFamily="34" charset="-120"/>
               </a:rPr>
-              <a:t>count</a:t>
+              <a:t>coun</a:t>
             </a:r>
             <a:endParaRPr lang="en-US" sz="1400" dirty="0"/>
           </a:p>
@@ -20543,8 +21482,8 @@
         </p:nvSpPr>
         <p:spPr>
           <a:xfrm>
-            <a:off x="6016752" y="3364992"/>
-            <a:ext cx="411480" cy="475488"/>
+            <a:off x="5157216" y="3364992"/>
+            <a:ext cx="73152" cy="475488"/>
           </a:xfrm>
           <a:prstGeom prst="rect">
             <a:avLst/>
@@ -20582,8 +21521,8 @@
         </p:nvSpPr>
         <p:spPr>
           <a:xfrm>
-            <a:off x="6428232" y="3364992"/>
-            <a:ext cx="1645920" cy="475488"/>
+            <a:off x="5230368" y="3364992"/>
+            <a:ext cx="1554480" cy="475488"/>
           </a:xfrm>
           <a:prstGeom prst="rect">
             <a:avLst>
@@ -20609,8 +21548,8 @@
         </p:nvSpPr>
         <p:spPr>
           <a:xfrm>
-            <a:off x="6428232" y="3364992"/>
-            <a:ext cx="1645920" cy="475488"/>
+            <a:off x="5230368" y="3364992"/>
+            <a:ext cx="1554480" cy="475488"/>
           </a:xfrm>
           <a:prstGeom prst="rect">
             <a:avLst/>
@@ -20634,7 +21573,7 @@
                 <a:ea typeface="Trebuchet MS" pitchFamily="34" charset="-122"/>
                 <a:cs typeface="Trebuchet MS" pitchFamily="34" charset="-120"/>
               </a:rPr>
-              <a:t>ant</a:t>
+              <a:t>ta</a:t>
             </a:r>
             <a:endParaRPr lang="en-US" sz="1400" dirty="0"/>
           </a:p>
@@ -20642,7 +21581,112 @@
       </p:sp>
       <p:sp>
         <p:nvSpPr>
-          <p:cNvPr id="37" name="Shape 35"/>
+          <p:cNvPr id="37" name="Text 35"/>
+          <p:cNvSpPr/>
+          <p:nvPr/>
+        </p:nvSpPr>
+        <p:spPr>
+          <a:xfrm>
+            <a:off x="6784848" y="3364992"/>
+            <a:ext cx="73152" cy="475488"/>
+          </a:xfrm>
+          <a:prstGeom prst="rect">
+            <a:avLst/>
+          </a:prstGeom>
+          <a:noFill/>
+          <a:ln/>
+        </p:spPr>
+        <p:txBody>
+          <a:bodyPr wrap="square" lIns="0" tIns="0" rIns="0" bIns="0" rtlCol="0" anchor="ctr"/>
+          <a:lstStyle/>
+          <a:p>
+            <a:pPr algn="ctr" indent="0" marL="0">
+              <a:buNone/>
+            </a:pPr>
+            <a:r>
+              <a:rPr lang="en-US" sz="1600" b="1" dirty="0">
+                <a:solidFill>
+                  <a:srgbClr val="0D9488"/>
+                </a:solidFill>
+                <a:latin typeface="Trebuchet MS" pitchFamily="34" charset="0"/>
+                <a:ea typeface="Trebuchet MS" pitchFamily="34" charset="-122"/>
+                <a:cs typeface="Trebuchet MS" pitchFamily="34" charset="-120"/>
+              </a:rPr>
+              <a:t>·</a:t>
+            </a:r>
+            <a:endParaRPr lang="en-US" sz="1600" dirty="0"/>
+          </a:p>
+        </p:txBody>
+      </p:sp>
+      <p:sp>
+        <p:nvSpPr>
+          <p:cNvPr id="38" name="Shape 36"/>
+          <p:cNvSpPr/>
+          <p:nvPr/>
+        </p:nvSpPr>
+        <p:spPr>
+          <a:xfrm>
+            <a:off x="6858000" y="3364992"/>
+            <a:ext cx="1554480" cy="475488"/>
+          </a:xfrm>
+          <a:prstGeom prst="rect">
+            <a:avLst>
+              <a:gd name="adj" fmla="val 9615"/>
+            </a:avLst>
+          </a:prstGeom>
+          <a:solidFill>
+            <a:srgbClr val="FFFFFF"/>
+          </a:solidFill>
+          <a:ln w="12700">
+            <a:solidFill>
+              <a:srgbClr val="0D9488"/>
+            </a:solidFill>
+            <a:prstDash val="solid"/>
+          </a:ln>
+        </p:spPr>
+      </p:sp>
+      <p:sp>
+        <p:nvSpPr>
+          <p:cNvPr id="39" name="Text 37"/>
+          <p:cNvSpPr/>
+          <p:nvPr/>
+        </p:nvSpPr>
+        <p:spPr>
+          <a:xfrm>
+            <a:off x="6858000" y="3364992"/>
+            <a:ext cx="1554480" cy="475488"/>
+          </a:xfrm>
+          <a:prstGeom prst="rect">
+            <a:avLst/>
+          </a:prstGeom>
+          <a:noFill/>
+          <a:ln/>
+        </p:spPr>
+        <p:txBody>
+          <a:bodyPr wrap="square" lIns="0" tIns="0" rIns="0" bIns="0" rtlCol="0" anchor="ctr"/>
+          <a:lstStyle/>
+          <a:p>
+            <a:pPr algn="ctr" indent="0" marL="0">
+              <a:buNone/>
+            </a:pPr>
+            <a:r>
+              <a:rPr lang="en-US" sz="1400" b="1" dirty="0">
+                <a:solidFill>
+                  <a:srgbClr val="0D9488"/>
+                </a:solidFill>
+                <a:latin typeface="Trebuchet MS" pitchFamily="34" charset="0"/>
+                <a:ea typeface="Trebuchet MS" pitchFamily="34" charset="-122"/>
+                <a:cs typeface="Trebuchet MS" pitchFamily="34" charset="-120"/>
+              </a:rPr>
+              <a:t>ble</a:t>
+            </a:r>
+            <a:endParaRPr lang="en-US" sz="1400" dirty="0"/>
+          </a:p>
+        </p:txBody>
+      </p:sp>
+      <p:sp>
+        <p:nvSpPr>
+          <p:cNvPr id="40" name="Shape 38"/>
           <p:cNvSpPr/>
           <p:nvPr/>
         </p:nvSpPr>
@@ -20669,7 +21713,7 @@
       </p:sp>
       <p:sp>
         <p:nvSpPr>
-          <p:cNvPr id="38" name="Text 36"/>
+          <p:cNvPr id="41" name="Text 39"/>
           <p:cNvSpPr/>
           <p:nvPr/>
         </p:nvSpPr>
@@ -20708,7 +21752,7 @@
       </p:sp>
       <p:sp>
         <p:nvSpPr>
-          <p:cNvPr id="39" name="Shape 37"/>
+          <p:cNvPr id="42" name="Shape 40"/>
           <p:cNvSpPr/>
           <p:nvPr/>
         </p:nvSpPr>
@@ -20735,7 +21779,7 @@
       </p:sp>
       <p:sp>
         <p:nvSpPr>
-          <p:cNvPr id="40" name="Text 38"/>
+          <p:cNvPr id="43" name="Text 41"/>
           <p:cNvSpPr/>
           <p:nvPr/>
         </p:nvSpPr>
@@ -21058,7 +22102,7 @@
                 <a:ea typeface="Calibri" pitchFamily="34" charset="-122"/>
                 <a:cs typeface="Calibri" pitchFamily="34" charset="-120"/>
               </a:rPr>
-              <a:t>Word Labs  •  wordlabs.app  •  Root: 'count' = to number or reckon</a:t>
+              <a:t>Word Labs  •  wordlabs.app  •  Root: 'count' = to number or calculate</a:t>
             </a:r>
             <a:endParaRPr lang="en-US" sz="800" dirty="0"/>
           </a:p>
@@ -21197,7 +22241,7 @@
                 <a:ea typeface="Trebuchet MS" pitchFamily="34" charset="-122"/>
                 <a:cs typeface="Trebuchet MS" pitchFamily="34" charset="-120"/>
               </a:rPr>
-              <a:t>accountant</a:t>
+              <a:t>accountable</a:t>
             </a:r>
             <a:endParaRPr lang="en-US" sz="2800" dirty="0"/>
           </a:p>
@@ -21526,7 +22570,7 @@
                 <a:ea typeface="Calibri" pitchFamily="34" charset="-122"/>
                 <a:cs typeface="Calibri" pitchFamily="34" charset="-120"/>
               </a:rPr>
-              <a:t>to number or reckon</a:t>
+              <a:t>to number or calculate</a:t>
             </a:r>
             <a:endParaRPr lang="en-US" sz="850" dirty="0"/>
           </a:p>
@@ -21599,7 +22643,7 @@
                 <a:ea typeface="Trebuchet MS" pitchFamily="34" charset="-122"/>
                 <a:cs typeface="Trebuchet MS" pitchFamily="34" charset="-120"/>
               </a:rPr>
-              <a:t>ant</a:t>
+              <a:t>able</a:t>
             </a:r>
             <a:endParaRPr lang="en-US" sz="1300" dirty="0"/>
           </a:p>
@@ -21638,7 +22682,7 @@
                 <a:ea typeface="Calibri" pitchFamily="34" charset="-122"/>
                 <a:cs typeface="Calibri" pitchFamily="34" charset="-120"/>
               </a:rPr>
-              <a:t>person who does something</a:t>
+              <a:t>able to be, capable of</a:t>
             </a:r>
             <a:endParaRPr lang="en-US" sz="850" dirty="0"/>
           </a:p>
@@ -21745,8 +22789,8 @@
         </p:nvSpPr>
         <p:spPr>
           <a:xfrm>
-            <a:off x="2313432" y="3364992"/>
-            <a:ext cx="1645920" cy="475488"/>
+            <a:off x="1975104" y="3364992"/>
+            <a:ext cx="1554480" cy="475488"/>
           </a:xfrm>
           <a:prstGeom prst="rect">
             <a:avLst>
@@ -21772,8 +22816,8 @@
         </p:nvSpPr>
         <p:spPr>
           <a:xfrm>
-            <a:off x="2313432" y="3364992"/>
-            <a:ext cx="1645920" cy="475488"/>
+            <a:off x="1975104" y="3364992"/>
+            <a:ext cx="1554480" cy="475488"/>
           </a:xfrm>
           <a:prstGeom prst="rect">
             <a:avLst/>
@@ -21811,8 +22855,8 @@
         </p:nvSpPr>
         <p:spPr>
           <a:xfrm>
-            <a:off x="3959352" y="3364992"/>
-            <a:ext cx="411480" cy="475488"/>
+            <a:off x="3529584" y="3364992"/>
+            <a:ext cx="73152" cy="475488"/>
           </a:xfrm>
           <a:prstGeom prst="rect">
             <a:avLst/>
@@ -21850,8 +22894,8 @@
         </p:nvSpPr>
         <p:spPr>
           <a:xfrm>
-            <a:off x="4370832" y="3364992"/>
-            <a:ext cx="1645920" cy="475488"/>
+            <a:off x="3602736" y="3364992"/>
+            <a:ext cx="1554480" cy="475488"/>
           </a:xfrm>
           <a:prstGeom prst="rect">
             <a:avLst>
@@ -21877,8 +22921,8 @@
         </p:nvSpPr>
         <p:spPr>
           <a:xfrm>
-            <a:off x="4370832" y="3364992"/>
-            <a:ext cx="1645920" cy="475488"/>
+            <a:off x="3602736" y="3364992"/>
+            <a:ext cx="1554480" cy="475488"/>
           </a:xfrm>
           <a:prstGeom prst="rect">
             <a:avLst/>
@@ -21902,7 +22946,7 @@
                 <a:ea typeface="Trebuchet MS" pitchFamily="34" charset="-122"/>
                 <a:cs typeface="Trebuchet MS" pitchFamily="34" charset="-120"/>
               </a:rPr>
-              <a:t>count</a:t>
+              <a:t>coun</a:t>
             </a:r>
             <a:endParaRPr lang="en-US" sz="1400" dirty="0"/>
           </a:p>
@@ -21916,8 +22960,8 @@
         </p:nvSpPr>
         <p:spPr>
           <a:xfrm>
-            <a:off x="6016752" y="3364992"/>
-            <a:ext cx="411480" cy="475488"/>
+            <a:off x="5157216" y="3364992"/>
+            <a:ext cx="73152" cy="475488"/>
           </a:xfrm>
           <a:prstGeom prst="rect">
             <a:avLst/>
@@ -21955,8 +22999,8 @@
         </p:nvSpPr>
         <p:spPr>
           <a:xfrm>
-            <a:off x="6428232" y="3364992"/>
-            <a:ext cx="1645920" cy="475488"/>
+            <a:off x="5230368" y="3364992"/>
+            <a:ext cx="1554480" cy="475488"/>
           </a:xfrm>
           <a:prstGeom prst="rect">
             <a:avLst>
@@ -21982,8 +23026,8 @@
         </p:nvSpPr>
         <p:spPr>
           <a:xfrm>
-            <a:off x="6428232" y="3364992"/>
-            <a:ext cx="1645920" cy="475488"/>
+            <a:off x="5230368" y="3364992"/>
+            <a:ext cx="1554480" cy="475488"/>
           </a:xfrm>
           <a:prstGeom prst="rect">
             <a:avLst/>
@@ -22007,7 +23051,7 @@
                 <a:ea typeface="Trebuchet MS" pitchFamily="34" charset="-122"/>
                 <a:cs typeface="Trebuchet MS" pitchFamily="34" charset="-120"/>
               </a:rPr>
-              <a:t>ant</a:t>
+              <a:t>ta</a:t>
             </a:r>
             <a:endParaRPr lang="en-US" sz="1400" dirty="0"/>
           </a:p>
@@ -22015,7 +23059,112 @@
       </p:sp>
       <p:sp>
         <p:nvSpPr>
-          <p:cNvPr id="37" name="Shape 35"/>
+          <p:cNvPr id="37" name="Text 35"/>
+          <p:cNvSpPr/>
+          <p:nvPr/>
+        </p:nvSpPr>
+        <p:spPr>
+          <a:xfrm>
+            <a:off x="6784848" y="3364992"/>
+            <a:ext cx="73152" cy="475488"/>
+          </a:xfrm>
+          <a:prstGeom prst="rect">
+            <a:avLst/>
+          </a:prstGeom>
+          <a:noFill/>
+          <a:ln/>
+        </p:spPr>
+        <p:txBody>
+          <a:bodyPr wrap="square" lIns="0" tIns="0" rIns="0" bIns="0" rtlCol="0" anchor="ctr"/>
+          <a:lstStyle/>
+          <a:p>
+            <a:pPr algn="ctr" indent="0" marL="0">
+              <a:buNone/>
+            </a:pPr>
+            <a:r>
+              <a:rPr lang="en-US" sz="1600" b="1" dirty="0">
+                <a:solidFill>
+                  <a:srgbClr val="0D9488"/>
+                </a:solidFill>
+                <a:latin typeface="Trebuchet MS" pitchFamily="34" charset="0"/>
+                <a:ea typeface="Trebuchet MS" pitchFamily="34" charset="-122"/>
+                <a:cs typeface="Trebuchet MS" pitchFamily="34" charset="-120"/>
+              </a:rPr>
+              <a:t>·</a:t>
+            </a:r>
+            <a:endParaRPr lang="en-US" sz="1600" dirty="0"/>
+          </a:p>
+        </p:txBody>
+      </p:sp>
+      <p:sp>
+        <p:nvSpPr>
+          <p:cNvPr id="38" name="Shape 36"/>
+          <p:cNvSpPr/>
+          <p:nvPr/>
+        </p:nvSpPr>
+        <p:spPr>
+          <a:xfrm>
+            <a:off x="6858000" y="3364992"/>
+            <a:ext cx="1554480" cy="475488"/>
+          </a:xfrm>
+          <a:prstGeom prst="rect">
+            <a:avLst>
+              <a:gd name="adj" fmla="val 9615"/>
+            </a:avLst>
+          </a:prstGeom>
+          <a:solidFill>
+            <a:srgbClr val="FFFFFF"/>
+          </a:solidFill>
+          <a:ln w="12700">
+            <a:solidFill>
+              <a:srgbClr val="0D9488"/>
+            </a:solidFill>
+            <a:prstDash val="solid"/>
+          </a:ln>
+        </p:spPr>
+      </p:sp>
+      <p:sp>
+        <p:nvSpPr>
+          <p:cNvPr id="39" name="Text 37"/>
+          <p:cNvSpPr/>
+          <p:nvPr/>
+        </p:nvSpPr>
+        <p:spPr>
+          <a:xfrm>
+            <a:off x="6858000" y="3364992"/>
+            <a:ext cx="1554480" cy="475488"/>
+          </a:xfrm>
+          <a:prstGeom prst="rect">
+            <a:avLst/>
+          </a:prstGeom>
+          <a:noFill/>
+          <a:ln/>
+        </p:spPr>
+        <p:txBody>
+          <a:bodyPr wrap="square" lIns="0" tIns="0" rIns="0" bIns="0" rtlCol="0" anchor="ctr"/>
+          <a:lstStyle/>
+          <a:p>
+            <a:pPr algn="ctr" indent="0" marL="0">
+              <a:buNone/>
+            </a:pPr>
+            <a:r>
+              <a:rPr lang="en-US" sz="1400" b="1" dirty="0">
+                <a:solidFill>
+                  <a:srgbClr val="0D9488"/>
+                </a:solidFill>
+                <a:latin typeface="Trebuchet MS" pitchFamily="34" charset="0"/>
+                <a:ea typeface="Trebuchet MS" pitchFamily="34" charset="-122"/>
+                <a:cs typeface="Trebuchet MS" pitchFamily="34" charset="-120"/>
+              </a:rPr>
+              <a:t>ble</a:t>
+            </a:r>
+            <a:endParaRPr lang="en-US" sz="1400" dirty="0"/>
+          </a:p>
+        </p:txBody>
+      </p:sp>
+      <p:sp>
+        <p:nvSpPr>
+          <p:cNvPr id="40" name="Shape 38"/>
           <p:cNvSpPr/>
           <p:nvPr/>
         </p:nvSpPr>
@@ -22042,7 +23191,7 @@
       </p:sp>
       <p:sp>
         <p:nvSpPr>
-          <p:cNvPr id="38" name="Text 36"/>
+          <p:cNvPr id="41" name="Text 39"/>
           <p:cNvSpPr/>
           <p:nvPr/>
         </p:nvSpPr>
@@ -22081,7 +23230,7 @@
       </p:sp>
       <p:sp>
         <p:nvSpPr>
-          <p:cNvPr id="39" name="Shape 37"/>
+          <p:cNvPr id="42" name="Shape 40"/>
           <p:cNvSpPr/>
           <p:nvPr/>
         </p:nvSpPr>
@@ -22108,14 +23257,14 @@
       </p:sp>
       <p:sp>
         <p:nvSpPr>
-          <p:cNvPr id="40" name="Shape 38"/>
-          <p:cNvSpPr/>
-          <p:nvPr/>
-        </p:nvSpPr>
-        <p:spPr>
-          <a:xfrm>
-            <a:off x="2023872" y="4169664"/>
-            <a:ext cx="685800" cy="384048"/>
+          <p:cNvPr id="43" name="Shape 41"/>
+          <p:cNvSpPr/>
+          <p:nvPr/>
+        </p:nvSpPr>
+        <p:spPr>
+          <a:xfrm>
+            <a:off x="1951330" y="4169664"/>
+            <a:ext cx="676656" cy="384048"/>
           </a:xfrm>
           <a:prstGeom prst="rect">
             <a:avLst>
@@ -22135,14 +23284,14 @@
       </p:sp>
       <p:sp>
         <p:nvSpPr>
-          <p:cNvPr id="41" name="Text 39"/>
-          <p:cNvSpPr/>
-          <p:nvPr/>
-        </p:nvSpPr>
-        <p:spPr>
-          <a:xfrm>
-            <a:off x="2023872" y="4169664"/>
-            <a:ext cx="685800" cy="384048"/>
+          <p:cNvPr id="44" name="Text 42"/>
+          <p:cNvSpPr/>
+          <p:nvPr/>
+        </p:nvSpPr>
+        <p:spPr>
+          <a:xfrm>
+            <a:off x="1951330" y="4169664"/>
+            <a:ext cx="676656" cy="384048"/>
           </a:xfrm>
           <a:prstGeom prst="rect">
             <a:avLst/>
@@ -22166,7 +23315,7 @@
                 <a:ea typeface="Trebuchet MS" pitchFamily="34" charset="-122"/>
                 <a:cs typeface="Trebuchet MS" pitchFamily="34" charset="-120"/>
               </a:rPr>
-              <a:t>ac</a:t>
+              <a:t>a</a:t>
             </a:r>
             <a:endParaRPr lang="en-US" sz="900" dirty="0"/>
           </a:p>
@@ -22174,14 +23323,146 @@
       </p:sp>
       <p:sp>
         <p:nvSpPr>
-          <p:cNvPr id="42" name="Text 40"/>
-          <p:cNvSpPr/>
-          <p:nvPr/>
-        </p:nvSpPr>
-        <p:spPr>
-          <a:xfrm>
-            <a:off x="2023872" y="4572000"/>
-            <a:ext cx="685800" cy="219456"/>
+          <p:cNvPr id="45" name="Shape 43"/>
+          <p:cNvSpPr/>
+          <p:nvPr/>
+        </p:nvSpPr>
+        <p:spPr>
+          <a:xfrm>
+            <a:off x="2677363" y="4169664"/>
+            <a:ext cx="676656" cy="384048"/>
+          </a:xfrm>
+          <a:prstGeom prst="rect">
+            <a:avLst>
+              <a:gd name="adj" fmla="val 9524"/>
+            </a:avLst>
+          </a:prstGeom>
+          <a:solidFill>
+            <a:srgbClr val="FFFFFF"/>
+          </a:solidFill>
+          <a:ln w="12700">
+            <a:solidFill>
+              <a:srgbClr val="DB2777"/>
+            </a:solidFill>
+            <a:prstDash val="solid"/>
+          </a:ln>
+        </p:spPr>
+      </p:sp>
+      <p:sp>
+        <p:nvSpPr>
+          <p:cNvPr id="46" name="Text 44"/>
+          <p:cNvSpPr/>
+          <p:nvPr/>
+        </p:nvSpPr>
+        <p:spPr>
+          <a:xfrm>
+            <a:off x="2677363" y="4169664"/>
+            <a:ext cx="676656" cy="384048"/>
+          </a:xfrm>
+          <a:prstGeom prst="rect">
+            <a:avLst/>
+          </a:prstGeom>
+          <a:noFill/>
+          <a:ln/>
+        </p:spPr>
+        <p:txBody>
+          <a:bodyPr wrap="square" lIns="0" tIns="0" rIns="0" bIns="0" rtlCol="0" anchor="ctr"/>
+          <a:lstStyle/>
+          <a:p>
+            <a:pPr algn="ctr" indent="0" marL="0">
+              <a:buNone/>
+            </a:pPr>
+            <a:r>
+              <a:rPr lang="en-US" sz="900" b="1" dirty="0">
+                <a:solidFill>
+                  <a:srgbClr val="9D174D"/>
+                </a:solidFill>
+                <a:latin typeface="Trebuchet MS" pitchFamily="34" charset="0"/>
+                <a:ea typeface="Trebuchet MS" pitchFamily="34" charset="-122"/>
+                <a:cs typeface="Trebuchet MS" pitchFamily="34" charset="-120"/>
+              </a:rPr>
+              <a:t>c</a:t>
+            </a:r>
+            <a:endParaRPr lang="en-US" sz="900" dirty="0"/>
+          </a:p>
+        </p:txBody>
+      </p:sp>
+      <p:sp>
+        <p:nvSpPr>
+          <p:cNvPr id="47" name="Shape 45"/>
+          <p:cNvSpPr/>
+          <p:nvPr/>
+        </p:nvSpPr>
+        <p:spPr>
+          <a:xfrm>
+            <a:off x="3403397" y="4169664"/>
+            <a:ext cx="676656" cy="384048"/>
+          </a:xfrm>
+          <a:prstGeom prst="rect">
+            <a:avLst>
+              <a:gd name="adj" fmla="val 9524"/>
+            </a:avLst>
+          </a:prstGeom>
+          <a:solidFill>
+            <a:srgbClr val="FFFFFF"/>
+          </a:solidFill>
+          <a:ln w="12700">
+            <a:solidFill>
+              <a:srgbClr val="DB2777"/>
+            </a:solidFill>
+            <a:prstDash val="solid"/>
+          </a:ln>
+        </p:spPr>
+      </p:sp>
+      <p:sp>
+        <p:nvSpPr>
+          <p:cNvPr id="48" name="Text 46"/>
+          <p:cNvSpPr/>
+          <p:nvPr/>
+        </p:nvSpPr>
+        <p:spPr>
+          <a:xfrm>
+            <a:off x="3403397" y="4169664"/>
+            <a:ext cx="676656" cy="384048"/>
+          </a:xfrm>
+          <a:prstGeom prst="rect">
+            <a:avLst/>
+          </a:prstGeom>
+          <a:noFill/>
+          <a:ln/>
+        </p:spPr>
+        <p:txBody>
+          <a:bodyPr wrap="square" lIns="0" tIns="0" rIns="0" bIns="0" rtlCol="0" anchor="ctr"/>
+          <a:lstStyle/>
+          <a:p>
+            <a:pPr algn="ctr" indent="0" marL="0">
+              <a:buNone/>
+            </a:pPr>
+            <a:r>
+              <a:rPr lang="en-US" sz="900" b="1" dirty="0">
+                <a:solidFill>
+                  <a:srgbClr val="9D174D"/>
+                </a:solidFill>
+                <a:latin typeface="Trebuchet MS" pitchFamily="34" charset="0"/>
+                <a:ea typeface="Trebuchet MS" pitchFamily="34" charset="-122"/>
+                <a:cs typeface="Trebuchet MS" pitchFamily="34" charset="-120"/>
+              </a:rPr>
+              <a:t>c</a:t>
+            </a:r>
+            <a:endParaRPr lang="en-US" sz="900" dirty="0"/>
+          </a:p>
+        </p:txBody>
+      </p:sp>
+      <p:sp>
+        <p:nvSpPr>
+          <p:cNvPr id="49" name="Text 47"/>
+          <p:cNvSpPr/>
+          <p:nvPr/>
+        </p:nvSpPr>
+        <p:spPr>
+          <a:xfrm>
+            <a:off x="3403397" y="4572000"/>
+            <a:ext cx="676656" cy="219456"/>
           </a:xfrm>
           <a:prstGeom prst="rect">
             <a:avLst/>
@@ -22213,14 +23494,14 @@
       </p:sp>
       <p:sp>
         <p:nvSpPr>
-          <p:cNvPr id="43" name="Shape 41"/>
-          <p:cNvSpPr/>
-          <p:nvPr/>
-        </p:nvSpPr>
-        <p:spPr>
-          <a:xfrm>
-            <a:off x="2831592" y="4169664"/>
-            <a:ext cx="685800" cy="384048"/>
+          <p:cNvPr id="50" name="Shape 48"/>
+          <p:cNvSpPr/>
+          <p:nvPr/>
+        </p:nvSpPr>
+        <p:spPr>
+          <a:xfrm>
+            <a:off x="4129430" y="4169664"/>
+            <a:ext cx="676656" cy="384048"/>
           </a:xfrm>
           <a:prstGeom prst="rect">
             <a:avLst>
@@ -22240,14 +23521,14 @@
       </p:sp>
       <p:sp>
         <p:nvSpPr>
-          <p:cNvPr id="44" name="Text 42"/>
-          <p:cNvSpPr/>
-          <p:nvPr/>
-        </p:nvSpPr>
-        <p:spPr>
-          <a:xfrm>
-            <a:off x="2831592" y="4169664"/>
-            <a:ext cx="685800" cy="384048"/>
+          <p:cNvPr id="51" name="Text 49"/>
+          <p:cNvSpPr/>
+          <p:nvPr/>
+        </p:nvSpPr>
+        <p:spPr>
+          <a:xfrm>
+            <a:off x="4129430" y="4169664"/>
+            <a:ext cx="676656" cy="384048"/>
           </a:xfrm>
           <a:prstGeom prst="rect">
             <a:avLst/>
@@ -22271,7 +23552,7 @@
                 <a:ea typeface="Trebuchet MS" pitchFamily="34" charset="-122"/>
                 <a:cs typeface="Trebuchet MS" pitchFamily="34" charset="-120"/>
               </a:rPr>
-              <a:t>c</a:t>
+              <a:t>ou</a:t>
             </a:r>
             <a:endParaRPr lang="en-US" sz="900" dirty="0"/>
           </a:p>
@@ -22279,14 +23560,14 @@
       </p:sp>
       <p:sp>
         <p:nvSpPr>
-          <p:cNvPr id="45" name="Shape 43"/>
-          <p:cNvSpPr/>
-          <p:nvPr/>
-        </p:nvSpPr>
-        <p:spPr>
-          <a:xfrm>
-            <a:off x="3639312" y="4169664"/>
-            <a:ext cx="685800" cy="384048"/>
+          <p:cNvPr id="52" name="Shape 50"/>
+          <p:cNvSpPr/>
+          <p:nvPr/>
+        </p:nvSpPr>
+        <p:spPr>
+          <a:xfrm>
+            <a:off x="4855464" y="4169664"/>
+            <a:ext cx="676656" cy="384048"/>
           </a:xfrm>
           <a:prstGeom prst="rect">
             <a:avLst>
@@ -22306,14 +23587,14 @@
       </p:sp>
       <p:sp>
         <p:nvSpPr>
-          <p:cNvPr id="46" name="Text 44"/>
-          <p:cNvSpPr/>
-          <p:nvPr/>
-        </p:nvSpPr>
-        <p:spPr>
-          <a:xfrm>
-            <a:off x="3639312" y="4169664"/>
-            <a:ext cx="685800" cy="384048"/>
+          <p:cNvPr id="53" name="Text 51"/>
+          <p:cNvSpPr/>
+          <p:nvPr/>
+        </p:nvSpPr>
+        <p:spPr>
+          <a:xfrm>
+            <a:off x="4855464" y="4169664"/>
+            <a:ext cx="676656" cy="384048"/>
           </a:xfrm>
           <a:prstGeom prst="rect">
             <a:avLst/>
@@ -22337,7 +23618,7 @@
                 <a:ea typeface="Trebuchet MS" pitchFamily="34" charset="-122"/>
                 <a:cs typeface="Trebuchet MS" pitchFamily="34" charset="-120"/>
               </a:rPr>
-              <a:t>ou</a:t>
+              <a:t>n</a:t>
             </a:r>
             <a:endParaRPr lang="en-US" sz="900" dirty="0"/>
           </a:p>
@@ -22345,14 +23626,14 @@
       </p:sp>
       <p:sp>
         <p:nvSpPr>
-          <p:cNvPr id="47" name="Shape 45"/>
-          <p:cNvSpPr/>
-          <p:nvPr/>
-        </p:nvSpPr>
-        <p:spPr>
-          <a:xfrm>
-            <a:off x="4447032" y="4169664"/>
-            <a:ext cx="685800" cy="384048"/>
+          <p:cNvPr id="54" name="Shape 52"/>
+          <p:cNvSpPr/>
+          <p:nvPr/>
+        </p:nvSpPr>
+        <p:spPr>
+          <a:xfrm>
+            <a:off x="5581498" y="4169664"/>
+            <a:ext cx="676656" cy="384048"/>
           </a:xfrm>
           <a:prstGeom prst="rect">
             <a:avLst>
@@ -22372,14 +23653,14 @@
       </p:sp>
       <p:sp>
         <p:nvSpPr>
-          <p:cNvPr id="48" name="Text 46"/>
-          <p:cNvSpPr/>
-          <p:nvPr/>
-        </p:nvSpPr>
-        <p:spPr>
-          <a:xfrm>
-            <a:off x="4447032" y="4169664"/>
-            <a:ext cx="685800" cy="384048"/>
+          <p:cNvPr id="55" name="Text 53"/>
+          <p:cNvSpPr/>
+          <p:nvPr/>
+        </p:nvSpPr>
+        <p:spPr>
+          <a:xfrm>
+            <a:off x="5581498" y="4169664"/>
+            <a:ext cx="676656" cy="384048"/>
           </a:xfrm>
           <a:prstGeom prst="rect">
             <a:avLst/>
@@ -22403,7 +23684,7 @@
                 <a:ea typeface="Trebuchet MS" pitchFamily="34" charset="-122"/>
                 <a:cs typeface="Trebuchet MS" pitchFamily="34" charset="-120"/>
               </a:rPr>
-              <a:t>n</a:t>
+              <a:t>t</a:t>
             </a:r>
             <a:endParaRPr lang="en-US" sz="900" dirty="0"/>
           </a:p>
@@ -22411,14 +23692,14 @@
       </p:sp>
       <p:sp>
         <p:nvSpPr>
-          <p:cNvPr id="49" name="Shape 47"/>
-          <p:cNvSpPr/>
-          <p:nvPr/>
-        </p:nvSpPr>
-        <p:spPr>
-          <a:xfrm>
-            <a:off x="5254752" y="4169664"/>
-            <a:ext cx="685800" cy="384048"/>
+          <p:cNvPr id="56" name="Shape 54"/>
+          <p:cNvSpPr/>
+          <p:nvPr/>
+        </p:nvSpPr>
+        <p:spPr>
+          <a:xfrm>
+            <a:off x="6307531" y="4169664"/>
+            <a:ext cx="676656" cy="384048"/>
           </a:xfrm>
           <a:prstGeom prst="rect">
             <a:avLst>
@@ -22438,14 +23719,14 @@
       </p:sp>
       <p:sp>
         <p:nvSpPr>
-          <p:cNvPr id="50" name="Text 48"/>
-          <p:cNvSpPr/>
-          <p:nvPr/>
-        </p:nvSpPr>
-        <p:spPr>
-          <a:xfrm>
-            <a:off x="5254752" y="4169664"/>
-            <a:ext cx="685800" cy="384048"/>
+          <p:cNvPr id="57" name="Text 55"/>
+          <p:cNvSpPr/>
+          <p:nvPr/>
+        </p:nvSpPr>
+        <p:spPr>
+          <a:xfrm>
+            <a:off x="6307531" y="4169664"/>
+            <a:ext cx="676656" cy="384048"/>
           </a:xfrm>
           <a:prstGeom prst="rect">
             <a:avLst/>
@@ -22469,7 +23750,7 @@
                 <a:ea typeface="Trebuchet MS" pitchFamily="34" charset="-122"/>
                 <a:cs typeface="Trebuchet MS" pitchFamily="34" charset="-120"/>
               </a:rPr>
-              <a:t>t</a:t>
+              <a:t>a</a:t>
             </a:r>
             <a:endParaRPr lang="en-US" sz="900" dirty="0"/>
           </a:p>
@@ -22477,14 +23758,14 @@
       </p:sp>
       <p:sp>
         <p:nvSpPr>
-          <p:cNvPr id="51" name="Shape 49"/>
-          <p:cNvSpPr/>
-          <p:nvPr/>
-        </p:nvSpPr>
-        <p:spPr>
-          <a:xfrm>
-            <a:off x="6062472" y="4169664"/>
-            <a:ext cx="685800" cy="384048"/>
+          <p:cNvPr id="58" name="Shape 56"/>
+          <p:cNvSpPr/>
+          <p:nvPr/>
+        </p:nvSpPr>
+        <p:spPr>
+          <a:xfrm>
+            <a:off x="7033565" y="4169664"/>
+            <a:ext cx="676656" cy="384048"/>
           </a:xfrm>
           <a:prstGeom prst="rect">
             <a:avLst>
@@ -22504,14 +23785,14 @@
       </p:sp>
       <p:sp>
         <p:nvSpPr>
-          <p:cNvPr id="52" name="Text 50"/>
-          <p:cNvSpPr/>
-          <p:nvPr/>
-        </p:nvSpPr>
-        <p:spPr>
-          <a:xfrm>
-            <a:off x="6062472" y="4169664"/>
-            <a:ext cx="685800" cy="384048"/>
+          <p:cNvPr id="59" name="Text 57"/>
+          <p:cNvSpPr/>
+          <p:nvPr/>
+        </p:nvSpPr>
+        <p:spPr>
+          <a:xfrm>
+            <a:off x="7033565" y="4169664"/>
+            <a:ext cx="676656" cy="384048"/>
           </a:xfrm>
           <a:prstGeom prst="rect">
             <a:avLst/>
@@ -22535,7 +23816,7 @@
                 <a:ea typeface="Trebuchet MS" pitchFamily="34" charset="-122"/>
                 <a:cs typeface="Trebuchet MS" pitchFamily="34" charset="-120"/>
               </a:rPr>
-              <a:t>a</a:t>
+              <a:t>b</a:t>
             </a:r>
             <a:endParaRPr lang="en-US" sz="900" dirty="0"/>
           </a:p>
@@ -22543,14 +23824,14 @@
       </p:sp>
       <p:sp>
         <p:nvSpPr>
-          <p:cNvPr id="53" name="Shape 51"/>
-          <p:cNvSpPr/>
-          <p:nvPr/>
-        </p:nvSpPr>
-        <p:spPr>
-          <a:xfrm>
-            <a:off x="6870192" y="4169664"/>
-            <a:ext cx="685800" cy="384048"/>
+          <p:cNvPr id="60" name="Shape 58"/>
+          <p:cNvSpPr/>
+          <p:nvPr/>
+        </p:nvSpPr>
+        <p:spPr>
+          <a:xfrm>
+            <a:off x="7759598" y="4169664"/>
+            <a:ext cx="676656" cy="384048"/>
           </a:xfrm>
           <a:prstGeom prst="rect">
             <a:avLst>
@@ -22570,14 +23851,14 @@
       </p:sp>
       <p:sp>
         <p:nvSpPr>
-          <p:cNvPr id="54" name="Text 52"/>
-          <p:cNvSpPr/>
-          <p:nvPr/>
-        </p:nvSpPr>
-        <p:spPr>
-          <a:xfrm>
-            <a:off x="6870192" y="4169664"/>
-            <a:ext cx="685800" cy="384048"/>
+          <p:cNvPr id="61" name="Text 59"/>
+          <p:cNvSpPr/>
+          <p:nvPr/>
+        </p:nvSpPr>
+        <p:spPr>
+          <a:xfrm>
+            <a:off x="7759598" y="4169664"/>
+            <a:ext cx="676656" cy="384048"/>
           </a:xfrm>
           <a:prstGeom prst="rect">
             <a:avLst/>
@@ -22601,73 +23882,7 @@
                 <a:ea typeface="Trebuchet MS" pitchFamily="34" charset="-122"/>
                 <a:cs typeface="Trebuchet MS" pitchFamily="34" charset="-120"/>
               </a:rPr>
-              <a:t>n</a:t>
-            </a:r>
-            <a:endParaRPr lang="en-US" sz="900" dirty="0"/>
-          </a:p>
-        </p:txBody>
-      </p:sp>
-      <p:sp>
-        <p:nvSpPr>
-          <p:cNvPr id="55" name="Shape 53"/>
-          <p:cNvSpPr/>
-          <p:nvPr/>
-        </p:nvSpPr>
-        <p:spPr>
-          <a:xfrm>
-            <a:off x="7677912" y="4169664"/>
-            <a:ext cx="685800" cy="384048"/>
-          </a:xfrm>
-          <a:prstGeom prst="rect">
-            <a:avLst>
-              <a:gd name="adj" fmla="val 9524"/>
-            </a:avLst>
-          </a:prstGeom>
-          <a:solidFill>
-            <a:srgbClr val="FFFFFF"/>
-          </a:solidFill>
-          <a:ln w="12700">
-            <a:solidFill>
-              <a:srgbClr val="DB2777"/>
-            </a:solidFill>
-            <a:prstDash val="solid"/>
-          </a:ln>
-        </p:spPr>
-      </p:sp>
-      <p:sp>
-        <p:nvSpPr>
-          <p:cNvPr id="56" name="Text 54"/>
-          <p:cNvSpPr/>
-          <p:nvPr/>
-        </p:nvSpPr>
-        <p:spPr>
-          <a:xfrm>
-            <a:off x="7677912" y="4169664"/>
-            <a:ext cx="685800" cy="384048"/>
-          </a:xfrm>
-          <a:prstGeom prst="rect">
-            <a:avLst/>
-          </a:prstGeom>
-          <a:noFill/>
-          <a:ln/>
-        </p:spPr>
-        <p:txBody>
-          <a:bodyPr wrap="square" lIns="0" tIns="0" rIns="0" bIns="0" rtlCol="0" anchor="ctr"/>
-          <a:lstStyle/>
-          <a:p>
-            <a:pPr algn="ctr" indent="0" marL="0">
-              <a:buNone/>
-            </a:pPr>
-            <a:r>
-              <a:rPr lang="en-US" sz="900" b="1" dirty="0">
-                <a:solidFill>
-                  <a:srgbClr val="9D174D"/>
-                </a:solidFill>
-                <a:latin typeface="Trebuchet MS" pitchFamily="34" charset="0"/>
-                <a:ea typeface="Trebuchet MS" pitchFamily="34" charset="-122"/>
-                <a:cs typeface="Trebuchet MS" pitchFamily="34" charset="-120"/>
-              </a:rPr>
-              <a:t>t</a:t>
+              <a:t>le</a:t>
             </a:r>
             <a:endParaRPr lang="en-US" sz="900" dirty="0"/>
           </a:p>
@@ -22959,7 +24174,7 @@
                 <a:ea typeface="Calibri" pitchFamily="34" charset="-122"/>
                 <a:cs typeface="Calibri" pitchFamily="34" charset="-120"/>
               </a:rPr>
-              <a:t>Word Labs  •  wordlabs.app  •  Root: 'count' = to number or reckon</a:t>
+              <a:t>Word Labs  •  wordlabs.app  •  Root: 'count' = to number or calculate</a:t>
             </a:r>
             <a:endParaRPr lang="en-US" sz="800" dirty="0"/>
           </a:p>
@@ -23098,7 +24313,7 @@
                 <a:ea typeface="Trebuchet MS" pitchFamily="34" charset="-122"/>
                 <a:cs typeface="Trebuchet MS" pitchFamily="34" charset="-120"/>
               </a:rPr>
-              <a:t>miscounted</a:t>
+              <a:t>recount</a:t>
             </a:r>
             <a:endParaRPr lang="en-US" sz="2800" dirty="0"/>
           </a:p>
@@ -23786,7 +25001,7 @@
                 <a:ea typeface="Calibri" pitchFamily="34" charset="-122"/>
                 <a:cs typeface="Calibri" pitchFamily="34" charset="-120"/>
               </a:rPr>
-              <a:t>Word Labs  •  wordlabs.app  •  Root: 'count' = to number or reckon</a:t>
+              <a:t>Word Labs  •  wordlabs.app  •  Root: 'count' = to number or calculate</a:t>
             </a:r>
             <a:endParaRPr lang="en-US" sz="800" dirty="0"/>
           </a:p>
@@ -23925,7 +25140,7 @@
                 <a:ea typeface="Trebuchet MS" pitchFamily="34" charset="-122"/>
                 <a:cs typeface="Trebuchet MS" pitchFamily="34" charset="-120"/>
               </a:rPr>
-              <a:t>miscounted</a:t>
+              <a:t>recount</a:t>
             </a:r>
             <a:endParaRPr lang="en-US" sz="2800" dirty="0"/>
           </a:p>
@@ -24005,7 +25220,7 @@
         </p:nvSpPr>
         <p:spPr>
           <a:xfrm>
-            <a:off x="2221992" y="2258568"/>
+            <a:off x="2938272" y="2258568"/>
             <a:ext cx="1828800" cy="292608"/>
           </a:xfrm>
           <a:prstGeom prst="rect">
@@ -24039,7 +25254,7 @@
         </p:nvSpPr>
         <p:spPr>
           <a:xfrm>
-            <a:off x="2221992" y="2258568"/>
+            <a:off x="2938272" y="2258568"/>
             <a:ext cx="1828800" cy="292608"/>
           </a:xfrm>
           <a:prstGeom prst="rect">
@@ -24064,7 +25279,7 @@
                 <a:ea typeface="Trebuchet MS" pitchFamily="34" charset="-122"/>
                 <a:cs typeface="Trebuchet MS" pitchFamily="34" charset="-120"/>
               </a:rPr>
-              <a:t>mis</a:t>
+              <a:t>re</a:t>
             </a:r>
             <a:endParaRPr lang="en-US" sz="1300" dirty="0"/>
           </a:p>
@@ -24078,7 +25293,7 @@
         </p:nvSpPr>
         <p:spPr>
           <a:xfrm>
-            <a:off x="2221992" y="2569464"/>
+            <a:off x="2938272" y="2569464"/>
             <a:ext cx="1828800" cy="201168"/>
           </a:xfrm>
           <a:prstGeom prst="rect">
@@ -24103,7 +25318,7 @@
                 <a:ea typeface="Calibri" pitchFamily="34" charset="-122"/>
                 <a:cs typeface="Calibri" pitchFamily="34" charset="-120"/>
               </a:rPr>
-              <a:t>wrongly</a:t>
+              <a:t>again</a:t>
             </a:r>
             <a:endParaRPr lang="en-US" sz="850" dirty="0"/>
           </a:p>
@@ -24117,7 +25332,7 @@
         </p:nvSpPr>
         <p:spPr>
           <a:xfrm>
-            <a:off x="4370832" y="2258568"/>
+            <a:off x="5803392" y="2258568"/>
             <a:ext cx="1828800" cy="292608"/>
           </a:xfrm>
           <a:prstGeom prst="rect">
@@ -24151,7 +25366,7 @@
         </p:nvSpPr>
         <p:spPr>
           <a:xfrm>
-            <a:off x="4370832" y="2258568"/>
+            <a:off x="5803392" y="2258568"/>
             <a:ext cx="1828800" cy="292608"/>
           </a:xfrm>
           <a:prstGeom prst="rect">
@@ -24190,7 +25405,7 @@
         </p:nvSpPr>
         <p:spPr>
           <a:xfrm>
-            <a:off x="4370832" y="2569464"/>
+            <a:off x="5803392" y="2569464"/>
             <a:ext cx="1828800" cy="201168"/>
           </a:xfrm>
           <a:prstGeom prst="rect">
@@ -24215,7 +25430,7 @@
                 <a:ea typeface="Calibri" pitchFamily="34" charset="-122"/>
                 <a:cs typeface="Calibri" pitchFamily="34" charset="-120"/>
               </a:rPr>
-              <a:t>to number or reckon</a:t>
+              <a:t>to number or calculate</a:t>
             </a:r>
             <a:endParaRPr lang="en-US" sz="850" dirty="0"/>
           </a:p>
@@ -24229,30 +25444,23 @@
         </p:nvSpPr>
         <p:spPr>
           <a:xfrm>
-            <a:off x="6519672" y="2258568"/>
-            <a:ext cx="1828800" cy="292608"/>
+            <a:off x="365760" y="3273552"/>
+            <a:ext cx="1371600" cy="658368"/>
           </a:xfrm>
           <a:prstGeom prst="rect">
             <a:avLst>
-              <a:gd name="adj" fmla="val 25000"/>
+              <a:gd name="adj" fmla="val 8333"/>
             </a:avLst>
           </a:prstGeom>
           <a:solidFill>
-            <a:srgbClr val="FCE7F3"/>
-          </a:solidFill>
-          <a:ln w="19050">
-            <a:solidFill>
-              <a:srgbClr val="DB2777"/>
-            </a:solidFill>
-            <a:prstDash val="solid"/>
-          </a:ln>
-          <a:effectLst>
-            <a:outerShdw sx="100000" sy="100000" kx="0" ky="0" algn="bl" rotWithShape="0" blurRad="101600" dist="38100" dir="8100000">
-              <a:srgbClr val="000000">
-                <a:alpha val="12000"/>
-              </a:srgbClr>
-            </a:outerShdw>
-          </a:effectLst>
+            <a:srgbClr val="E2E8F0"/>
+          </a:solidFill>
+          <a:ln w="12700">
+            <a:solidFill>
+              <a:srgbClr val="E2E8F0"/>
+            </a:solidFill>
+            <a:prstDash val="solid"/>
+          </a:ln>
         </p:spPr>
       </p:sp>
       <p:sp>
@@ -24263,8 +25471,8 @@
         </p:nvSpPr>
         <p:spPr>
           <a:xfrm>
-            <a:off x="6519672" y="2258568"/>
-            <a:ext cx="1828800" cy="292608"/>
+            <a:off x="365760" y="3273552"/>
+            <a:ext cx="1371600" cy="658368"/>
           </a:xfrm>
           <a:prstGeom prst="rect">
             <a:avLst/>
@@ -24280,73 +25488,100 @@
               <a:buNone/>
             </a:pPr>
             <a:r>
-              <a:rPr lang="en-US" sz="1300" b="1" dirty="0">
-                <a:solidFill>
-                  <a:srgbClr val="9D174D"/>
+              <a:rPr lang="en-US" sz="1100" b="1" dirty="0">
+                <a:solidFill>
+                  <a:srgbClr val="475569"/>
                 </a:solidFill>
                 <a:latin typeface="Trebuchet MS" pitchFamily="34" charset="0"/>
                 <a:ea typeface="Trebuchet MS" pitchFamily="34" charset="-122"/>
                 <a:cs typeface="Trebuchet MS" pitchFamily="34" charset="-120"/>
               </a:rPr>
-              <a:t>ed</a:t>
-            </a:r>
-            <a:endParaRPr lang="en-US" sz="1300" dirty="0"/>
-          </a:p>
-        </p:txBody>
-      </p:sp>
-      <p:sp>
-        <p:nvSpPr>
-          <p:cNvPr id="24" name="Text 22"/>
-          <p:cNvSpPr/>
-          <p:nvPr/>
-        </p:nvSpPr>
-        <p:spPr>
-          <a:xfrm>
-            <a:off x="6519672" y="2569464"/>
-            <a:ext cx="1828800" cy="201168"/>
-          </a:xfrm>
-          <a:prstGeom prst="rect">
-            <a:avLst/>
-          </a:prstGeom>
-          <a:noFill/>
-          <a:ln/>
-        </p:spPr>
-        <p:txBody>
-          <a:bodyPr wrap="square" lIns="0" tIns="0" rIns="0" bIns="0" rtlCol="0" anchor="t"/>
-          <a:lstStyle/>
-          <a:p>
-            <a:pPr algn="ctr" indent="0" marL="0">
-              <a:buNone/>
-            </a:pPr>
-            <a:r>
-              <a:rPr lang="en-US" sz="850" dirty="0">
-                <a:solidFill>
-                  <a:srgbClr val="475569"/>
+              <a:t>Syllables</a:t>
+            </a:r>
+            <a:endParaRPr lang="en-US" sz="1100" dirty="0"/>
+          </a:p>
+        </p:txBody>
+      </p:sp>
+      <p:sp>
+        <p:nvSpPr>
+          <p:cNvPr id="24" name="Shape 22"/>
+          <p:cNvSpPr/>
+          <p:nvPr/>
+        </p:nvSpPr>
+        <p:spPr>
+          <a:xfrm>
+            <a:off x="1874520" y="3273552"/>
+            <a:ext cx="6903720" cy="658368"/>
+          </a:xfrm>
+          <a:prstGeom prst="rect">
+            <a:avLst>
+              <a:gd name="adj" fmla="val 8333"/>
+            </a:avLst>
+          </a:prstGeom>
+          <a:solidFill>
+            <a:srgbClr val="F8FAFC"/>
+          </a:solidFill>
+          <a:ln w="12700">
+            <a:solidFill>
+              <a:srgbClr val="E2E8F0"/>
+            </a:solidFill>
+            <a:prstDash val="dash"/>
+          </a:ln>
+        </p:spPr>
+      </p:sp>
+      <p:sp>
+        <p:nvSpPr>
+          <p:cNvPr id="25" name="Text 23"/>
+          <p:cNvSpPr/>
+          <p:nvPr/>
+        </p:nvSpPr>
+        <p:spPr>
+          <a:xfrm>
+            <a:off x="1874520" y="3273552"/>
+            <a:ext cx="6903720" cy="658368"/>
+          </a:xfrm>
+          <a:prstGeom prst="rect">
+            <a:avLst/>
+          </a:prstGeom>
+          <a:noFill/>
+          <a:ln/>
+        </p:spPr>
+        <p:txBody>
+          <a:bodyPr wrap="square" rtlCol="0" anchor="ctr"/>
+          <a:lstStyle/>
+          <a:p>
+            <a:pPr algn="ctr" indent="0" marL="0">
+              <a:buNone/>
+            </a:pPr>
+            <a:r>
+              <a:rPr lang="en-US" sz="1100" i="1" dirty="0">
+                <a:solidFill>
+                  <a:srgbClr val="CBD5E1"/>
                 </a:solidFill>
                 <a:latin typeface="Calibri" pitchFamily="34" charset="0"/>
                 <a:ea typeface="Calibri" pitchFamily="34" charset="-122"/>
                 <a:cs typeface="Calibri" pitchFamily="34" charset="-120"/>
               </a:rPr>
-              <a:t>past tense</a:t>
-            </a:r>
-            <a:endParaRPr lang="en-US" sz="850" dirty="0"/>
-          </a:p>
-        </p:txBody>
-      </p:sp>
-      <p:sp>
-        <p:nvSpPr>
-          <p:cNvPr id="25" name="Shape 23"/>
-          <p:cNvSpPr/>
-          <p:nvPr/>
-        </p:nvSpPr>
-        <p:spPr>
-          <a:xfrm>
-            <a:off x="365760" y="3273552"/>
-            <a:ext cx="1371600" cy="658368"/>
+              <a:t>Write here...</a:t>
+            </a:r>
+            <a:endParaRPr lang="en-US" sz="1100" dirty="0"/>
+          </a:p>
+        </p:txBody>
+      </p:sp>
+      <p:sp>
+        <p:nvSpPr>
+          <p:cNvPr id="26" name="Shape 24"/>
+          <p:cNvSpPr/>
+          <p:nvPr/>
+        </p:nvSpPr>
+        <p:spPr>
+          <a:xfrm>
+            <a:off x="365760" y="4096512"/>
+            <a:ext cx="1371600" cy="804672"/>
           </a:xfrm>
           <a:prstGeom prst="rect">
             <a:avLst>
-              <a:gd name="adj" fmla="val 8333"/>
+              <a:gd name="adj" fmla="val 6818"/>
             </a:avLst>
           </a:prstGeom>
           <a:solidFill>
@@ -24362,14 +25597,14 @@
       </p:sp>
       <p:sp>
         <p:nvSpPr>
-          <p:cNvPr id="26" name="Text 24"/>
-          <p:cNvSpPr/>
-          <p:nvPr/>
-        </p:nvSpPr>
-        <p:spPr>
-          <a:xfrm>
-            <a:off x="365760" y="3273552"/>
-            <a:ext cx="1371600" cy="658368"/>
+          <p:cNvPr id="27" name="Text 25"/>
+          <p:cNvSpPr/>
+          <p:nvPr/>
+        </p:nvSpPr>
+        <p:spPr>
+          <a:xfrm>
+            <a:off x="365760" y="4096512"/>
+            <a:ext cx="1371600" cy="804672"/>
           </a:xfrm>
           <a:prstGeom prst="rect">
             <a:avLst/>
@@ -24393,7 +25628,7 @@
                 <a:ea typeface="Trebuchet MS" pitchFamily="34" charset="-122"/>
                 <a:cs typeface="Trebuchet MS" pitchFamily="34" charset="-120"/>
               </a:rPr>
-              <a:t>Syllables</a:t>
+              <a:t>Phonemes</a:t>
             </a:r>
             <a:endParaRPr lang="en-US" sz="1100" dirty="0"/>
           </a:p>
@@ -24401,80 +25636,14 @@
       </p:sp>
       <p:sp>
         <p:nvSpPr>
-          <p:cNvPr id="27" name="Shape 25"/>
-          <p:cNvSpPr/>
-          <p:nvPr/>
-        </p:nvSpPr>
-        <p:spPr>
-          <a:xfrm>
-            <a:off x="1874520" y="3273552"/>
-            <a:ext cx="6903720" cy="658368"/>
-          </a:xfrm>
-          <a:prstGeom prst="rect">
-            <a:avLst>
-              <a:gd name="adj" fmla="val 8333"/>
-            </a:avLst>
-          </a:prstGeom>
-          <a:solidFill>
-            <a:srgbClr val="F8FAFC"/>
-          </a:solidFill>
-          <a:ln w="12700">
-            <a:solidFill>
-              <a:srgbClr val="E2E8F0"/>
-            </a:solidFill>
-            <a:prstDash val="dash"/>
-          </a:ln>
-        </p:spPr>
-      </p:sp>
-      <p:sp>
-        <p:nvSpPr>
-          <p:cNvPr id="28" name="Text 26"/>
-          <p:cNvSpPr/>
-          <p:nvPr/>
-        </p:nvSpPr>
-        <p:spPr>
-          <a:xfrm>
-            <a:off x="1874520" y="3273552"/>
-            <a:ext cx="6903720" cy="658368"/>
-          </a:xfrm>
-          <a:prstGeom prst="rect">
-            <a:avLst/>
-          </a:prstGeom>
-          <a:noFill/>
-          <a:ln/>
-        </p:spPr>
-        <p:txBody>
-          <a:bodyPr wrap="square" rtlCol="0" anchor="ctr"/>
-          <a:lstStyle/>
-          <a:p>
-            <a:pPr algn="ctr" indent="0" marL="0">
-              <a:buNone/>
-            </a:pPr>
-            <a:r>
-              <a:rPr lang="en-US" sz="1100" i="1" dirty="0">
-                <a:solidFill>
-                  <a:srgbClr val="CBD5E1"/>
-                </a:solidFill>
-                <a:latin typeface="Calibri" pitchFamily="34" charset="0"/>
-                <a:ea typeface="Calibri" pitchFamily="34" charset="-122"/>
-                <a:cs typeface="Calibri" pitchFamily="34" charset="-120"/>
-              </a:rPr>
-              <a:t>Write here...</a:t>
-            </a:r>
-            <a:endParaRPr lang="en-US" sz="1100" dirty="0"/>
-          </a:p>
-        </p:txBody>
-      </p:sp>
-      <p:sp>
-        <p:nvSpPr>
-          <p:cNvPr id="29" name="Shape 27"/>
-          <p:cNvSpPr/>
-          <p:nvPr/>
-        </p:nvSpPr>
-        <p:spPr>
-          <a:xfrm>
-            <a:off x="365760" y="4096512"/>
-            <a:ext cx="1371600" cy="804672"/>
+          <p:cNvPr id="28" name="Shape 26"/>
+          <p:cNvSpPr/>
+          <p:nvPr/>
+        </p:nvSpPr>
+        <p:spPr>
+          <a:xfrm>
+            <a:off x="1874520" y="4096512"/>
+            <a:ext cx="6903720" cy="804672"/>
           </a:xfrm>
           <a:prstGeom prst="rect">
             <a:avLst>
@@ -24482,85 +25651,19 @@
             </a:avLst>
           </a:prstGeom>
           <a:solidFill>
-            <a:srgbClr val="E2E8F0"/>
+            <a:srgbClr val="F8FAFC"/>
           </a:solidFill>
           <a:ln w="12700">
             <a:solidFill>
               <a:srgbClr val="E2E8F0"/>
             </a:solidFill>
-            <a:prstDash val="solid"/>
-          </a:ln>
-        </p:spPr>
-      </p:sp>
-      <p:sp>
-        <p:nvSpPr>
-          <p:cNvPr id="30" name="Text 28"/>
-          <p:cNvSpPr/>
-          <p:nvPr/>
-        </p:nvSpPr>
-        <p:spPr>
-          <a:xfrm>
-            <a:off x="365760" y="4096512"/>
-            <a:ext cx="1371600" cy="804672"/>
-          </a:xfrm>
-          <a:prstGeom prst="rect">
-            <a:avLst/>
-          </a:prstGeom>
-          <a:noFill/>
-          <a:ln/>
-        </p:spPr>
-        <p:txBody>
-          <a:bodyPr wrap="square" lIns="0" tIns="0" rIns="0" bIns="0" rtlCol="0" anchor="ctr"/>
-          <a:lstStyle/>
-          <a:p>
-            <a:pPr algn="ctr" indent="0" marL="0">
-              <a:buNone/>
-            </a:pPr>
-            <a:r>
-              <a:rPr lang="en-US" sz="1100" b="1" dirty="0">
-                <a:solidFill>
-                  <a:srgbClr val="475569"/>
-                </a:solidFill>
-                <a:latin typeface="Trebuchet MS" pitchFamily="34" charset="0"/>
-                <a:ea typeface="Trebuchet MS" pitchFamily="34" charset="-122"/>
-                <a:cs typeface="Trebuchet MS" pitchFamily="34" charset="-120"/>
-              </a:rPr>
-              <a:t>Phonemes</a:t>
-            </a:r>
-            <a:endParaRPr lang="en-US" sz="1100" dirty="0"/>
-          </a:p>
-        </p:txBody>
-      </p:sp>
-      <p:sp>
-        <p:nvSpPr>
-          <p:cNvPr id="31" name="Shape 29"/>
-          <p:cNvSpPr/>
-          <p:nvPr/>
-        </p:nvSpPr>
-        <p:spPr>
-          <a:xfrm>
-            <a:off x="1874520" y="4096512"/>
-            <a:ext cx="6903720" cy="804672"/>
-          </a:xfrm>
-          <a:prstGeom prst="rect">
-            <a:avLst>
-              <a:gd name="adj" fmla="val 6818"/>
-            </a:avLst>
-          </a:prstGeom>
-          <a:solidFill>
-            <a:srgbClr val="F8FAFC"/>
-          </a:solidFill>
-          <a:ln w="12700">
-            <a:solidFill>
-              <a:srgbClr val="E2E8F0"/>
-            </a:solidFill>
             <a:prstDash val="dash"/>
           </a:ln>
         </p:spPr>
       </p:sp>
       <p:sp>
         <p:nvSpPr>
-          <p:cNvPr id="32" name="Text 30"/>
+          <p:cNvPr id="29" name="Text 27"/>
           <p:cNvSpPr/>
           <p:nvPr/>
         </p:nvSpPr>
@@ -24883,7 +25986,7 @@
                 <a:ea typeface="Calibri" pitchFamily="34" charset="-122"/>
                 <a:cs typeface="Calibri" pitchFamily="34" charset="-120"/>
               </a:rPr>
-              <a:t>Word Labs  •  wordlabs.app  •  Root: 'count' = to number or reckon</a:t>
+              <a:t>Word Labs  •  wordlabs.app  •  Root: 'count' = to number or calculate</a:t>
             </a:r>
             <a:endParaRPr lang="en-US" sz="800" dirty="0"/>
           </a:p>
@@ -24956,7 +26059,7 @@
                 <a:ea typeface="Trebuchet MS" pitchFamily="34" charset="-122"/>
                 <a:cs typeface="Trebuchet MS" pitchFamily="34" charset="-120"/>
               </a:rPr>
-              <a:t>We are learning that the root 'count' means 'to number or reckon'.</a:t>
+              <a:t>We are learning that the root 'count' means 'to number or calculate'.</a:t>
             </a:r>
             <a:endParaRPr lang="en-US" sz="2000" dirty="0"/>
           </a:p>
@@ -25602,7 +26705,7 @@
                 <a:ea typeface="Calibri" pitchFamily="34" charset="-122"/>
                 <a:cs typeface="Calibri" pitchFamily="34" charset="-120"/>
               </a:rPr>
-              <a:t>Word Labs  •  wordlabs.app  •  Root: 'count' = to number or reckon</a:t>
+              <a:t>Word Labs  •  wordlabs.app  •  Root: 'count' = to number or calculate</a:t>
             </a:r>
             <a:endParaRPr lang="en-US" sz="800" dirty="0"/>
           </a:p>
@@ -25741,7 +26844,7 @@
                 <a:ea typeface="Trebuchet MS" pitchFamily="34" charset="-122"/>
                 <a:cs typeface="Trebuchet MS" pitchFamily="34" charset="-120"/>
               </a:rPr>
-              <a:t>miscounted</a:t>
+              <a:t>recount</a:t>
             </a:r>
             <a:endParaRPr lang="en-US" sz="2800" dirty="0"/>
           </a:p>
@@ -25821,7 +26924,7 @@
         </p:nvSpPr>
         <p:spPr>
           <a:xfrm>
-            <a:off x="2221992" y="2258568"/>
+            <a:off x="2938272" y="2258568"/>
             <a:ext cx="1828800" cy="292608"/>
           </a:xfrm>
           <a:prstGeom prst="rect">
@@ -25855,7 +26958,7 @@
         </p:nvSpPr>
         <p:spPr>
           <a:xfrm>
-            <a:off x="2221992" y="2258568"/>
+            <a:off x="2938272" y="2258568"/>
             <a:ext cx="1828800" cy="292608"/>
           </a:xfrm>
           <a:prstGeom prst="rect">
@@ -25880,7 +26983,7 @@
                 <a:ea typeface="Trebuchet MS" pitchFamily="34" charset="-122"/>
                 <a:cs typeface="Trebuchet MS" pitchFamily="34" charset="-120"/>
               </a:rPr>
-              <a:t>mis</a:t>
+              <a:t>re</a:t>
             </a:r>
             <a:endParaRPr lang="en-US" sz="1300" dirty="0"/>
           </a:p>
@@ -25894,7 +26997,7 @@
         </p:nvSpPr>
         <p:spPr>
           <a:xfrm>
-            <a:off x="2221992" y="2569464"/>
+            <a:off x="2938272" y="2569464"/>
             <a:ext cx="1828800" cy="201168"/>
           </a:xfrm>
           <a:prstGeom prst="rect">
@@ -25919,7 +27022,7 @@
                 <a:ea typeface="Calibri" pitchFamily="34" charset="-122"/>
                 <a:cs typeface="Calibri" pitchFamily="34" charset="-120"/>
               </a:rPr>
-              <a:t>wrongly</a:t>
+              <a:t>again</a:t>
             </a:r>
             <a:endParaRPr lang="en-US" sz="850" dirty="0"/>
           </a:p>
@@ -25933,7 +27036,7 @@
         </p:nvSpPr>
         <p:spPr>
           <a:xfrm>
-            <a:off x="4370832" y="2258568"/>
+            <a:off x="5803392" y="2258568"/>
             <a:ext cx="1828800" cy="292608"/>
           </a:xfrm>
           <a:prstGeom prst="rect">
@@ -25967,7 +27070,7 @@
         </p:nvSpPr>
         <p:spPr>
           <a:xfrm>
-            <a:off x="4370832" y="2258568"/>
+            <a:off x="5803392" y="2258568"/>
             <a:ext cx="1828800" cy="292608"/>
           </a:xfrm>
           <a:prstGeom prst="rect">
@@ -26006,7 +27109,7 @@
         </p:nvSpPr>
         <p:spPr>
           <a:xfrm>
-            <a:off x="4370832" y="2569464"/>
+            <a:off x="5803392" y="2569464"/>
             <a:ext cx="1828800" cy="201168"/>
           </a:xfrm>
           <a:prstGeom prst="rect">
@@ -26031,7 +27134,7 @@
                 <a:ea typeface="Calibri" pitchFamily="34" charset="-122"/>
                 <a:cs typeface="Calibri" pitchFamily="34" charset="-120"/>
               </a:rPr>
-              <a:t>to number or reckon</a:t>
+              <a:t>to number or calculate</a:t>
             </a:r>
             <a:endParaRPr lang="en-US" sz="850" dirty="0"/>
           </a:p>
@@ -26045,30 +27148,23 @@
         </p:nvSpPr>
         <p:spPr>
           <a:xfrm>
-            <a:off x="6519672" y="2258568"/>
-            <a:ext cx="1828800" cy="292608"/>
+            <a:off x="365760" y="3273552"/>
+            <a:ext cx="1371600" cy="658368"/>
           </a:xfrm>
           <a:prstGeom prst="rect">
             <a:avLst>
-              <a:gd name="adj" fmla="val 25000"/>
+              <a:gd name="adj" fmla="val 8333"/>
             </a:avLst>
           </a:prstGeom>
           <a:solidFill>
-            <a:srgbClr val="FCE7F3"/>
-          </a:solidFill>
-          <a:ln w="19050">
-            <a:solidFill>
-              <a:srgbClr val="DB2777"/>
-            </a:solidFill>
-            <a:prstDash val="solid"/>
-          </a:ln>
-          <a:effectLst>
-            <a:outerShdw sx="100000" sy="100000" kx="0" ky="0" algn="bl" rotWithShape="0" blurRad="101600" dist="38100" dir="8100000">
-              <a:srgbClr val="000000">
-                <a:alpha val="12000"/>
-              </a:srgbClr>
-            </a:outerShdw>
-          </a:effectLst>
+            <a:srgbClr val="E2E8F0"/>
+          </a:solidFill>
+          <a:ln w="12700">
+            <a:solidFill>
+              <a:srgbClr val="E2E8F0"/>
+            </a:solidFill>
+            <a:prstDash val="solid"/>
+          </a:ln>
         </p:spPr>
       </p:sp>
       <p:sp>
@@ -26079,8 +27175,8 @@
         </p:nvSpPr>
         <p:spPr>
           <a:xfrm>
-            <a:off x="6519672" y="2258568"/>
-            <a:ext cx="1828800" cy="292608"/>
+            <a:off x="365760" y="3273552"/>
+            <a:ext cx="1371600" cy="658368"/>
           </a:xfrm>
           <a:prstGeom prst="rect">
             <a:avLst/>
@@ -26096,69 +27192,30 @@
               <a:buNone/>
             </a:pPr>
             <a:r>
-              <a:rPr lang="en-US" sz="1300" b="1" dirty="0">
-                <a:solidFill>
-                  <a:srgbClr val="9D174D"/>
+              <a:rPr lang="en-US" sz="1100" b="1" dirty="0">
+                <a:solidFill>
+                  <a:srgbClr val="475569"/>
                 </a:solidFill>
                 <a:latin typeface="Trebuchet MS" pitchFamily="34" charset="0"/>
                 <a:ea typeface="Trebuchet MS" pitchFamily="34" charset="-122"/>
                 <a:cs typeface="Trebuchet MS" pitchFamily="34" charset="-120"/>
               </a:rPr>
-              <a:t>ed</a:t>
-            </a:r>
-            <a:endParaRPr lang="en-US" sz="1300" dirty="0"/>
-          </a:p>
-        </p:txBody>
-      </p:sp>
-      <p:sp>
-        <p:nvSpPr>
-          <p:cNvPr id="24" name="Text 22"/>
-          <p:cNvSpPr/>
-          <p:nvPr/>
-        </p:nvSpPr>
-        <p:spPr>
-          <a:xfrm>
-            <a:off x="6519672" y="2569464"/>
-            <a:ext cx="1828800" cy="201168"/>
-          </a:xfrm>
-          <a:prstGeom prst="rect">
-            <a:avLst/>
-          </a:prstGeom>
-          <a:noFill/>
-          <a:ln/>
-        </p:spPr>
-        <p:txBody>
-          <a:bodyPr wrap="square" lIns="0" tIns="0" rIns="0" bIns="0" rtlCol="0" anchor="t"/>
-          <a:lstStyle/>
-          <a:p>
-            <a:pPr algn="ctr" indent="0" marL="0">
-              <a:buNone/>
-            </a:pPr>
-            <a:r>
-              <a:rPr lang="en-US" sz="850" dirty="0">
-                <a:solidFill>
-                  <a:srgbClr val="475569"/>
-                </a:solidFill>
-                <a:latin typeface="Calibri" pitchFamily="34" charset="0"/>
-                <a:ea typeface="Calibri" pitchFamily="34" charset="-122"/>
-                <a:cs typeface="Calibri" pitchFamily="34" charset="-120"/>
-              </a:rPr>
-              <a:t>past tense</a:t>
-            </a:r>
-            <a:endParaRPr lang="en-US" sz="850" dirty="0"/>
-          </a:p>
-        </p:txBody>
-      </p:sp>
-      <p:sp>
-        <p:nvSpPr>
-          <p:cNvPr id="25" name="Shape 23"/>
-          <p:cNvSpPr/>
-          <p:nvPr/>
-        </p:nvSpPr>
-        <p:spPr>
-          <a:xfrm>
-            <a:off x="365760" y="3273552"/>
-            <a:ext cx="1371600" cy="658368"/>
+              <a:t>Syllables</a:t>
+            </a:r>
+            <a:endParaRPr lang="en-US" sz="1100" dirty="0"/>
+          </a:p>
+        </p:txBody>
+      </p:sp>
+      <p:sp>
+        <p:nvSpPr>
+          <p:cNvPr id="24" name="Shape 22"/>
+          <p:cNvSpPr/>
+          <p:nvPr/>
+        </p:nvSpPr>
+        <p:spPr>
+          <a:xfrm>
+            <a:off x="1874520" y="3273552"/>
+            <a:ext cx="6903720" cy="658368"/>
           </a:xfrm>
           <a:prstGeom prst="rect">
             <a:avLst>
@@ -26166,11 +27223,38 @@
             </a:avLst>
           </a:prstGeom>
           <a:solidFill>
-            <a:srgbClr val="E2E8F0"/>
-          </a:solidFill>
-          <a:ln w="12700">
-            <a:solidFill>
-              <a:srgbClr val="E2E8F0"/>
+            <a:srgbClr val="CCFBF1"/>
+          </a:solidFill>
+          <a:ln w="12700">
+            <a:solidFill>
+              <a:srgbClr val="0D9488"/>
+            </a:solidFill>
+            <a:prstDash val="solid"/>
+          </a:ln>
+        </p:spPr>
+      </p:sp>
+      <p:sp>
+        <p:nvSpPr>
+          <p:cNvPr id="25" name="Shape 23"/>
+          <p:cNvSpPr/>
+          <p:nvPr/>
+        </p:nvSpPr>
+        <p:spPr>
+          <a:xfrm>
+            <a:off x="2999232" y="3364992"/>
+            <a:ext cx="1645920" cy="475488"/>
+          </a:xfrm>
+          <a:prstGeom prst="rect">
+            <a:avLst>
+              <a:gd name="adj" fmla="val 9615"/>
+            </a:avLst>
+          </a:prstGeom>
+          <a:solidFill>
+            <a:srgbClr val="FFFFFF"/>
+          </a:solidFill>
+          <a:ln w="12700">
+            <a:solidFill>
+              <a:srgbClr val="0D9488"/>
             </a:solidFill>
             <a:prstDash val="solid"/>
           </a:ln>
@@ -26184,8 +27268,8 @@
         </p:nvSpPr>
         <p:spPr>
           <a:xfrm>
-            <a:off x="365760" y="3273552"/>
-            <a:ext cx="1371600" cy="658368"/>
+            <a:off x="2999232" y="3364992"/>
+            <a:ext cx="1645920" cy="475488"/>
           </a:xfrm>
           <a:prstGeom prst="rect">
             <a:avLst/>
@@ -26201,46 +27285,58 @@
               <a:buNone/>
             </a:pPr>
             <a:r>
-              <a:rPr lang="en-US" sz="1100" b="1" dirty="0">
-                <a:solidFill>
-                  <a:srgbClr val="475569"/>
+              <a:rPr lang="en-US" sz="1400" b="1" dirty="0">
+                <a:solidFill>
+                  <a:srgbClr val="0D9488"/>
                 </a:solidFill>
                 <a:latin typeface="Trebuchet MS" pitchFamily="34" charset="0"/>
                 <a:ea typeface="Trebuchet MS" pitchFamily="34" charset="-122"/>
                 <a:cs typeface="Trebuchet MS" pitchFamily="34" charset="-120"/>
               </a:rPr>
-              <a:t>Syllables</a:t>
-            </a:r>
-            <a:endParaRPr lang="en-US" sz="1100" dirty="0"/>
-          </a:p>
-        </p:txBody>
-      </p:sp>
-      <p:sp>
-        <p:nvSpPr>
-          <p:cNvPr id="27" name="Shape 25"/>
-          <p:cNvSpPr/>
-          <p:nvPr/>
-        </p:nvSpPr>
-        <p:spPr>
-          <a:xfrm>
-            <a:off x="1874520" y="3273552"/>
-            <a:ext cx="6903720" cy="658368"/>
-          </a:xfrm>
-          <a:prstGeom prst="rect">
-            <a:avLst>
-              <a:gd name="adj" fmla="val 8333"/>
-            </a:avLst>
-          </a:prstGeom>
-          <a:solidFill>
-            <a:srgbClr val="CCFBF1"/>
-          </a:solidFill>
-          <a:ln w="12700">
-            <a:solidFill>
-              <a:srgbClr val="0D9488"/>
-            </a:solidFill>
-            <a:prstDash val="solid"/>
-          </a:ln>
-        </p:spPr>
+              <a:t>re</a:t>
+            </a:r>
+            <a:endParaRPr lang="en-US" sz="1400" dirty="0"/>
+          </a:p>
+        </p:txBody>
+      </p:sp>
+      <p:sp>
+        <p:nvSpPr>
+          <p:cNvPr id="27" name="Text 25"/>
+          <p:cNvSpPr/>
+          <p:nvPr/>
+        </p:nvSpPr>
+        <p:spPr>
+          <a:xfrm>
+            <a:off x="4645152" y="3364992"/>
+            <a:ext cx="1097280" cy="475488"/>
+          </a:xfrm>
+          <a:prstGeom prst="rect">
+            <a:avLst/>
+          </a:prstGeom>
+          <a:noFill/>
+          <a:ln/>
+        </p:spPr>
+        <p:txBody>
+          <a:bodyPr wrap="square" lIns="0" tIns="0" rIns="0" bIns="0" rtlCol="0" anchor="ctr"/>
+          <a:lstStyle/>
+          <a:p>
+            <a:pPr algn="ctr" indent="0" marL="0">
+              <a:buNone/>
+            </a:pPr>
+            <a:r>
+              <a:rPr lang="en-US" sz="1600" b="1" dirty="0">
+                <a:solidFill>
+                  <a:srgbClr val="0D9488"/>
+                </a:solidFill>
+                <a:latin typeface="Trebuchet MS" pitchFamily="34" charset="0"/>
+                <a:ea typeface="Trebuchet MS" pitchFamily="34" charset="-122"/>
+                <a:cs typeface="Trebuchet MS" pitchFamily="34" charset="-120"/>
+              </a:rPr>
+              <a:t>·</a:t>
+            </a:r>
+            <a:endParaRPr lang="en-US" sz="1600" dirty="0"/>
+          </a:p>
+        </p:txBody>
       </p:sp>
       <p:sp>
         <p:nvSpPr>
@@ -26250,7 +27346,7 @@
         </p:nvSpPr>
         <p:spPr>
           <a:xfrm>
-            <a:off x="2313432" y="3364992"/>
+            <a:off x="5742432" y="3364992"/>
             <a:ext cx="1645920" cy="475488"/>
           </a:xfrm>
           <a:prstGeom prst="rect">
@@ -26277,7 +27373,7 @@
         </p:nvSpPr>
         <p:spPr>
           <a:xfrm>
-            <a:off x="2313432" y="3364992"/>
+            <a:off x="5742432" y="3364992"/>
             <a:ext cx="1645920" cy="475488"/>
           </a:xfrm>
           <a:prstGeom prst="rect">
@@ -26302,7 +27398,7 @@
                 <a:ea typeface="Trebuchet MS" pitchFamily="34" charset="-122"/>
                 <a:cs typeface="Trebuchet MS" pitchFamily="34" charset="-120"/>
               </a:rPr>
-              <a:t>mis</a:t>
+              <a:t>count</a:t>
             </a:r>
             <a:endParaRPr lang="en-US" sz="1400" dirty="0"/>
           </a:p>
@@ -26310,14 +27406,41 @@
       </p:sp>
       <p:sp>
         <p:nvSpPr>
-          <p:cNvPr id="30" name="Text 28"/>
-          <p:cNvSpPr/>
-          <p:nvPr/>
-        </p:nvSpPr>
-        <p:spPr>
-          <a:xfrm>
-            <a:off x="3959352" y="3364992"/>
-            <a:ext cx="411480" cy="475488"/>
+          <p:cNvPr id="30" name="Shape 28"/>
+          <p:cNvSpPr/>
+          <p:nvPr/>
+        </p:nvSpPr>
+        <p:spPr>
+          <a:xfrm>
+            <a:off x="365760" y="4096512"/>
+            <a:ext cx="1371600" cy="804672"/>
+          </a:xfrm>
+          <a:prstGeom prst="rect">
+            <a:avLst>
+              <a:gd name="adj" fmla="val 6818"/>
+            </a:avLst>
+          </a:prstGeom>
+          <a:solidFill>
+            <a:srgbClr val="E2E8F0"/>
+          </a:solidFill>
+          <a:ln w="12700">
+            <a:solidFill>
+              <a:srgbClr val="E2E8F0"/>
+            </a:solidFill>
+            <a:prstDash val="solid"/>
+          </a:ln>
+        </p:spPr>
+      </p:sp>
+      <p:sp>
+        <p:nvSpPr>
+          <p:cNvPr id="31" name="Text 29"/>
+          <p:cNvSpPr/>
+          <p:nvPr/>
+        </p:nvSpPr>
+        <p:spPr>
+          <a:xfrm>
+            <a:off x="365760" y="4096512"/>
+            <a:ext cx="1371600" cy="804672"/>
           </a:xfrm>
           <a:prstGeom prst="rect">
             <a:avLst/>
@@ -26333,201 +27456,30 @@
               <a:buNone/>
             </a:pPr>
             <a:r>
-              <a:rPr lang="en-US" sz="1600" b="1" dirty="0">
-                <a:solidFill>
-                  <a:srgbClr val="0D9488"/>
+              <a:rPr lang="en-US" sz="1100" b="1" dirty="0">
+                <a:solidFill>
+                  <a:srgbClr val="475569"/>
                 </a:solidFill>
                 <a:latin typeface="Trebuchet MS" pitchFamily="34" charset="0"/>
                 <a:ea typeface="Trebuchet MS" pitchFamily="34" charset="-122"/>
                 <a:cs typeface="Trebuchet MS" pitchFamily="34" charset="-120"/>
               </a:rPr>
-              <a:t>·</a:t>
-            </a:r>
-            <a:endParaRPr lang="en-US" sz="1600" dirty="0"/>
-          </a:p>
-        </p:txBody>
-      </p:sp>
-      <p:sp>
-        <p:nvSpPr>
-          <p:cNvPr id="31" name="Shape 29"/>
-          <p:cNvSpPr/>
-          <p:nvPr/>
-        </p:nvSpPr>
-        <p:spPr>
-          <a:xfrm>
-            <a:off x="4370832" y="3364992"/>
-            <a:ext cx="1645920" cy="475488"/>
-          </a:xfrm>
-          <a:prstGeom prst="rect">
-            <a:avLst>
-              <a:gd name="adj" fmla="val 9615"/>
-            </a:avLst>
-          </a:prstGeom>
-          <a:solidFill>
-            <a:srgbClr val="FFFFFF"/>
-          </a:solidFill>
-          <a:ln w="12700">
-            <a:solidFill>
-              <a:srgbClr val="0D9488"/>
-            </a:solidFill>
-            <a:prstDash val="solid"/>
-          </a:ln>
-        </p:spPr>
-      </p:sp>
-      <p:sp>
-        <p:nvSpPr>
-          <p:cNvPr id="32" name="Text 30"/>
-          <p:cNvSpPr/>
-          <p:nvPr/>
-        </p:nvSpPr>
-        <p:spPr>
-          <a:xfrm>
-            <a:off x="4370832" y="3364992"/>
-            <a:ext cx="1645920" cy="475488"/>
-          </a:xfrm>
-          <a:prstGeom prst="rect">
-            <a:avLst/>
-          </a:prstGeom>
-          <a:noFill/>
-          <a:ln/>
-        </p:spPr>
-        <p:txBody>
-          <a:bodyPr wrap="square" lIns="0" tIns="0" rIns="0" bIns="0" rtlCol="0" anchor="ctr"/>
-          <a:lstStyle/>
-          <a:p>
-            <a:pPr algn="ctr" indent="0" marL="0">
-              <a:buNone/>
-            </a:pPr>
-            <a:r>
-              <a:rPr lang="en-US" sz="1400" b="1" dirty="0">
-                <a:solidFill>
-                  <a:srgbClr val="0D9488"/>
-                </a:solidFill>
-                <a:latin typeface="Trebuchet MS" pitchFamily="34" charset="0"/>
-                <a:ea typeface="Trebuchet MS" pitchFamily="34" charset="-122"/>
-                <a:cs typeface="Trebuchet MS" pitchFamily="34" charset="-120"/>
-              </a:rPr>
-              <a:t>count</a:t>
-            </a:r>
-            <a:endParaRPr lang="en-US" sz="1400" dirty="0"/>
-          </a:p>
-        </p:txBody>
-      </p:sp>
-      <p:sp>
-        <p:nvSpPr>
-          <p:cNvPr id="33" name="Text 31"/>
-          <p:cNvSpPr/>
-          <p:nvPr/>
-        </p:nvSpPr>
-        <p:spPr>
-          <a:xfrm>
-            <a:off x="6016752" y="3364992"/>
-            <a:ext cx="411480" cy="475488"/>
-          </a:xfrm>
-          <a:prstGeom prst="rect">
-            <a:avLst/>
-          </a:prstGeom>
-          <a:noFill/>
-          <a:ln/>
-        </p:spPr>
-        <p:txBody>
-          <a:bodyPr wrap="square" lIns="0" tIns="0" rIns="0" bIns="0" rtlCol="0" anchor="ctr"/>
-          <a:lstStyle/>
-          <a:p>
-            <a:pPr algn="ctr" indent="0" marL="0">
-              <a:buNone/>
-            </a:pPr>
-            <a:r>
-              <a:rPr lang="en-US" sz="1600" b="1" dirty="0">
-                <a:solidFill>
-                  <a:srgbClr val="0D9488"/>
-                </a:solidFill>
-                <a:latin typeface="Trebuchet MS" pitchFamily="34" charset="0"/>
-                <a:ea typeface="Trebuchet MS" pitchFamily="34" charset="-122"/>
-                <a:cs typeface="Trebuchet MS" pitchFamily="34" charset="-120"/>
-              </a:rPr>
-              <a:t>·</a:t>
-            </a:r>
-            <a:endParaRPr lang="en-US" sz="1600" dirty="0"/>
-          </a:p>
-        </p:txBody>
-      </p:sp>
-      <p:sp>
-        <p:nvSpPr>
-          <p:cNvPr id="34" name="Shape 32"/>
-          <p:cNvSpPr/>
-          <p:nvPr/>
-        </p:nvSpPr>
-        <p:spPr>
-          <a:xfrm>
-            <a:off x="6428232" y="3364992"/>
-            <a:ext cx="1645920" cy="475488"/>
-          </a:xfrm>
-          <a:prstGeom prst="rect">
-            <a:avLst>
-              <a:gd name="adj" fmla="val 9615"/>
-            </a:avLst>
-          </a:prstGeom>
-          <a:solidFill>
-            <a:srgbClr val="FFFFFF"/>
-          </a:solidFill>
-          <a:ln w="12700">
-            <a:solidFill>
-              <a:srgbClr val="0D9488"/>
-            </a:solidFill>
-            <a:prstDash val="solid"/>
-          </a:ln>
-        </p:spPr>
-      </p:sp>
-      <p:sp>
-        <p:nvSpPr>
-          <p:cNvPr id="35" name="Text 33"/>
-          <p:cNvSpPr/>
-          <p:nvPr/>
-        </p:nvSpPr>
-        <p:spPr>
-          <a:xfrm>
-            <a:off x="6428232" y="3364992"/>
-            <a:ext cx="1645920" cy="475488"/>
-          </a:xfrm>
-          <a:prstGeom prst="rect">
-            <a:avLst/>
-          </a:prstGeom>
-          <a:noFill/>
-          <a:ln/>
-        </p:spPr>
-        <p:txBody>
-          <a:bodyPr wrap="square" lIns="0" tIns="0" rIns="0" bIns="0" rtlCol="0" anchor="ctr"/>
-          <a:lstStyle/>
-          <a:p>
-            <a:pPr algn="ctr" indent="0" marL="0">
-              <a:buNone/>
-            </a:pPr>
-            <a:r>
-              <a:rPr lang="en-US" sz="1400" b="1" dirty="0">
-                <a:solidFill>
-                  <a:srgbClr val="0D9488"/>
-                </a:solidFill>
-                <a:latin typeface="Trebuchet MS" pitchFamily="34" charset="0"/>
-                <a:ea typeface="Trebuchet MS" pitchFamily="34" charset="-122"/>
-                <a:cs typeface="Trebuchet MS" pitchFamily="34" charset="-120"/>
-              </a:rPr>
-              <a:t>ed</a:t>
-            </a:r>
-            <a:endParaRPr lang="en-US" sz="1400" dirty="0"/>
-          </a:p>
-        </p:txBody>
-      </p:sp>
-      <p:sp>
-        <p:nvSpPr>
-          <p:cNvPr id="36" name="Shape 34"/>
-          <p:cNvSpPr/>
-          <p:nvPr/>
-        </p:nvSpPr>
-        <p:spPr>
-          <a:xfrm>
-            <a:off x="365760" y="4096512"/>
-            <a:ext cx="1371600" cy="804672"/>
+              <a:t>Phonemes</a:t>
+            </a:r>
+            <a:endParaRPr lang="en-US" sz="1100" dirty="0"/>
+          </a:p>
+        </p:txBody>
+      </p:sp>
+      <p:sp>
+        <p:nvSpPr>
+          <p:cNvPr id="32" name="Shape 30"/>
+          <p:cNvSpPr/>
+          <p:nvPr/>
+        </p:nvSpPr>
+        <p:spPr>
+          <a:xfrm>
+            <a:off x="1874520" y="4096512"/>
+            <a:ext cx="6903720" cy="804672"/>
           </a:xfrm>
           <a:prstGeom prst="rect">
             <a:avLst>
@@ -26535,85 +27487,19 @@
             </a:avLst>
           </a:prstGeom>
           <a:solidFill>
-            <a:srgbClr val="E2E8F0"/>
+            <a:srgbClr val="F8FAFC"/>
           </a:solidFill>
           <a:ln w="12700">
             <a:solidFill>
               <a:srgbClr val="E2E8F0"/>
             </a:solidFill>
-            <a:prstDash val="solid"/>
-          </a:ln>
-        </p:spPr>
-      </p:sp>
-      <p:sp>
-        <p:nvSpPr>
-          <p:cNvPr id="37" name="Text 35"/>
-          <p:cNvSpPr/>
-          <p:nvPr/>
-        </p:nvSpPr>
-        <p:spPr>
-          <a:xfrm>
-            <a:off x="365760" y="4096512"/>
-            <a:ext cx="1371600" cy="804672"/>
-          </a:xfrm>
-          <a:prstGeom prst="rect">
-            <a:avLst/>
-          </a:prstGeom>
-          <a:noFill/>
-          <a:ln/>
-        </p:spPr>
-        <p:txBody>
-          <a:bodyPr wrap="square" lIns="0" tIns="0" rIns="0" bIns="0" rtlCol="0" anchor="ctr"/>
-          <a:lstStyle/>
-          <a:p>
-            <a:pPr algn="ctr" indent="0" marL="0">
-              <a:buNone/>
-            </a:pPr>
-            <a:r>
-              <a:rPr lang="en-US" sz="1100" b="1" dirty="0">
-                <a:solidFill>
-                  <a:srgbClr val="475569"/>
-                </a:solidFill>
-                <a:latin typeface="Trebuchet MS" pitchFamily="34" charset="0"/>
-                <a:ea typeface="Trebuchet MS" pitchFamily="34" charset="-122"/>
-                <a:cs typeface="Trebuchet MS" pitchFamily="34" charset="-120"/>
-              </a:rPr>
-              <a:t>Phonemes</a:t>
-            </a:r>
-            <a:endParaRPr lang="en-US" sz="1100" dirty="0"/>
-          </a:p>
-        </p:txBody>
-      </p:sp>
-      <p:sp>
-        <p:nvSpPr>
-          <p:cNvPr id="38" name="Shape 36"/>
-          <p:cNvSpPr/>
-          <p:nvPr/>
-        </p:nvSpPr>
-        <p:spPr>
-          <a:xfrm>
-            <a:off x="1874520" y="4096512"/>
-            <a:ext cx="6903720" cy="804672"/>
-          </a:xfrm>
-          <a:prstGeom prst="rect">
-            <a:avLst>
-              <a:gd name="adj" fmla="val 6818"/>
-            </a:avLst>
-          </a:prstGeom>
-          <a:solidFill>
-            <a:srgbClr val="F8FAFC"/>
-          </a:solidFill>
-          <a:ln w="12700">
-            <a:solidFill>
-              <a:srgbClr val="E2E8F0"/>
-            </a:solidFill>
             <a:prstDash val="dash"/>
           </a:ln>
         </p:spPr>
       </p:sp>
       <p:sp>
         <p:nvSpPr>
-          <p:cNvPr id="39" name="Text 37"/>
+          <p:cNvPr id="33" name="Text 31"/>
           <p:cNvSpPr/>
           <p:nvPr/>
         </p:nvSpPr>
@@ -26936,7 +27822,7 @@
                 <a:ea typeface="Calibri" pitchFamily="34" charset="-122"/>
                 <a:cs typeface="Calibri" pitchFamily="34" charset="-120"/>
               </a:rPr>
-              <a:t>Word Labs  •  wordlabs.app  •  Root: 'count' = to number or reckon</a:t>
+              <a:t>Word Labs  •  wordlabs.app  •  Root: 'count' = to number or calculate</a:t>
             </a:r>
             <a:endParaRPr lang="en-US" sz="800" dirty="0"/>
           </a:p>
@@ -27075,7 +27961,7 @@
                 <a:ea typeface="Trebuchet MS" pitchFamily="34" charset="-122"/>
                 <a:cs typeface="Trebuchet MS" pitchFamily="34" charset="-120"/>
               </a:rPr>
-              <a:t>miscounted</a:t>
+              <a:t>recount</a:t>
             </a:r>
             <a:endParaRPr lang="en-US" sz="2800" dirty="0"/>
           </a:p>
@@ -27155,7 +28041,7 @@
         </p:nvSpPr>
         <p:spPr>
           <a:xfrm>
-            <a:off x="2221992" y="2258568"/>
+            <a:off x="2938272" y="2258568"/>
             <a:ext cx="1828800" cy="292608"/>
           </a:xfrm>
           <a:prstGeom prst="rect">
@@ -27189,7 +28075,7 @@
         </p:nvSpPr>
         <p:spPr>
           <a:xfrm>
-            <a:off x="2221992" y="2258568"/>
+            <a:off x="2938272" y="2258568"/>
             <a:ext cx="1828800" cy="292608"/>
           </a:xfrm>
           <a:prstGeom prst="rect">
@@ -27214,7 +28100,7 @@
                 <a:ea typeface="Trebuchet MS" pitchFamily="34" charset="-122"/>
                 <a:cs typeface="Trebuchet MS" pitchFamily="34" charset="-120"/>
               </a:rPr>
-              <a:t>mis</a:t>
+              <a:t>re</a:t>
             </a:r>
             <a:endParaRPr lang="en-US" sz="1300" dirty="0"/>
           </a:p>
@@ -27228,7 +28114,7 @@
         </p:nvSpPr>
         <p:spPr>
           <a:xfrm>
-            <a:off x="2221992" y="2569464"/>
+            <a:off x="2938272" y="2569464"/>
             <a:ext cx="1828800" cy="201168"/>
           </a:xfrm>
           <a:prstGeom prst="rect">
@@ -27253,7 +28139,7 @@
                 <a:ea typeface="Calibri" pitchFamily="34" charset="-122"/>
                 <a:cs typeface="Calibri" pitchFamily="34" charset="-120"/>
               </a:rPr>
-              <a:t>wrongly</a:t>
+              <a:t>again</a:t>
             </a:r>
             <a:endParaRPr lang="en-US" sz="850" dirty="0"/>
           </a:p>
@@ -27267,7 +28153,7 @@
         </p:nvSpPr>
         <p:spPr>
           <a:xfrm>
-            <a:off x="4370832" y="2258568"/>
+            <a:off x="5803392" y="2258568"/>
             <a:ext cx="1828800" cy="292608"/>
           </a:xfrm>
           <a:prstGeom prst="rect">
@@ -27301,7 +28187,7 @@
         </p:nvSpPr>
         <p:spPr>
           <a:xfrm>
-            <a:off x="4370832" y="2258568"/>
+            <a:off x="5803392" y="2258568"/>
             <a:ext cx="1828800" cy="292608"/>
           </a:xfrm>
           <a:prstGeom prst="rect">
@@ -27340,7 +28226,7 @@
         </p:nvSpPr>
         <p:spPr>
           <a:xfrm>
-            <a:off x="4370832" y="2569464"/>
+            <a:off x="5803392" y="2569464"/>
             <a:ext cx="1828800" cy="201168"/>
           </a:xfrm>
           <a:prstGeom prst="rect">
@@ -27365,7 +28251,7 @@
                 <a:ea typeface="Calibri" pitchFamily="34" charset="-122"/>
                 <a:cs typeface="Calibri" pitchFamily="34" charset="-120"/>
               </a:rPr>
-              <a:t>to number or reckon</a:t>
+              <a:t>to number or calculate</a:t>
             </a:r>
             <a:endParaRPr lang="en-US" sz="850" dirty="0"/>
           </a:p>
@@ -27379,30 +28265,23 @@
         </p:nvSpPr>
         <p:spPr>
           <a:xfrm>
-            <a:off x="6519672" y="2258568"/>
-            <a:ext cx="1828800" cy="292608"/>
+            <a:off x="365760" y="3273552"/>
+            <a:ext cx="1371600" cy="658368"/>
           </a:xfrm>
           <a:prstGeom prst="rect">
             <a:avLst>
-              <a:gd name="adj" fmla="val 25000"/>
+              <a:gd name="adj" fmla="val 8333"/>
             </a:avLst>
           </a:prstGeom>
           <a:solidFill>
-            <a:srgbClr val="FCE7F3"/>
-          </a:solidFill>
-          <a:ln w="19050">
-            <a:solidFill>
-              <a:srgbClr val="DB2777"/>
-            </a:solidFill>
-            <a:prstDash val="solid"/>
-          </a:ln>
-          <a:effectLst>
-            <a:outerShdw sx="100000" sy="100000" kx="0" ky="0" algn="bl" rotWithShape="0" blurRad="101600" dist="38100" dir="8100000">
-              <a:srgbClr val="000000">
-                <a:alpha val="12000"/>
-              </a:srgbClr>
-            </a:outerShdw>
-          </a:effectLst>
+            <a:srgbClr val="E2E8F0"/>
+          </a:solidFill>
+          <a:ln w="12700">
+            <a:solidFill>
+              <a:srgbClr val="E2E8F0"/>
+            </a:solidFill>
+            <a:prstDash val="solid"/>
+          </a:ln>
         </p:spPr>
       </p:sp>
       <p:sp>
@@ -27413,8 +28292,8 @@
         </p:nvSpPr>
         <p:spPr>
           <a:xfrm>
-            <a:off x="6519672" y="2258568"/>
-            <a:ext cx="1828800" cy="292608"/>
+            <a:off x="365760" y="3273552"/>
+            <a:ext cx="1371600" cy="658368"/>
           </a:xfrm>
           <a:prstGeom prst="rect">
             <a:avLst/>
@@ -27430,30 +28309,519 @@
               <a:buNone/>
             </a:pPr>
             <a:r>
-              <a:rPr lang="en-US" sz="1300" b="1" dirty="0">
-                <a:solidFill>
-                  <a:srgbClr val="9D174D"/>
+              <a:rPr lang="en-US" sz="1100" b="1" dirty="0">
+                <a:solidFill>
+                  <a:srgbClr val="475569"/>
                 </a:solidFill>
                 <a:latin typeface="Trebuchet MS" pitchFamily="34" charset="0"/>
                 <a:ea typeface="Trebuchet MS" pitchFamily="34" charset="-122"/>
                 <a:cs typeface="Trebuchet MS" pitchFamily="34" charset="-120"/>
               </a:rPr>
-              <a:t>ed</a:t>
-            </a:r>
-            <a:endParaRPr lang="en-US" sz="1300" dirty="0"/>
-          </a:p>
-        </p:txBody>
-      </p:sp>
-      <p:sp>
-        <p:nvSpPr>
-          <p:cNvPr id="24" name="Text 22"/>
-          <p:cNvSpPr/>
-          <p:nvPr/>
-        </p:nvSpPr>
-        <p:spPr>
-          <a:xfrm>
-            <a:off x="6519672" y="2569464"/>
-            <a:ext cx="1828800" cy="201168"/>
+              <a:t>Syllables</a:t>
+            </a:r>
+            <a:endParaRPr lang="en-US" sz="1100" dirty="0"/>
+          </a:p>
+        </p:txBody>
+      </p:sp>
+      <p:sp>
+        <p:nvSpPr>
+          <p:cNvPr id="24" name="Shape 22"/>
+          <p:cNvSpPr/>
+          <p:nvPr/>
+        </p:nvSpPr>
+        <p:spPr>
+          <a:xfrm>
+            <a:off x="1874520" y="3273552"/>
+            <a:ext cx="6903720" cy="658368"/>
+          </a:xfrm>
+          <a:prstGeom prst="rect">
+            <a:avLst>
+              <a:gd name="adj" fmla="val 8333"/>
+            </a:avLst>
+          </a:prstGeom>
+          <a:solidFill>
+            <a:srgbClr val="CCFBF1"/>
+          </a:solidFill>
+          <a:ln w="12700">
+            <a:solidFill>
+              <a:srgbClr val="0D9488"/>
+            </a:solidFill>
+            <a:prstDash val="solid"/>
+          </a:ln>
+        </p:spPr>
+      </p:sp>
+      <p:sp>
+        <p:nvSpPr>
+          <p:cNvPr id="25" name="Shape 23"/>
+          <p:cNvSpPr/>
+          <p:nvPr/>
+        </p:nvSpPr>
+        <p:spPr>
+          <a:xfrm>
+            <a:off x="2999232" y="3364992"/>
+            <a:ext cx="1645920" cy="475488"/>
+          </a:xfrm>
+          <a:prstGeom prst="rect">
+            <a:avLst>
+              <a:gd name="adj" fmla="val 9615"/>
+            </a:avLst>
+          </a:prstGeom>
+          <a:solidFill>
+            <a:srgbClr val="FFFFFF"/>
+          </a:solidFill>
+          <a:ln w="12700">
+            <a:solidFill>
+              <a:srgbClr val="0D9488"/>
+            </a:solidFill>
+            <a:prstDash val="solid"/>
+          </a:ln>
+        </p:spPr>
+      </p:sp>
+      <p:sp>
+        <p:nvSpPr>
+          <p:cNvPr id="26" name="Text 24"/>
+          <p:cNvSpPr/>
+          <p:nvPr/>
+        </p:nvSpPr>
+        <p:spPr>
+          <a:xfrm>
+            <a:off x="2999232" y="3364992"/>
+            <a:ext cx="1645920" cy="475488"/>
+          </a:xfrm>
+          <a:prstGeom prst="rect">
+            <a:avLst/>
+          </a:prstGeom>
+          <a:noFill/>
+          <a:ln/>
+        </p:spPr>
+        <p:txBody>
+          <a:bodyPr wrap="square" lIns="0" tIns="0" rIns="0" bIns="0" rtlCol="0" anchor="ctr"/>
+          <a:lstStyle/>
+          <a:p>
+            <a:pPr algn="ctr" indent="0" marL="0">
+              <a:buNone/>
+            </a:pPr>
+            <a:r>
+              <a:rPr lang="en-US" sz="1400" b="1" dirty="0">
+                <a:solidFill>
+                  <a:srgbClr val="0D9488"/>
+                </a:solidFill>
+                <a:latin typeface="Trebuchet MS" pitchFamily="34" charset="0"/>
+                <a:ea typeface="Trebuchet MS" pitchFamily="34" charset="-122"/>
+                <a:cs typeface="Trebuchet MS" pitchFamily="34" charset="-120"/>
+              </a:rPr>
+              <a:t>re</a:t>
+            </a:r>
+            <a:endParaRPr lang="en-US" sz="1400" dirty="0"/>
+          </a:p>
+        </p:txBody>
+      </p:sp>
+      <p:sp>
+        <p:nvSpPr>
+          <p:cNvPr id="27" name="Text 25"/>
+          <p:cNvSpPr/>
+          <p:nvPr/>
+        </p:nvSpPr>
+        <p:spPr>
+          <a:xfrm>
+            <a:off x="4645152" y="3364992"/>
+            <a:ext cx="1097280" cy="475488"/>
+          </a:xfrm>
+          <a:prstGeom prst="rect">
+            <a:avLst/>
+          </a:prstGeom>
+          <a:noFill/>
+          <a:ln/>
+        </p:spPr>
+        <p:txBody>
+          <a:bodyPr wrap="square" lIns="0" tIns="0" rIns="0" bIns="0" rtlCol="0" anchor="ctr"/>
+          <a:lstStyle/>
+          <a:p>
+            <a:pPr algn="ctr" indent="0" marL="0">
+              <a:buNone/>
+            </a:pPr>
+            <a:r>
+              <a:rPr lang="en-US" sz="1600" b="1" dirty="0">
+                <a:solidFill>
+                  <a:srgbClr val="0D9488"/>
+                </a:solidFill>
+                <a:latin typeface="Trebuchet MS" pitchFamily="34" charset="0"/>
+                <a:ea typeface="Trebuchet MS" pitchFamily="34" charset="-122"/>
+                <a:cs typeface="Trebuchet MS" pitchFamily="34" charset="-120"/>
+              </a:rPr>
+              <a:t>·</a:t>
+            </a:r>
+            <a:endParaRPr lang="en-US" sz="1600" dirty="0"/>
+          </a:p>
+        </p:txBody>
+      </p:sp>
+      <p:sp>
+        <p:nvSpPr>
+          <p:cNvPr id="28" name="Shape 26"/>
+          <p:cNvSpPr/>
+          <p:nvPr/>
+        </p:nvSpPr>
+        <p:spPr>
+          <a:xfrm>
+            <a:off x="5742432" y="3364992"/>
+            <a:ext cx="1645920" cy="475488"/>
+          </a:xfrm>
+          <a:prstGeom prst="rect">
+            <a:avLst>
+              <a:gd name="adj" fmla="val 9615"/>
+            </a:avLst>
+          </a:prstGeom>
+          <a:solidFill>
+            <a:srgbClr val="FFFFFF"/>
+          </a:solidFill>
+          <a:ln w="12700">
+            <a:solidFill>
+              <a:srgbClr val="0D9488"/>
+            </a:solidFill>
+            <a:prstDash val="solid"/>
+          </a:ln>
+        </p:spPr>
+      </p:sp>
+      <p:sp>
+        <p:nvSpPr>
+          <p:cNvPr id="29" name="Text 27"/>
+          <p:cNvSpPr/>
+          <p:nvPr/>
+        </p:nvSpPr>
+        <p:spPr>
+          <a:xfrm>
+            <a:off x="5742432" y="3364992"/>
+            <a:ext cx="1645920" cy="475488"/>
+          </a:xfrm>
+          <a:prstGeom prst="rect">
+            <a:avLst/>
+          </a:prstGeom>
+          <a:noFill/>
+          <a:ln/>
+        </p:spPr>
+        <p:txBody>
+          <a:bodyPr wrap="square" lIns="0" tIns="0" rIns="0" bIns="0" rtlCol="0" anchor="ctr"/>
+          <a:lstStyle/>
+          <a:p>
+            <a:pPr algn="ctr" indent="0" marL="0">
+              <a:buNone/>
+            </a:pPr>
+            <a:r>
+              <a:rPr lang="en-US" sz="1400" b="1" dirty="0">
+                <a:solidFill>
+                  <a:srgbClr val="0D9488"/>
+                </a:solidFill>
+                <a:latin typeface="Trebuchet MS" pitchFamily="34" charset="0"/>
+                <a:ea typeface="Trebuchet MS" pitchFamily="34" charset="-122"/>
+                <a:cs typeface="Trebuchet MS" pitchFamily="34" charset="-120"/>
+              </a:rPr>
+              <a:t>count</a:t>
+            </a:r>
+            <a:endParaRPr lang="en-US" sz="1400" dirty="0"/>
+          </a:p>
+        </p:txBody>
+      </p:sp>
+      <p:sp>
+        <p:nvSpPr>
+          <p:cNvPr id="30" name="Shape 28"/>
+          <p:cNvSpPr/>
+          <p:nvPr/>
+        </p:nvSpPr>
+        <p:spPr>
+          <a:xfrm>
+            <a:off x="365760" y="4096512"/>
+            <a:ext cx="1371600" cy="804672"/>
+          </a:xfrm>
+          <a:prstGeom prst="rect">
+            <a:avLst>
+              <a:gd name="adj" fmla="val 6818"/>
+            </a:avLst>
+          </a:prstGeom>
+          <a:solidFill>
+            <a:srgbClr val="E2E8F0"/>
+          </a:solidFill>
+          <a:ln w="12700">
+            <a:solidFill>
+              <a:srgbClr val="E2E8F0"/>
+            </a:solidFill>
+            <a:prstDash val="solid"/>
+          </a:ln>
+        </p:spPr>
+      </p:sp>
+      <p:sp>
+        <p:nvSpPr>
+          <p:cNvPr id="31" name="Text 29"/>
+          <p:cNvSpPr/>
+          <p:nvPr/>
+        </p:nvSpPr>
+        <p:spPr>
+          <a:xfrm>
+            <a:off x="365760" y="4096512"/>
+            <a:ext cx="1371600" cy="804672"/>
+          </a:xfrm>
+          <a:prstGeom prst="rect">
+            <a:avLst/>
+          </a:prstGeom>
+          <a:noFill/>
+          <a:ln/>
+        </p:spPr>
+        <p:txBody>
+          <a:bodyPr wrap="square" lIns="0" tIns="0" rIns="0" bIns="0" rtlCol="0" anchor="ctr"/>
+          <a:lstStyle/>
+          <a:p>
+            <a:pPr algn="ctr" indent="0" marL="0">
+              <a:buNone/>
+            </a:pPr>
+            <a:r>
+              <a:rPr lang="en-US" sz="1100" b="1" dirty="0">
+                <a:solidFill>
+                  <a:srgbClr val="475569"/>
+                </a:solidFill>
+                <a:latin typeface="Trebuchet MS" pitchFamily="34" charset="0"/>
+                <a:ea typeface="Trebuchet MS" pitchFamily="34" charset="-122"/>
+                <a:cs typeface="Trebuchet MS" pitchFamily="34" charset="-120"/>
+              </a:rPr>
+              <a:t>Phonemes</a:t>
+            </a:r>
+            <a:endParaRPr lang="en-US" sz="1100" dirty="0"/>
+          </a:p>
+        </p:txBody>
+      </p:sp>
+      <p:sp>
+        <p:nvSpPr>
+          <p:cNvPr id="32" name="Shape 30"/>
+          <p:cNvSpPr/>
+          <p:nvPr/>
+        </p:nvSpPr>
+        <p:spPr>
+          <a:xfrm>
+            <a:off x="1874520" y="4096512"/>
+            <a:ext cx="6903720" cy="804672"/>
+          </a:xfrm>
+          <a:prstGeom prst="rect">
+            <a:avLst>
+              <a:gd name="adj" fmla="val 6818"/>
+            </a:avLst>
+          </a:prstGeom>
+          <a:solidFill>
+            <a:srgbClr val="FCE7F3"/>
+          </a:solidFill>
+          <a:ln w="12700">
+            <a:solidFill>
+              <a:srgbClr val="DB2777"/>
+            </a:solidFill>
+            <a:prstDash val="solid"/>
+          </a:ln>
+        </p:spPr>
+      </p:sp>
+      <p:sp>
+        <p:nvSpPr>
+          <p:cNvPr id="33" name="Shape 31"/>
+          <p:cNvSpPr/>
+          <p:nvPr/>
+        </p:nvSpPr>
+        <p:spPr>
+          <a:xfrm>
+            <a:off x="2254649" y="4169664"/>
+            <a:ext cx="685800" cy="384048"/>
+          </a:xfrm>
+          <a:prstGeom prst="rect">
+            <a:avLst>
+              <a:gd name="adj" fmla="val 9524"/>
+            </a:avLst>
+          </a:prstGeom>
+          <a:solidFill>
+            <a:srgbClr val="FFFFFF"/>
+          </a:solidFill>
+          <a:ln w="12700">
+            <a:solidFill>
+              <a:srgbClr val="DB2777"/>
+            </a:solidFill>
+            <a:prstDash val="solid"/>
+          </a:ln>
+        </p:spPr>
+      </p:sp>
+      <p:sp>
+        <p:nvSpPr>
+          <p:cNvPr id="34" name="Text 32"/>
+          <p:cNvSpPr/>
+          <p:nvPr/>
+        </p:nvSpPr>
+        <p:spPr>
+          <a:xfrm>
+            <a:off x="2254649" y="4169664"/>
+            <a:ext cx="685800" cy="384048"/>
+          </a:xfrm>
+          <a:prstGeom prst="rect">
+            <a:avLst/>
+          </a:prstGeom>
+          <a:noFill/>
+          <a:ln/>
+        </p:spPr>
+        <p:txBody>
+          <a:bodyPr wrap="square" lIns="0" tIns="0" rIns="0" bIns="0" rtlCol="0" anchor="ctr"/>
+          <a:lstStyle/>
+          <a:p>
+            <a:pPr algn="ctr" indent="0" marL="0">
+              <a:buNone/>
+            </a:pPr>
+            <a:r>
+              <a:rPr lang="en-US" sz="900" b="1" dirty="0">
+                <a:solidFill>
+                  <a:srgbClr val="9D174D"/>
+                </a:solidFill>
+                <a:latin typeface="Trebuchet MS" pitchFamily="34" charset="0"/>
+                <a:ea typeface="Trebuchet MS" pitchFamily="34" charset="-122"/>
+                <a:cs typeface="Trebuchet MS" pitchFamily="34" charset="-120"/>
+              </a:rPr>
+              <a:t>r</a:t>
+            </a:r>
+            <a:endParaRPr lang="en-US" sz="900" dirty="0"/>
+          </a:p>
+        </p:txBody>
+      </p:sp>
+      <p:sp>
+        <p:nvSpPr>
+          <p:cNvPr id="35" name="Shape 33"/>
+          <p:cNvSpPr/>
+          <p:nvPr/>
+        </p:nvSpPr>
+        <p:spPr>
+          <a:xfrm>
+            <a:off x="3293146" y="4169664"/>
+            <a:ext cx="685800" cy="384048"/>
+          </a:xfrm>
+          <a:prstGeom prst="rect">
+            <a:avLst>
+              <a:gd name="adj" fmla="val 9524"/>
+            </a:avLst>
+          </a:prstGeom>
+          <a:solidFill>
+            <a:srgbClr val="FFFFFF"/>
+          </a:solidFill>
+          <a:ln w="12700">
+            <a:solidFill>
+              <a:srgbClr val="DB2777"/>
+            </a:solidFill>
+            <a:prstDash val="solid"/>
+          </a:ln>
+        </p:spPr>
+      </p:sp>
+      <p:sp>
+        <p:nvSpPr>
+          <p:cNvPr id="36" name="Text 34"/>
+          <p:cNvSpPr/>
+          <p:nvPr/>
+        </p:nvSpPr>
+        <p:spPr>
+          <a:xfrm>
+            <a:off x="3293146" y="4169664"/>
+            <a:ext cx="685800" cy="384048"/>
+          </a:xfrm>
+          <a:prstGeom prst="rect">
+            <a:avLst/>
+          </a:prstGeom>
+          <a:noFill/>
+          <a:ln/>
+        </p:spPr>
+        <p:txBody>
+          <a:bodyPr wrap="square" lIns="0" tIns="0" rIns="0" bIns="0" rtlCol="0" anchor="ctr"/>
+          <a:lstStyle/>
+          <a:p>
+            <a:pPr algn="ctr" indent="0" marL="0">
+              <a:buNone/>
+            </a:pPr>
+            <a:r>
+              <a:rPr lang="en-US" sz="900" b="1" dirty="0">
+                <a:solidFill>
+                  <a:srgbClr val="9D174D"/>
+                </a:solidFill>
+                <a:latin typeface="Trebuchet MS" pitchFamily="34" charset="0"/>
+                <a:ea typeface="Trebuchet MS" pitchFamily="34" charset="-122"/>
+                <a:cs typeface="Trebuchet MS" pitchFamily="34" charset="-120"/>
+              </a:rPr>
+              <a:t>e</a:t>
+            </a:r>
+            <a:endParaRPr lang="en-US" sz="900" dirty="0"/>
+          </a:p>
+        </p:txBody>
+      </p:sp>
+      <p:sp>
+        <p:nvSpPr>
+          <p:cNvPr id="37" name="Shape 35"/>
+          <p:cNvSpPr/>
+          <p:nvPr/>
+        </p:nvSpPr>
+        <p:spPr>
+          <a:xfrm>
+            <a:off x="4331643" y="4169664"/>
+            <a:ext cx="685800" cy="384048"/>
+          </a:xfrm>
+          <a:prstGeom prst="rect">
+            <a:avLst>
+              <a:gd name="adj" fmla="val 9524"/>
+            </a:avLst>
+          </a:prstGeom>
+          <a:solidFill>
+            <a:srgbClr val="FFFFFF"/>
+          </a:solidFill>
+          <a:ln w="12700">
+            <a:solidFill>
+              <a:srgbClr val="DB2777"/>
+            </a:solidFill>
+            <a:prstDash val="solid"/>
+          </a:ln>
+        </p:spPr>
+      </p:sp>
+      <p:sp>
+        <p:nvSpPr>
+          <p:cNvPr id="38" name="Text 36"/>
+          <p:cNvSpPr/>
+          <p:nvPr/>
+        </p:nvSpPr>
+        <p:spPr>
+          <a:xfrm>
+            <a:off x="4331643" y="4169664"/>
+            <a:ext cx="685800" cy="384048"/>
+          </a:xfrm>
+          <a:prstGeom prst="rect">
+            <a:avLst/>
+          </a:prstGeom>
+          <a:noFill/>
+          <a:ln/>
+        </p:spPr>
+        <p:txBody>
+          <a:bodyPr wrap="square" lIns="0" tIns="0" rIns="0" bIns="0" rtlCol="0" anchor="ctr"/>
+          <a:lstStyle/>
+          <a:p>
+            <a:pPr algn="ctr" indent="0" marL="0">
+              <a:buNone/>
+            </a:pPr>
+            <a:r>
+              <a:rPr lang="en-US" sz="900" b="1" dirty="0">
+                <a:solidFill>
+                  <a:srgbClr val="9D174D"/>
+                </a:solidFill>
+                <a:latin typeface="Trebuchet MS" pitchFamily="34" charset="0"/>
+                <a:ea typeface="Trebuchet MS" pitchFamily="34" charset="-122"/>
+                <a:cs typeface="Trebuchet MS" pitchFamily="34" charset="-120"/>
+              </a:rPr>
+              <a:t>c</a:t>
+            </a:r>
+            <a:endParaRPr lang="en-US" sz="900" dirty="0"/>
+          </a:p>
+        </p:txBody>
+      </p:sp>
+      <p:sp>
+        <p:nvSpPr>
+          <p:cNvPr id="39" name="Text 37"/>
+          <p:cNvSpPr/>
+          <p:nvPr/>
+        </p:nvSpPr>
+        <p:spPr>
+          <a:xfrm>
+            <a:off x="4331643" y="4572000"/>
+            <a:ext cx="685800" cy="219456"/>
           </a:xfrm>
           <a:prstGeom prst="rect">
             <a:avLst/>
@@ -27469,57 +28837,57 @@
               <a:buNone/>
             </a:pPr>
             <a:r>
-              <a:rPr lang="en-US" sz="850" dirty="0">
-                <a:solidFill>
-                  <a:srgbClr val="475569"/>
+              <a:rPr lang="en-US" sz="750" i="1" dirty="0">
+                <a:solidFill>
+                  <a:srgbClr val="94A3B8"/>
                 </a:solidFill>
                 <a:latin typeface="Calibri" pitchFamily="34" charset="0"/>
                 <a:ea typeface="Calibri" pitchFamily="34" charset="-122"/>
                 <a:cs typeface="Calibri" pitchFamily="34" charset="-120"/>
               </a:rPr>
-              <a:t>past tense</a:t>
-            </a:r>
-            <a:endParaRPr lang="en-US" sz="850" dirty="0"/>
-          </a:p>
-        </p:txBody>
-      </p:sp>
-      <p:sp>
-        <p:nvSpPr>
-          <p:cNvPr id="25" name="Shape 23"/>
-          <p:cNvSpPr/>
-          <p:nvPr/>
-        </p:nvSpPr>
-        <p:spPr>
-          <a:xfrm>
-            <a:off x="365760" y="3273552"/>
-            <a:ext cx="1371600" cy="658368"/>
+              <a:t>/k/</a:t>
+            </a:r>
+            <a:endParaRPr lang="en-US" sz="750" dirty="0"/>
+          </a:p>
+        </p:txBody>
+      </p:sp>
+      <p:sp>
+        <p:nvSpPr>
+          <p:cNvPr id="40" name="Shape 38"/>
+          <p:cNvSpPr/>
+          <p:nvPr/>
+        </p:nvSpPr>
+        <p:spPr>
+          <a:xfrm>
+            <a:off x="5370141" y="4169664"/>
+            <a:ext cx="685800" cy="384048"/>
           </a:xfrm>
           <a:prstGeom prst="rect">
             <a:avLst>
-              <a:gd name="adj" fmla="val 8333"/>
+              <a:gd name="adj" fmla="val 9524"/>
             </a:avLst>
           </a:prstGeom>
           <a:solidFill>
-            <a:srgbClr val="E2E8F0"/>
-          </a:solidFill>
-          <a:ln w="12700">
-            <a:solidFill>
-              <a:srgbClr val="E2E8F0"/>
-            </a:solidFill>
-            <a:prstDash val="solid"/>
-          </a:ln>
-        </p:spPr>
-      </p:sp>
-      <p:sp>
-        <p:nvSpPr>
-          <p:cNvPr id="26" name="Text 24"/>
-          <p:cNvSpPr/>
-          <p:nvPr/>
-        </p:nvSpPr>
-        <p:spPr>
-          <a:xfrm>
-            <a:off x="365760" y="3273552"/>
-            <a:ext cx="1371600" cy="658368"/>
+            <a:srgbClr val="FFFFFF"/>
+          </a:solidFill>
+          <a:ln w="12700">
+            <a:solidFill>
+              <a:srgbClr val="DB2777"/>
+            </a:solidFill>
+            <a:prstDash val="solid"/>
+          </a:ln>
+        </p:spPr>
+      </p:sp>
+      <p:sp>
+        <p:nvSpPr>
+          <p:cNvPr id="41" name="Text 39"/>
+          <p:cNvSpPr/>
+          <p:nvPr/>
+        </p:nvSpPr>
+        <p:spPr>
+          <a:xfrm>
+            <a:off x="5370141" y="4169664"/>
+            <a:ext cx="685800" cy="384048"/>
           </a:xfrm>
           <a:prstGeom prst="rect">
             <a:avLst/>
@@ -27535,84 +28903,57 @@
               <a:buNone/>
             </a:pPr>
             <a:r>
-              <a:rPr lang="en-US" sz="1100" b="1" dirty="0">
-                <a:solidFill>
-                  <a:srgbClr val="475569"/>
+              <a:rPr lang="en-US" sz="900" b="1" dirty="0">
+                <a:solidFill>
+                  <a:srgbClr val="9D174D"/>
                 </a:solidFill>
                 <a:latin typeface="Trebuchet MS" pitchFamily="34" charset="0"/>
                 <a:ea typeface="Trebuchet MS" pitchFamily="34" charset="-122"/>
                 <a:cs typeface="Trebuchet MS" pitchFamily="34" charset="-120"/>
               </a:rPr>
-              <a:t>Syllables</a:t>
-            </a:r>
-            <a:endParaRPr lang="en-US" sz="1100" dirty="0"/>
-          </a:p>
-        </p:txBody>
-      </p:sp>
-      <p:sp>
-        <p:nvSpPr>
-          <p:cNvPr id="27" name="Shape 25"/>
-          <p:cNvSpPr/>
-          <p:nvPr/>
-        </p:nvSpPr>
-        <p:spPr>
-          <a:xfrm>
-            <a:off x="1874520" y="3273552"/>
-            <a:ext cx="6903720" cy="658368"/>
+              <a:t>ou</a:t>
+            </a:r>
+            <a:endParaRPr lang="en-US" sz="900" dirty="0"/>
+          </a:p>
+        </p:txBody>
+      </p:sp>
+      <p:sp>
+        <p:nvSpPr>
+          <p:cNvPr id="42" name="Shape 40"/>
+          <p:cNvSpPr/>
+          <p:nvPr/>
+        </p:nvSpPr>
+        <p:spPr>
+          <a:xfrm>
+            <a:off x="6408638" y="4169664"/>
+            <a:ext cx="685800" cy="384048"/>
           </a:xfrm>
           <a:prstGeom prst="rect">
             <a:avLst>
-              <a:gd name="adj" fmla="val 8333"/>
+              <a:gd name="adj" fmla="val 9524"/>
             </a:avLst>
           </a:prstGeom>
           <a:solidFill>
-            <a:srgbClr val="CCFBF1"/>
-          </a:solidFill>
-          <a:ln w="12700">
-            <a:solidFill>
-              <a:srgbClr val="0D9488"/>
-            </a:solidFill>
-            <a:prstDash val="solid"/>
-          </a:ln>
-        </p:spPr>
-      </p:sp>
-      <p:sp>
-        <p:nvSpPr>
-          <p:cNvPr id="28" name="Shape 26"/>
-          <p:cNvSpPr/>
-          <p:nvPr/>
-        </p:nvSpPr>
-        <p:spPr>
-          <a:xfrm>
-            <a:off x="2313432" y="3364992"/>
-            <a:ext cx="1645920" cy="475488"/>
-          </a:xfrm>
-          <a:prstGeom prst="rect">
-            <a:avLst>
-              <a:gd name="adj" fmla="val 9615"/>
-            </a:avLst>
-          </a:prstGeom>
-          <a:solidFill>
             <a:srgbClr val="FFFFFF"/>
           </a:solidFill>
           <a:ln w="12700">
             <a:solidFill>
-              <a:srgbClr val="0D9488"/>
-            </a:solidFill>
-            <a:prstDash val="solid"/>
-          </a:ln>
-        </p:spPr>
-      </p:sp>
-      <p:sp>
-        <p:nvSpPr>
-          <p:cNvPr id="29" name="Text 27"/>
-          <p:cNvSpPr/>
-          <p:nvPr/>
-        </p:nvSpPr>
-        <p:spPr>
-          <a:xfrm>
-            <a:off x="2313432" y="3364992"/>
-            <a:ext cx="1645920" cy="475488"/>
+              <a:srgbClr val="DB2777"/>
+            </a:solidFill>
+            <a:prstDash val="solid"/>
+          </a:ln>
+        </p:spPr>
+      </p:sp>
+      <p:sp>
+        <p:nvSpPr>
+          <p:cNvPr id="43" name="Text 41"/>
+          <p:cNvSpPr/>
+          <p:nvPr/>
+        </p:nvSpPr>
+        <p:spPr>
+          <a:xfrm>
+            <a:off x="6408638" y="4169664"/>
+            <a:ext cx="685800" cy="384048"/>
           </a:xfrm>
           <a:prstGeom prst="rect">
             <a:avLst/>
@@ -27628,30 +28969,57 @@
               <a:buNone/>
             </a:pPr>
             <a:r>
-              <a:rPr lang="en-US" sz="1400" b="1" dirty="0">
-                <a:solidFill>
-                  <a:srgbClr val="0D9488"/>
+              <a:rPr lang="en-US" sz="900" b="1" dirty="0">
+                <a:solidFill>
+                  <a:srgbClr val="9D174D"/>
                 </a:solidFill>
                 <a:latin typeface="Trebuchet MS" pitchFamily="34" charset="0"/>
                 <a:ea typeface="Trebuchet MS" pitchFamily="34" charset="-122"/>
                 <a:cs typeface="Trebuchet MS" pitchFamily="34" charset="-120"/>
               </a:rPr>
-              <a:t>mis</a:t>
-            </a:r>
-            <a:endParaRPr lang="en-US" sz="1400" dirty="0"/>
-          </a:p>
-        </p:txBody>
-      </p:sp>
-      <p:sp>
-        <p:nvSpPr>
-          <p:cNvPr id="30" name="Text 28"/>
-          <p:cNvSpPr/>
-          <p:nvPr/>
-        </p:nvSpPr>
-        <p:spPr>
-          <a:xfrm>
-            <a:off x="3959352" y="3364992"/>
-            <a:ext cx="411480" cy="475488"/>
+              <a:t>n</a:t>
+            </a:r>
+            <a:endParaRPr lang="en-US" sz="900" dirty="0"/>
+          </a:p>
+        </p:txBody>
+      </p:sp>
+      <p:sp>
+        <p:nvSpPr>
+          <p:cNvPr id="44" name="Shape 42"/>
+          <p:cNvSpPr/>
+          <p:nvPr/>
+        </p:nvSpPr>
+        <p:spPr>
+          <a:xfrm>
+            <a:off x="7447135" y="4169664"/>
+            <a:ext cx="685800" cy="384048"/>
+          </a:xfrm>
+          <a:prstGeom prst="rect">
+            <a:avLst>
+              <a:gd name="adj" fmla="val 9524"/>
+            </a:avLst>
+          </a:prstGeom>
+          <a:solidFill>
+            <a:srgbClr val="FFFFFF"/>
+          </a:solidFill>
+          <a:ln w="12700">
+            <a:solidFill>
+              <a:srgbClr val="DB2777"/>
+            </a:solidFill>
+            <a:prstDash val="solid"/>
+          </a:ln>
+        </p:spPr>
+      </p:sp>
+      <p:sp>
+        <p:nvSpPr>
+          <p:cNvPr id="45" name="Text 43"/>
+          <p:cNvSpPr/>
+          <p:nvPr/>
+        </p:nvSpPr>
+        <p:spPr>
+          <a:xfrm>
+            <a:off x="7447135" y="4169664"/>
+            <a:ext cx="685800" cy="384048"/>
           </a:xfrm>
           <a:prstGeom prst="rect">
             <a:avLst/>
@@ -27667,873 +29035,15 @@
               <a:buNone/>
             </a:pPr>
             <a:r>
-              <a:rPr lang="en-US" sz="1600" b="1" dirty="0">
-                <a:solidFill>
-                  <a:srgbClr val="0D9488"/>
+              <a:rPr lang="en-US" sz="900" b="1" dirty="0">
+                <a:solidFill>
+                  <a:srgbClr val="9D174D"/>
                 </a:solidFill>
                 <a:latin typeface="Trebuchet MS" pitchFamily="34" charset="0"/>
                 <a:ea typeface="Trebuchet MS" pitchFamily="34" charset="-122"/>
                 <a:cs typeface="Trebuchet MS" pitchFamily="34" charset="-120"/>
               </a:rPr>
-              <a:t>·</a:t>
-            </a:r>
-            <a:endParaRPr lang="en-US" sz="1600" dirty="0"/>
-          </a:p>
-        </p:txBody>
-      </p:sp>
-      <p:sp>
-        <p:nvSpPr>
-          <p:cNvPr id="31" name="Shape 29"/>
-          <p:cNvSpPr/>
-          <p:nvPr/>
-        </p:nvSpPr>
-        <p:spPr>
-          <a:xfrm>
-            <a:off x="4370832" y="3364992"/>
-            <a:ext cx="1645920" cy="475488"/>
-          </a:xfrm>
-          <a:prstGeom prst="rect">
-            <a:avLst>
-              <a:gd name="adj" fmla="val 9615"/>
-            </a:avLst>
-          </a:prstGeom>
-          <a:solidFill>
-            <a:srgbClr val="FFFFFF"/>
-          </a:solidFill>
-          <a:ln w="12700">
-            <a:solidFill>
-              <a:srgbClr val="0D9488"/>
-            </a:solidFill>
-            <a:prstDash val="solid"/>
-          </a:ln>
-        </p:spPr>
-      </p:sp>
-      <p:sp>
-        <p:nvSpPr>
-          <p:cNvPr id="32" name="Text 30"/>
-          <p:cNvSpPr/>
-          <p:nvPr/>
-        </p:nvSpPr>
-        <p:spPr>
-          <a:xfrm>
-            <a:off x="4370832" y="3364992"/>
-            <a:ext cx="1645920" cy="475488"/>
-          </a:xfrm>
-          <a:prstGeom prst="rect">
-            <a:avLst/>
-          </a:prstGeom>
-          <a:noFill/>
-          <a:ln/>
-        </p:spPr>
-        <p:txBody>
-          <a:bodyPr wrap="square" lIns="0" tIns="0" rIns="0" bIns="0" rtlCol="0" anchor="ctr"/>
-          <a:lstStyle/>
-          <a:p>
-            <a:pPr algn="ctr" indent="0" marL="0">
-              <a:buNone/>
-            </a:pPr>
-            <a:r>
-              <a:rPr lang="en-US" sz="1400" b="1" dirty="0">
-                <a:solidFill>
-                  <a:srgbClr val="0D9488"/>
-                </a:solidFill>
-                <a:latin typeface="Trebuchet MS" pitchFamily="34" charset="0"/>
-                <a:ea typeface="Trebuchet MS" pitchFamily="34" charset="-122"/>
-                <a:cs typeface="Trebuchet MS" pitchFamily="34" charset="-120"/>
-              </a:rPr>
-              <a:t>count</a:t>
-            </a:r>
-            <a:endParaRPr lang="en-US" sz="1400" dirty="0"/>
-          </a:p>
-        </p:txBody>
-      </p:sp>
-      <p:sp>
-        <p:nvSpPr>
-          <p:cNvPr id="33" name="Text 31"/>
-          <p:cNvSpPr/>
-          <p:nvPr/>
-        </p:nvSpPr>
-        <p:spPr>
-          <a:xfrm>
-            <a:off x="6016752" y="3364992"/>
-            <a:ext cx="411480" cy="475488"/>
-          </a:xfrm>
-          <a:prstGeom prst="rect">
-            <a:avLst/>
-          </a:prstGeom>
-          <a:noFill/>
-          <a:ln/>
-        </p:spPr>
-        <p:txBody>
-          <a:bodyPr wrap="square" lIns="0" tIns="0" rIns="0" bIns="0" rtlCol="0" anchor="ctr"/>
-          <a:lstStyle/>
-          <a:p>
-            <a:pPr algn="ctr" indent="0" marL="0">
-              <a:buNone/>
-            </a:pPr>
-            <a:r>
-              <a:rPr lang="en-US" sz="1600" b="1" dirty="0">
-                <a:solidFill>
-                  <a:srgbClr val="0D9488"/>
-                </a:solidFill>
-                <a:latin typeface="Trebuchet MS" pitchFamily="34" charset="0"/>
-                <a:ea typeface="Trebuchet MS" pitchFamily="34" charset="-122"/>
-                <a:cs typeface="Trebuchet MS" pitchFamily="34" charset="-120"/>
-              </a:rPr>
-              <a:t>·</a:t>
-            </a:r>
-            <a:endParaRPr lang="en-US" sz="1600" dirty="0"/>
-          </a:p>
-        </p:txBody>
-      </p:sp>
-      <p:sp>
-        <p:nvSpPr>
-          <p:cNvPr id="34" name="Shape 32"/>
-          <p:cNvSpPr/>
-          <p:nvPr/>
-        </p:nvSpPr>
-        <p:spPr>
-          <a:xfrm>
-            <a:off x="6428232" y="3364992"/>
-            <a:ext cx="1645920" cy="475488"/>
-          </a:xfrm>
-          <a:prstGeom prst="rect">
-            <a:avLst>
-              <a:gd name="adj" fmla="val 9615"/>
-            </a:avLst>
-          </a:prstGeom>
-          <a:solidFill>
-            <a:srgbClr val="FFFFFF"/>
-          </a:solidFill>
-          <a:ln w="12700">
-            <a:solidFill>
-              <a:srgbClr val="0D9488"/>
-            </a:solidFill>
-            <a:prstDash val="solid"/>
-          </a:ln>
-        </p:spPr>
-      </p:sp>
-      <p:sp>
-        <p:nvSpPr>
-          <p:cNvPr id="35" name="Text 33"/>
-          <p:cNvSpPr/>
-          <p:nvPr/>
-        </p:nvSpPr>
-        <p:spPr>
-          <a:xfrm>
-            <a:off x="6428232" y="3364992"/>
-            <a:ext cx="1645920" cy="475488"/>
-          </a:xfrm>
-          <a:prstGeom prst="rect">
-            <a:avLst/>
-          </a:prstGeom>
-          <a:noFill/>
-          <a:ln/>
-        </p:spPr>
-        <p:txBody>
-          <a:bodyPr wrap="square" lIns="0" tIns="0" rIns="0" bIns="0" rtlCol="0" anchor="ctr"/>
-          <a:lstStyle/>
-          <a:p>
-            <a:pPr algn="ctr" indent="0" marL="0">
-              <a:buNone/>
-            </a:pPr>
-            <a:r>
-              <a:rPr lang="en-US" sz="1400" b="1" dirty="0">
-                <a:solidFill>
-                  <a:srgbClr val="0D9488"/>
-                </a:solidFill>
-                <a:latin typeface="Trebuchet MS" pitchFamily="34" charset="0"/>
-                <a:ea typeface="Trebuchet MS" pitchFamily="34" charset="-122"/>
-                <a:cs typeface="Trebuchet MS" pitchFamily="34" charset="-120"/>
-              </a:rPr>
-              <a:t>ed</a:t>
-            </a:r>
-            <a:endParaRPr lang="en-US" sz="1400" dirty="0"/>
-          </a:p>
-        </p:txBody>
-      </p:sp>
-      <p:sp>
-        <p:nvSpPr>
-          <p:cNvPr id="36" name="Shape 34"/>
-          <p:cNvSpPr/>
-          <p:nvPr/>
-        </p:nvSpPr>
-        <p:spPr>
-          <a:xfrm>
-            <a:off x="365760" y="4096512"/>
-            <a:ext cx="1371600" cy="804672"/>
-          </a:xfrm>
-          <a:prstGeom prst="rect">
-            <a:avLst>
-              <a:gd name="adj" fmla="val 6818"/>
-            </a:avLst>
-          </a:prstGeom>
-          <a:solidFill>
-            <a:srgbClr val="E2E8F0"/>
-          </a:solidFill>
-          <a:ln w="12700">
-            <a:solidFill>
-              <a:srgbClr val="E2E8F0"/>
-            </a:solidFill>
-            <a:prstDash val="solid"/>
-          </a:ln>
-        </p:spPr>
-      </p:sp>
-      <p:sp>
-        <p:nvSpPr>
-          <p:cNvPr id="37" name="Text 35"/>
-          <p:cNvSpPr/>
-          <p:nvPr/>
-        </p:nvSpPr>
-        <p:spPr>
-          <a:xfrm>
-            <a:off x="365760" y="4096512"/>
-            <a:ext cx="1371600" cy="804672"/>
-          </a:xfrm>
-          <a:prstGeom prst="rect">
-            <a:avLst/>
-          </a:prstGeom>
-          <a:noFill/>
-          <a:ln/>
-        </p:spPr>
-        <p:txBody>
-          <a:bodyPr wrap="square" lIns="0" tIns="0" rIns="0" bIns="0" rtlCol="0" anchor="ctr"/>
-          <a:lstStyle/>
-          <a:p>
-            <a:pPr algn="ctr" indent="0" marL="0">
-              <a:buNone/>
-            </a:pPr>
-            <a:r>
-              <a:rPr lang="en-US" sz="1100" b="1" dirty="0">
-                <a:solidFill>
-                  <a:srgbClr val="475569"/>
-                </a:solidFill>
-                <a:latin typeface="Trebuchet MS" pitchFamily="34" charset="0"/>
-                <a:ea typeface="Trebuchet MS" pitchFamily="34" charset="-122"/>
-                <a:cs typeface="Trebuchet MS" pitchFamily="34" charset="-120"/>
-              </a:rPr>
-              <a:t>Phonemes</a:t>
-            </a:r>
-            <a:endParaRPr lang="en-US" sz="1100" dirty="0"/>
-          </a:p>
-        </p:txBody>
-      </p:sp>
-      <p:sp>
-        <p:nvSpPr>
-          <p:cNvPr id="38" name="Shape 36"/>
-          <p:cNvSpPr/>
-          <p:nvPr/>
-        </p:nvSpPr>
-        <p:spPr>
-          <a:xfrm>
-            <a:off x="1874520" y="4096512"/>
-            <a:ext cx="6903720" cy="658368"/>
-          </a:xfrm>
-          <a:prstGeom prst="rect">
-            <a:avLst>
-              <a:gd name="adj" fmla="val 8333"/>
-            </a:avLst>
-          </a:prstGeom>
-          <a:solidFill>
-            <a:srgbClr val="FCE7F3"/>
-          </a:solidFill>
-          <a:ln w="12700">
-            <a:solidFill>
-              <a:srgbClr val="DB2777"/>
-            </a:solidFill>
-            <a:prstDash val="solid"/>
-          </a:ln>
-        </p:spPr>
-      </p:sp>
-      <p:sp>
-        <p:nvSpPr>
-          <p:cNvPr id="39" name="Shape 37"/>
-          <p:cNvSpPr/>
-          <p:nvPr/>
-        </p:nvSpPr>
-        <p:spPr>
-          <a:xfrm>
-            <a:off x="1951330" y="4169664"/>
-            <a:ext cx="676656" cy="475488"/>
-          </a:xfrm>
-          <a:prstGeom prst="rect">
-            <a:avLst>
-              <a:gd name="adj" fmla="val 7692"/>
-            </a:avLst>
-          </a:prstGeom>
-          <a:solidFill>
-            <a:srgbClr val="FFFFFF"/>
-          </a:solidFill>
-          <a:ln w="12700">
-            <a:solidFill>
-              <a:srgbClr val="DB2777"/>
-            </a:solidFill>
-            <a:prstDash val="solid"/>
-          </a:ln>
-        </p:spPr>
-      </p:sp>
-      <p:sp>
-        <p:nvSpPr>
-          <p:cNvPr id="40" name="Text 38"/>
-          <p:cNvSpPr/>
-          <p:nvPr/>
-        </p:nvSpPr>
-        <p:spPr>
-          <a:xfrm>
-            <a:off x="1951330" y="4169664"/>
-            <a:ext cx="676656" cy="475488"/>
-          </a:xfrm>
-          <a:prstGeom prst="rect">
-            <a:avLst/>
-          </a:prstGeom>
-          <a:noFill/>
-          <a:ln/>
-        </p:spPr>
-        <p:txBody>
-          <a:bodyPr wrap="square" lIns="0" tIns="0" rIns="0" bIns="0" rtlCol="0" anchor="ctr"/>
-          <a:lstStyle/>
-          <a:p>
-            <a:pPr algn="ctr" indent="0" marL="0">
-              <a:buNone/>
-            </a:pPr>
-            <a:r>
-              <a:rPr lang="en-US" sz="900" b="1" dirty="0">
-                <a:solidFill>
-                  <a:srgbClr val="9D174D"/>
-                </a:solidFill>
-                <a:latin typeface="Trebuchet MS" pitchFamily="34" charset="0"/>
-                <a:ea typeface="Trebuchet MS" pitchFamily="34" charset="-122"/>
-                <a:cs typeface="Trebuchet MS" pitchFamily="34" charset="-120"/>
-              </a:rPr>
-              <a:t>m</a:t>
-            </a:r>
-            <a:endParaRPr lang="en-US" sz="900" dirty="0"/>
-          </a:p>
-        </p:txBody>
-      </p:sp>
-      <p:sp>
-        <p:nvSpPr>
-          <p:cNvPr id="41" name="Shape 39"/>
-          <p:cNvSpPr/>
-          <p:nvPr/>
-        </p:nvSpPr>
-        <p:spPr>
-          <a:xfrm>
-            <a:off x="2677363" y="4169664"/>
-            <a:ext cx="676656" cy="475488"/>
-          </a:xfrm>
-          <a:prstGeom prst="rect">
-            <a:avLst>
-              <a:gd name="adj" fmla="val 7692"/>
-            </a:avLst>
-          </a:prstGeom>
-          <a:solidFill>
-            <a:srgbClr val="FFFFFF"/>
-          </a:solidFill>
-          <a:ln w="12700">
-            <a:solidFill>
-              <a:srgbClr val="DB2777"/>
-            </a:solidFill>
-            <a:prstDash val="solid"/>
-          </a:ln>
-        </p:spPr>
-      </p:sp>
-      <p:sp>
-        <p:nvSpPr>
-          <p:cNvPr id="42" name="Text 40"/>
-          <p:cNvSpPr/>
-          <p:nvPr/>
-        </p:nvSpPr>
-        <p:spPr>
-          <a:xfrm>
-            <a:off x="2677363" y="4169664"/>
-            <a:ext cx="676656" cy="475488"/>
-          </a:xfrm>
-          <a:prstGeom prst="rect">
-            <a:avLst/>
-          </a:prstGeom>
-          <a:noFill/>
-          <a:ln/>
-        </p:spPr>
-        <p:txBody>
-          <a:bodyPr wrap="square" lIns="0" tIns="0" rIns="0" bIns="0" rtlCol="0" anchor="ctr"/>
-          <a:lstStyle/>
-          <a:p>
-            <a:pPr algn="ctr" indent="0" marL="0">
-              <a:buNone/>
-            </a:pPr>
-            <a:r>
-              <a:rPr lang="en-US" sz="900" b="1" dirty="0">
-                <a:solidFill>
-                  <a:srgbClr val="9D174D"/>
-                </a:solidFill>
-                <a:latin typeface="Trebuchet MS" pitchFamily="34" charset="0"/>
-                <a:ea typeface="Trebuchet MS" pitchFamily="34" charset="-122"/>
-                <a:cs typeface="Trebuchet MS" pitchFamily="34" charset="-120"/>
-              </a:rPr>
-              <a:t>i</a:t>
-            </a:r>
-            <a:endParaRPr lang="en-US" sz="900" dirty="0"/>
-          </a:p>
-        </p:txBody>
-      </p:sp>
-      <p:sp>
-        <p:nvSpPr>
-          <p:cNvPr id="43" name="Shape 41"/>
-          <p:cNvSpPr/>
-          <p:nvPr/>
-        </p:nvSpPr>
-        <p:spPr>
-          <a:xfrm>
-            <a:off x="3403397" y="4169664"/>
-            <a:ext cx="676656" cy="475488"/>
-          </a:xfrm>
-          <a:prstGeom prst="rect">
-            <a:avLst>
-              <a:gd name="adj" fmla="val 7692"/>
-            </a:avLst>
-          </a:prstGeom>
-          <a:solidFill>
-            <a:srgbClr val="FFFFFF"/>
-          </a:solidFill>
-          <a:ln w="12700">
-            <a:solidFill>
-              <a:srgbClr val="DB2777"/>
-            </a:solidFill>
-            <a:prstDash val="solid"/>
-          </a:ln>
-        </p:spPr>
-      </p:sp>
-      <p:sp>
-        <p:nvSpPr>
-          <p:cNvPr id="44" name="Text 42"/>
-          <p:cNvSpPr/>
-          <p:nvPr/>
-        </p:nvSpPr>
-        <p:spPr>
-          <a:xfrm>
-            <a:off x="3403397" y="4169664"/>
-            <a:ext cx="676656" cy="475488"/>
-          </a:xfrm>
-          <a:prstGeom prst="rect">
-            <a:avLst/>
-          </a:prstGeom>
-          <a:noFill/>
-          <a:ln/>
-        </p:spPr>
-        <p:txBody>
-          <a:bodyPr wrap="square" lIns="0" tIns="0" rIns="0" bIns="0" rtlCol="0" anchor="ctr"/>
-          <a:lstStyle/>
-          <a:p>
-            <a:pPr algn="ctr" indent="0" marL="0">
-              <a:buNone/>
-            </a:pPr>
-            <a:r>
-              <a:rPr lang="en-US" sz="900" b="1" dirty="0">
-                <a:solidFill>
-                  <a:srgbClr val="9D174D"/>
-                </a:solidFill>
-                <a:latin typeface="Trebuchet MS" pitchFamily="34" charset="0"/>
-                <a:ea typeface="Trebuchet MS" pitchFamily="34" charset="-122"/>
-                <a:cs typeface="Trebuchet MS" pitchFamily="34" charset="-120"/>
-              </a:rPr>
-              <a:t>s</a:t>
-            </a:r>
-            <a:endParaRPr lang="en-US" sz="900" dirty="0"/>
-          </a:p>
-        </p:txBody>
-      </p:sp>
-      <p:sp>
-        <p:nvSpPr>
-          <p:cNvPr id="45" name="Shape 43"/>
-          <p:cNvSpPr/>
-          <p:nvPr/>
-        </p:nvSpPr>
-        <p:spPr>
-          <a:xfrm>
-            <a:off x="4129430" y="4169664"/>
-            <a:ext cx="676656" cy="475488"/>
-          </a:xfrm>
-          <a:prstGeom prst="rect">
-            <a:avLst>
-              <a:gd name="adj" fmla="val 7692"/>
-            </a:avLst>
-          </a:prstGeom>
-          <a:solidFill>
-            <a:srgbClr val="FFFFFF"/>
-          </a:solidFill>
-          <a:ln w="12700">
-            <a:solidFill>
-              <a:srgbClr val="DB2777"/>
-            </a:solidFill>
-            <a:prstDash val="solid"/>
-          </a:ln>
-        </p:spPr>
-      </p:sp>
-      <p:sp>
-        <p:nvSpPr>
-          <p:cNvPr id="46" name="Text 44"/>
-          <p:cNvSpPr/>
-          <p:nvPr/>
-        </p:nvSpPr>
-        <p:spPr>
-          <a:xfrm>
-            <a:off x="4129430" y="4169664"/>
-            <a:ext cx="676656" cy="475488"/>
-          </a:xfrm>
-          <a:prstGeom prst="rect">
-            <a:avLst/>
-          </a:prstGeom>
-          <a:noFill/>
-          <a:ln/>
-        </p:spPr>
-        <p:txBody>
-          <a:bodyPr wrap="square" lIns="0" tIns="0" rIns="0" bIns="0" rtlCol="0" anchor="ctr"/>
-          <a:lstStyle/>
-          <a:p>
-            <a:pPr algn="ctr" indent="0" marL="0">
-              <a:buNone/>
-            </a:pPr>
-            <a:r>
-              <a:rPr lang="en-US" sz="900" b="1" dirty="0">
-                <a:solidFill>
-                  <a:srgbClr val="9D174D"/>
-                </a:solidFill>
-                <a:latin typeface="Trebuchet MS" pitchFamily="34" charset="0"/>
-                <a:ea typeface="Trebuchet MS" pitchFamily="34" charset="-122"/>
-                <a:cs typeface="Trebuchet MS" pitchFamily="34" charset="-120"/>
-              </a:rPr>
-              <a:t>c</a:t>
-            </a:r>
-            <a:endParaRPr lang="en-US" sz="900" dirty="0"/>
-          </a:p>
-        </p:txBody>
-      </p:sp>
-      <p:sp>
-        <p:nvSpPr>
-          <p:cNvPr id="47" name="Shape 45"/>
-          <p:cNvSpPr/>
-          <p:nvPr/>
-        </p:nvSpPr>
-        <p:spPr>
-          <a:xfrm>
-            <a:off x="4855464" y="4169664"/>
-            <a:ext cx="676656" cy="475488"/>
-          </a:xfrm>
-          <a:prstGeom prst="rect">
-            <a:avLst>
-              <a:gd name="adj" fmla="val 7692"/>
-            </a:avLst>
-          </a:prstGeom>
-          <a:solidFill>
-            <a:srgbClr val="FFFFFF"/>
-          </a:solidFill>
-          <a:ln w="12700">
-            <a:solidFill>
-              <a:srgbClr val="DB2777"/>
-            </a:solidFill>
-            <a:prstDash val="solid"/>
-          </a:ln>
-        </p:spPr>
-      </p:sp>
-      <p:sp>
-        <p:nvSpPr>
-          <p:cNvPr id="48" name="Text 46"/>
-          <p:cNvSpPr/>
-          <p:nvPr/>
-        </p:nvSpPr>
-        <p:spPr>
-          <a:xfrm>
-            <a:off x="4855464" y="4169664"/>
-            <a:ext cx="676656" cy="475488"/>
-          </a:xfrm>
-          <a:prstGeom prst="rect">
-            <a:avLst/>
-          </a:prstGeom>
-          <a:noFill/>
-          <a:ln/>
-        </p:spPr>
-        <p:txBody>
-          <a:bodyPr wrap="square" lIns="0" tIns="0" rIns="0" bIns="0" rtlCol="0" anchor="ctr"/>
-          <a:lstStyle/>
-          <a:p>
-            <a:pPr algn="ctr" indent="0" marL="0">
-              <a:buNone/>
-            </a:pPr>
-            <a:r>
-              <a:rPr lang="en-US" sz="900" b="1" dirty="0">
-                <a:solidFill>
-                  <a:srgbClr val="9D174D"/>
-                </a:solidFill>
-                <a:latin typeface="Trebuchet MS" pitchFamily="34" charset="0"/>
-                <a:ea typeface="Trebuchet MS" pitchFamily="34" charset="-122"/>
-                <a:cs typeface="Trebuchet MS" pitchFamily="34" charset="-120"/>
-              </a:rPr>
-              <a:t>ou</a:t>
-            </a:r>
-            <a:endParaRPr lang="en-US" sz="900" dirty="0"/>
-          </a:p>
-        </p:txBody>
-      </p:sp>
-      <p:sp>
-        <p:nvSpPr>
-          <p:cNvPr id="49" name="Shape 47"/>
-          <p:cNvSpPr/>
-          <p:nvPr/>
-        </p:nvSpPr>
-        <p:spPr>
-          <a:xfrm>
-            <a:off x="5581498" y="4169664"/>
-            <a:ext cx="676656" cy="475488"/>
-          </a:xfrm>
-          <a:prstGeom prst="rect">
-            <a:avLst>
-              <a:gd name="adj" fmla="val 7692"/>
-            </a:avLst>
-          </a:prstGeom>
-          <a:solidFill>
-            <a:srgbClr val="FFFFFF"/>
-          </a:solidFill>
-          <a:ln w="12700">
-            <a:solidFill>
-              <a:srgbClr val="DB2777"/>
-            </a:solidFill>
-            <a:prstDash val="solid"/>
-          </a:ln>
-        </p:spPr>
-      </p:sp>
-      <p:sp>
-        <p:nvSpPr>
-          <p:cNvPr id="50" name="Text 48"/>
-          <p:cNvSpPr/>
-          <p:nvPr/>
-        </p:nvSpPr>
-        <p:spPr>
-          <a:xfrm>
-            <a:off x="5581498" y="4169664"/>
-            <a:ext cx="676656" cy="475488"/>
-          </a:xfrm>
-          <a:prstGeom prst="rect">
-            <a:avLst/>
-          </a:prstGeom>
-          <a:noFill/>
-          <a:ln/>
-        </p:spPr>
-        <p:txBody>
-          <a:bodyPr wrap="square" lIns="0" tIns="0" rIns="0" bIns="0" rtlCol="0" anchor="ctr"/>
-          <a:lstStyle/>
-          <a:p>
-            <a:pPr algn="ctr" indent="0" marL="0">
-              <a:buNone/>
-            </a:pPr>
-            <a:r>
-              <a:rPr lang="en-US" sz="900" b="1" dirty="0">
-                <a:solidFill>
-                  <a:srgbClr val="9D174D"/>
-                </a:solidFill>
-                <a:latin typeface="Trebuchet MS" pitchFamily="34" charset="0"/>
-                <a:ea typeface="Trebuchet MS" pitchFamily="34" charset="-122"/>
-                <a:cs typeface="Trebuchet MS" pitchFamily="34" charset="-120"/>
-              </a:rPr>
-              <a:t>n</a:t>
-            </a:r>
-            <a:endParaRPr lang="en-US" sz="900" dirty="0"/>
-          </a:p>
-        </p:txBody>
-      </p:sp>
-      <p:sp>
-        <p:nvSpPr>
-          <p:cNvPr id="51" name="Shape 49"/>
-          <p:cNvSpPr/>
-          <p:nvPr/>
-        </p:nvSpPr>
-        <p:spPr>
-          <a:xfrm>
-            <a:off x="6307531" y="4169664"/>
-            <a:ext cx="676656" cy="475488"/>
-          </a:xfrm>
-          <a:prstGeom prst="rect">
-            <a:avLst>
-              <a:gd name="adj" fmla="val 7692"/>
-            </a:avLst>
-          </a:prstGeom>
-          <a:solidFill>
-            <a:srgbClr val="FFFFFF"/>
-          </a:solidFill>
-          <a:ln w="12700">
-            <a:solidFill>
-              <a:srgbClr val="DB2777"/>
-            </a:solidFill>
-            <a:prstDash val="solid"/>
-          </a:ln>
-        </p:spPr>
-      </p:sp>
-      <p:sp>
-        <p:nvSpPr>
-          <p:cNvPr id="52" name="Text 50"/>
-          <p:cNvSpPr/>
-          <p:nvPr/>
-        </p:nvSpPr>
-        <p:spPr>
-          <a:xfrm>
-            <a:off x="6307531" y="4169664"/>
-            <a:ext cx="676656" cy="475488"/>
-          </a:xfrm>
-          <a:prstGeom prst="rect">
-            <a:avLst/>
-          </a:prstGeom>
-          <a:noFill/>
-          <a:ln/>
-        </p:spPr>
-        <p:txBody>
-          <a:bodyPr wrap="square" lIns="0" tIns="0" rIns="0" bIns="0" rtlCol="0" anchor="ctr"/>
-          <a:lstStyle/>
-          <a:p>
-            <a:pPr algn="ctr" indent="0" marL="0">
-              <a:buNone/>
-            </a:pPr>
-            <a:r>
-              <a:rPr lang="en-US" sz="900" b="1" dirty="0">
-                <a:solidFill>
-                  <a:srgbClr val="9D174D"/>
-                </a:solidFill>
-                <a:latin typeface="Trebuchet MS" pitchFamily="34" charset="0"/>
-                <a:ea typeface="Trebuchet MS" pitchFamily="34" charset="-122"/>
-                <a:cs typeface="Trebuchet MS" pitchFamily="34" charset="-120"/>
-              </a:rPr>
               <a:t>t</a:t>
-            </a:r>
-            <a:endParaRPr lang="en-US" sz="900" dirty="0"/>
-          </a:p>
-        </p:txBody>
-      </p:sp>
-      <p:sp>
-        <p:nvSpPr>
-          <p:cNvPr id="53" name="Shape 51"/>
-          <p:cNvSpPr/>
-          <p:nvPr/>
-        </p:nvSpPr>
-        <p:spPr>
-          <a:xfrm>
-            <a:off x="7033565" y="4169664"/>
-            <a:ext cx="676656" cy="475488"/>
-          </a:xfrm>
-          <a:prstGeom prst="rect">
-            <a:avLst>
-              <a:gd name="adj" fmla="val 7692"/>
-            </a:avLst>
-          </a:prstGeom>
-          <a:solidFill>
-            <a:srgbClr val="FFFFFF"/>
-          </a:solidFill>
-          <a:ln w="12700">
-            <a:solidFill>
-              <a:srgbClr val="DB2777"/>
-            </a:solidFill>
-            <a:prstDash val="solid"/>
-          </a:ln>
-        </p:spPr>
-      </p:sp>
-      <p:sp>
-        <p:nvSpPr>
-          <p:cNvPr id="54" name="Text 52"/>
-          <p:cNvSpPr/>
-          <p:nvPr/>
-        </p:nvSpPr>
-        <p:spPr>
-          <a:xfrm>
-            <a:off x="7033565" y="4169664"/>
-            <a:ext cx="676656" cy="475488"/>
-          </a:xfrm>
-          <a:prstGeom prst="rect">
-            <a:avLst/>
-          </a:prstGeom>
-          <a:noFill/>
-          <a:ln/>
-        </p:spPr>
-        <p:txBody>
-          <a:bodyPr wrap="square" lIns="0" tIns="0" rIns="0" bIns="0" rtlCol="0" anchor="ctr"/>
-          <a:lstStyle/>
-          <a:p>
-            <a:pPr algn="ctr" indent="0" marL="0">
-              <a:buNone/>
-            </a:pPr>
-            <a:r>
-              <a:rPr lang="en-US" sz="900" b="1" dirty="0">
-                <a:solidFill>
-                  <a:srgbClr val="9D174D"/>
-                </a:solidFill>
-                <a:latin typeface="Trebuchet MS" pitchFamily="34" charset="0"/>
-                <a:ea typeface="Trebuchet MS" pitchFamily="34" charset="-122"/>
-                <a:cs typeface="Trebuchet MS" pitchFamily="34" charset="-120"/>
-              </a:rPr>
-              <a:t>e</a:t>
-            </a:r>
-            <a:endParaRPr lang="en-US" sz="900" dirty="0"/>
-          </a:p>
-        </p:txBody>
-      </p:sp>
-      <p:sp>
-        <p:nvSpPr>
-          <p:cNvPr id="55" name="Shape 53"/>
-          <p:cNvSpPr/>
-          <p:nvPr/>
-        </p:nvSpPr>
-        <p:spPr>
-          <a:xfrm>
-            <a:off x="7759598" y="4169664"/>
-            <a:ext cx="676656" cy="475488"/>
-          </a:xfrm>
-          <a:prstGeom prst="rect">
-            <a:avLst>
-              <a:gd name="adj" fmla="val 7692"/>
-            </a:avLst>
-          </a:prstGeom>
-          <a:solidFill>
-            <a:srgbClr val="FFFFFF"/>
-          </a:solidFill>
-          <a:ln w="12700">
-            <a:solidFill>
-              <a:srgbClr val="DB2777"/>
-            </a:solidFill>
-            <a:prstDash val="solid"/>
-          </a:ln>
-        </p:spPr>
-      </p:sp>
-      <p:sp>
-        <p:nvSpPr>
-          <p:cNvPr id="56" name="Text 54"/>
-          <p:cNvSpPr/>
-          <p:nvPr/>
-        </p:nvSpPr>
-        <p:spPr>
-          <a:xfrm>
-            <a:off x="7759598" y="4169664"/>
-            <a:ext cx="676656" cy="475488"/>
-          </a:xfrm>
-          <a:prstGeom prst="rect">
-            <a:avLst/>
-          </a:prstGeom>
-          <a:noFill/>
-          <a:ln/>
-        </p:spPr>
-        <p:txBody>
-          <a:bodyPr wrap="square" lIns="0" tIns="0" rIns="0" bIns="0" rtlCol="0" anchor="ctr"/>
-          <a:lstStyle/>
-          <a:p>
-            <a:pPr algn="ctr" indent="0" marL="0">
-              <a:buNone/>
-            </a:pPr>
-            <a:r>
-              <a:rPr lang="en-US" sz="900" b="1" dirty="0">
-                <a:solidFill>
-                  <a:srgbClr val="9D174D"/>
-                </a:solidFill>
-                <a:latin typeface="Trebuchet MS" pitchFamily="34" charset="0"/>
-                <a:ea typeface="Trebuchet MS" pitchFamily="34" charset="-122"/>
-                <a:cs typeface="Trebuchet MS" pitchFamily="34" charset="-120"/>
-              </a:rPr>
-              <a:t>d</a:t>
             </a:r>
             <a:endParaRPr lang="en-US" sz="900" dirty="0"/>
           </a:p>
@@ -28825,7 +29335,7 @@
                 <a:ea typeface="Calibri" pitchFamily="34" charset="-122"/>
                 <a:cs typeface="Calibri" pitchFamily="34" charset="-120"/>
               </a:rPr>
-              <a:t>Word Labs  •  wordlabs.app  •  Root: 'count' = to number or reckon</a:t>
+              <a:t>Word Labs  •  wordlabs.app  •  Root: 'count' = to number or calculate</a:t>
             </a:r>
             <a:endParaRPr lang="en-US" sz="800" dirty="0"/>
           </a:p>
@@ -28964,7 +29474,7 @@
                 <a:ea typeface="Trebuchet MS" pitchFamily="34" charset="-122"/>
                 <a:cs typeface="Trebuchet MS" pitchFamily="34" charset="-120"/>
               </a:rPr>
-              <a:t>discount</a:t>
+              <a:t>countless</a:t>
             </a:r>
             <a:endParaRPr lang="en-US" sz="2800" dirty="0"/>
           </a:p>
@@ -29652,7 +30162,7 @@
                 <a:ea typeface="Calibri" pitchFamily="34" charset="-122"/>
                 <a:cs typeface="Calibri" pitchFamily="34" charset="-120"/>
               </a:rPr>
-              <a:t>Word Labs  •  wordlabs.app  •  Root: 'count' = to number or reckon</a:t>
+              <a:t>Word Labs  •  wordlabs.app  •  Root: 'count' = to number or calculate</a:t>
             </a:r>
             <a:endParaRPr lang="en-US" sz="800" dirty="0"/>
           </a:p>
@@ -29791,7 +30301,7 @@
                 <a:ea typeface="Trebuchet MS" pitchFamily="34" charset="-122"/>
                 <a:cs typeface="Trebuchet MS" pitchFamily="34" charset="-120"/>
               </a:rPr>
-              <a:t>discount</a:t>
+              <a:t>countless</a:t>
             </a:r>
             <a:endParaRPr lang="en-US" sz="2800" dirty="0"/>
           </a:p>
@@ -29880,11 +30390,11 @@
             </a:avLst>
           </a:prstGeom>
           <a:solidFill>
-            <a:srgbClr val="DDD6FE"/>
+            <a:srgbClr val="CCFBF1"/>
           </a:solidFill>
           <a:ln w="19050">
             <a:solidFill>
-              <a:srgbClr val="7C3AED"/>
+              <a:srgbClr val="0D9488"/>
             </a:solidFill>
             <a:prstDash val="solid"/>
           </a:ln>
@@ -29924,13 +30434,13 @@
             <a:r>
               <a:rPr lang="en-US" sz="1300" b="1" dirty="0">
                 <a:solidFill>
-                  <a:srgbClr val="4C1D95"/>
+                  <a:srgbClr val="0F766E"/>
                 </a:solidFill>
                 <a:latin typeface="Trebuchet MS" pitchFamily="34" charset="0"/>
                 <a:ea typeface="Trebuchet MS" pitchFamily="34" charset="-122"/>
                 <a:cs typeface="Trebuchet MS" pitchFamily="34" charset="-120"/>
               </a:rPr>
-              <a:t>dis</a:t>
+              <a:t>count</a:t>
             </a:r>
             <a:endParaRPr lang="en-US" sz="1300" dirty="0"/>
           </a:p>
@@ -29969,7 +30479,7 @@
                 <a:ea typeface="Calibri" pitchFamily="34" charset="-122"/>
                 <a:cs typeface="Calibri" pitchFamily="34" charset="-120"/>
               </a:rPr>
-              <a:t>away, remove</a:t>
+              <a:t>to number or calculate</a:t>
             </a:r>
             <a:endParaRPr lang="en-US" sz="850" dirty="0"/>
           </a:p>
@@ -29992,11 +30502,11 @@
             </a:avLst>
           </a:prstGeom>
           <a:solidFill>
-            <a:srgbClr val="CCFBF1"/>
+            <a:srgbClr val="DDD6FE"/>
           </a:solidFill>
           <a:ln w="19050">
             <a:solidFill>
-              <a:srgbClr val="0D9488"/>
+              <a:srgbClr val="7C3AED"/>
             </a:solidFill>
             <a:prstDash val="solid"/>
           </a:ln>
@@ -30036,13 +30546,13 @@
             <a:r>
               <a:rPr lang="en-US" sz="1300" b="1" dirty="0">
                 <a:solidFill>
-                  <a:srgbClr val="0F766E"/>
+                  <a:srgbClr val="4C1D95"/>
                 </a:solidFill>
                 <a:latin typeface="Trebuchet MS" pitchFamily="34" charset="0"/>
                 <a:ea typeface="Trebuchet MS" pitchFamily="34" charset="-122"/>
                 <a:cs typeface="Trebuchet MS" pitchFamily="34" charset="-120"/>
               </a:rPr>
-              <a:t>count</a:t>
+              <a:t>less</a:t>
             </a:r>
             <a:endParaRPr lang="en-US" sz="1300" dirty="0"/>
           </a:p>
@@ -30081,7 +30591,7 @@
                 <a:ea typeface="Calibri" pitchFamily="34" charset="-122"/>
                 <a:cs typeface="Calibri" pitchFamily="34" charset="-120"/>
               </a:rPr>
-              <a:t>to number or reckon</a:t>
+              <a:t>without, having none</a:t>
             </a:r>
             <a:endParaRPr lang="en-US" sz="850" dirty="0"/>
           </a:p>
@@ -30637,7 +31147,7 @@
                 <a:ea typeface="Calibri" pitchFamily="34" charset="-122"/>
                 <a:cs typeface="Calibri" pitchFamily="34" charset="-120"/>
               </a:rPr>
-              <a:t>Word Labs  •  wordlabs.app  •  Root: 'count' = to number or reckon</a:t>
+              <a:t>Word Labs  •  wordlabs.app  •  Root: 'count' = to number or calculate</a:t>
             </a:r>
             <a:endParaRPr lang="en-US" sz="800" dirty="0"/>
           </a:p>
@@ -30776,7 +31286,7 @@
                 <a:ea typeface="Trebuchet MS" pitchFamily="34" charset="-122"/>
                 <a:cs typeface="Trebuchet MS" pitchFamily="34" charset="-120"/>
               </a:rPr>
-              <a:t>discount</a:t>
+              <a:t>countless</a:t>
             </a:r>
             <a:endParaRPr lang="en-US" sz="2800" dirty="0"/>
           </a:p>
@@ -30865,11 +31375,11 @@
             </a:avLst>
           </a:prstGeom>
           <a:solidFill>
-            <a:srgbClr val="DDD6FE"/>
+            <a:srgbClr val="CCFBF1"/>
           </a:solidFill>
           <a:ln w="19050">
             <a:solidFill>
-              <a:srgbClr val="7C3AED"/>
+              <a:srgbClr val="0D9488"/>
             </a:solidFill>
             <a:prstDash val="solid"/>
           </a:ln>
@@ -30909,13 +31419,13 @@
             <a:r>
               <a:rPr lang="en-US" sz="1300" b="1" dirty="0">
                 <a:solidFill>
-                  <a:srgbClr val="4C1D95"/>
+                  <a:srgbClr val="0F766E"/>
                 </a:solidFill>
                 <a:latin typeface="Trebuchet MS" pitchFamily="34" charset="0"/>
                 <a:ea typeface="Trebuchet MS" pitchFamily="34" charset="-122"/>
                 <a:cs typeface="Trebuchet MS" pitchFamily="34" charset="-120"/>
               </a:rPr>
-              <a:t>dis</a:t>
+              <a:t>count</a:t>
             </a:r>
             <a:endParaRPr lang="en-US" sz="1300" dirty="0"/>
           </a:p>
@@ -30954,7 +31464,7 @@
                 <a:ea typeface="Calibri" pitchFamily="34" charset="-122"/>
                 <a:cs typeface="Calibri" pitchFamily="34" charset="-120"/>
               </a:rPr>
-              <a:t>away, remove</a:t>
+              <a:t>to number or calculate</a:t>
             </a:r>
             <a:endParaRPr lang="en-US" sz="850" dirty="0"/>
           </a:p>
@@ -30977,11 +31487,11 @@
             </a:avLst>
           </a:prstGeom>
           <a:solidFill>
-            <a:srgbClr val="CCFBF1"/>
+            <a:srgbClr val="DDD6FE"/>
           </a:solidFill>
           <a:ln w="19050">
             <a:solidFill>
-              <a:srgbClr val="0D9488"/>
+              <a:srgbClr val="7C3AED"/>
             </a:solidFill>
             <a:prstDash val="solid"/>
           </a:ln>
@@ -31021,13 +31531,13 @@
             <a:r>
               <a:rPr lang="en-US" sz="1300" b="1" dirty="0">
                 <a:solidFill>
-                  <a:srgbClr val="0F766E"/>
+                  <a:srgbClr val="4C1D95"/>
                 </a:solidFill>
                 <a:latin typeface="Trebuchet MS" pitchFamily="34" charset="0"/>
                 <a:ea typeface="Trebuchet MS" pitchFamily="34" charset="-122"/>
                 <a:cs typeface="Trebuchet MS" pitchFamily="34" charset="-120"/>
               </a:rPr>
-              <a:t>count</a:t>
+              <a:t>less</a:t>
             </a:r>
             <a:endParaRPr lang="en-US" sz="1300" dirty="0"/>
           </a:p>
@@ -31066,7 +31576,7 @@
                 <a:ea typeface="Calibri" pitchFamily="34" charset="-122"/>
                 <a:cs typeface="Calibri" pitchFamily="34" charset="-120"/>
               </a:rPr>
-              <a:t>to number or reckon</a:t>
+              <a:t>without, having none</a:t>
             </a:r>
             <a:endParaRPr lang="en-US" sz="850" dirty="0"/>
           </a:p>
@@ -31225,7 +31735,7 @@
                 <a:ea typeface="Trebuchet MS" pitchFamily="34" charset="-122"/>
                 <a:cs typeface="Trebuchet MS" pitchFamily="34" charset="-120"/>
               </a:rPr>
-              <a:t>dis</a:t>
+              <a:t>count</a:t>
             </a:r>
             <a:endParaRPr lang="en-US" sz="1400" dirty="0"/>
           </a:p>
@@ -31330,7 +31840,7 @@
                 <a:ea typeface="Trebuchet MS" pitchFamily="34" charset="-122"/>
                 <a:cs typeface="Trebuchet MS" pitchFamily="34" charset="-120"/>
               </a:rPr>
-              <a:t>count</a:t>
+              <a:t>less</a:t>
             </a:r>
             <a:endParaRPr lang="en-US" sz="1400" dirty="0"/>
           </a:p>
@@ -31754,7 +32264,7 @@
                 <a:ea typeface="Calibri" pitchFamily="34" charset="-122"/>
                 <a:cs typeface="Calibri" pitchFamily="34" charset="-120"/>
               </a:rPr>
-              <a:t>Word Labs  •  wordlabs.app  •  Root: 'count' = to number or reckon</a:t>
+              <a:t>Word Labs  •  wordlabs.app  •  Root: 'count' = to number or calculate</a:t>
             </a:r>
             <a:endParaRPr lang="en-US" sz="800" dirty="0"/>
           </a:p>
@@ -31893,7 +32403,7 @@
                 <a:ea typeface="Trebuchet MS" pitchFamily="34" charset="-122"/>
                 <a:cs typeface="Trebuchet MS" pitchFamily="34" charset="-120"/>
               </a:rPr>
-              <a:t>discount</a:t>
+              <a:t>countless</a:t>
             </a:r>
             <a:endParaRPr lang="en-US" sz="2800" dirty="0"/>
           </a:p>
@@ -31982,11 +32492,11 @@
             </a:avLst>
           </a:prstGeom>
           <a:solidFill>
-            <a:srgbClr val="DDD6FE"/>
+            <a:srgbClr val="CCFBF1"/>
           </a:solidFill>
           <a:ln w="19050">
             <a:solidFill>
-              <a:srgbClr val="7C3AED"/>
+              <a:srgbClr val="0D9488"/>
             </a:solidFill>
             <a:prstDash val="solid"/>
           </a:ln>
@@ -32026,13 +32536,13 @@
             <a:r>
               <a:rPr lang="en-US" sz="1300" b="1" dirty="0">
                 <a:solidFill>
-                  <a:srgbClr val="4C1D95"/>
+                  <a:srgbClr val="0F766E"/>
                 </a:solidFill>
                 <a:latin typeface="Trebuchet MS" pitchFamily="34" charset="0"/>
                 <a:ea typeface="Trebuchet MS" pitchFamily="34" charset="-122"/>
                 <a:cs typeface="Trebuchet MS" pitchFamily="34" charset="-120"/>
               </a:rPr>
-              <a:t>dis</a:t>
+              <a:t>count</a:t>
             </a:r>
             <a:endParaRPr lang="en-US" sz="1300" dirty="0"/>
           </a:p>
@@ -32071,7 +32581,7 @@
                 <a:ea typeface="Calibri" pitchFamily="34" charset="-122"/>
                 <a:cs typeface="Calibri" pitchFamily="34" charset="-120"/>
               </a:rPr>
-              <a:t>away, remove</a:t>
+              <a:t>to number or calculate</a:t>
             </a:r>
             <a:endParaRPr lang="en-US" sz="850" dirty="0"/>
           </a:p>
@@ -32094,11 +32604,11 @@
             </a:avLst>
           </a:prstGeom>
           <a:solidFill>
-            <a:srgbClr val="CCFBF1"/>
+            <a:srgbClr val="DDD6FE"/>
           </a:solidFill>
           <a:ln w="19050">
             <a:solidFill>
-              <a:srgbClr val="0D9488"/>
+              <a:srgbClr val="7C3AED"/>
             </a:solidFill>
             <a:prstDash val="solid"/>
           </a:ln>
@@ -32138,13 +32648,13 @@
             <a:r>
               <a:rPr lang="en-US" sz="1300" b="1" dirty="0">
                 <a:solidFill>
-                  <a:srgbClr val="0F766E"/>
+                  <a:srgbClr val="4C1D95"/>
                 </a:solidFill>
                 <a:latin typeface="Trebuchet MS" pitchFamily="34" charset="0"/>
                 <a:ea typeface="Trebuchet MS" pitchFamily="34" charset="-122"/>
                 <a:cs typeface="Trebuchet MS" pitchFamily="34" charset="-120"/>
               </a:rPr>
-              <a:t>count</a:t>
+              <a:t>less</a:t>
             </a:r>
             <a:endParaRPr lang="en-US" sz="1300" dirty="0"/>
           </a:p>
@@ -32183,7 +32693,7 @@
                 <a:ea typeface="Calibri" pitchFamily="34" charset="-122"/>
                 <a:cs typeface="Calibri" pitchFamily="34" charset="-120"/>
               </a:rPr>
-              <a:t>to number or reckon</a:t>
+              <a:t>without, having none</a:t>
             </a:r>
             <a:endParaRPr lang="en-US" sz="850" dirty="0"/>
           </a:p>
@@ -32342,7 +32852,7 @@
                 <a:ea typeface="Trebuchet MS" pitchFamily="34" charset="-122"/>
                 <a:cs typeface="Trebuchet MS" pitchFamily="34" charset="-120"/>
               </a:rPr>
-              <a:t>dis</a:t>
+              <a:t>count</a:t>
             </a:r>
             <a:endParaRPr lang="en-US" sz="1400" dirty="0"/>
           </a:p>
@@ -32447,7 +32957,7 @@
                 <a:ea typeface="Trebuchet MS" pitchFamily="34" charset="-122"/>
                 <a:cs typeface="Trebuchet MS" pitchFamily="34" charset="-120"/>
               </a:rPr>
-              <a:t>count</a:t>
+              <a:t>less</a:t>
             </a:r>
             <a:endParaRPr lang="en-US" sz="1400" dirty="0"/>
           </a:p>
@@ -32528,11 +33038,11 @@
         <p:spPr>
           <a:xfrm>
             <a:off x="1874520" y="4096512"/>
-            <a:ext cx="6903720" cy="658368"/>
+            <a:ext cx="6903720" cy="804672"/>
           </a:xfrm>
           <a:prstGeom prst="rect">
             <a:avLst>
-              <a:gd name="adj" fmla="val 8333"/>
+              <a:gd name="adj" fmla="val 6818"/>
             </a:avLst>
           </a:prstGeom>
           <a:solidFill>
@@ -32555,11 +33065,11 @@
         <p:spPr>
           <a:xfrm>
             <a:off x="2124837" y="4169664"/>
-            <a:ext cx="685800" cy="475488"/>
+            <a:ext cx="685800" cy="384048"/>
           </a:xfrm>
           <a:prstGeom prst="rect">
             <a:avLst>
-              <a:gd name="adj" fmla="val 7692"/>
+              <a:gd name="adj" fmla="val 9524"/>
             </a:avLst>
           </a:prstGeom>
           <a:solidFill>
@@ -32582,7 +33092,7 @@
         <p:spPr>
           <a:xfrm>
             <a:off x="2124837" y="4169664"/>
-            <a:ext cx="685800" cy="475488"/>
+            <a:ext cx="685800" cy="384048"/>
           </a:xfrm>
           <a:prstGeom prst="rect">
             <a:avLst/>
@@ -32606,7 +33116,7 @@
                 <a:ea typeface="Trebuchet MS" pitchFamily="34" charset="-122"/>
                 <a:cs typeface="Trebuchet MS" pitchFamily="34" charset="-120"/>
               </a:rPr>
-              <a:t>d</a:t>
+              <a:t>c</a:t>
             </a:r>
             <a:endParaRPr lang="en-US" sz="900" dirty="0"/>
           </a:p>
@@ -32614,18 +33124,57 @@
       </p:sp>
       <p:sp>
         <p:nvSpPr>
-          <p:cNvPr id="35" name="Shape 33"/>
+          <p:cNvPr id="35" name="Text 33"/>
+          <p:cNvSpPr/>
+          <p:nvPr/>
+        </p:nvSpPr>
+        <p:spPr>
+          <a:xfrm>
+            <a:off x="2124837" y="4572000"/>
+            <a:ext cx="685800" cy="219456"/>
+          </a:xfrm>
+          <a:prstGeom prst="rect">
+            <a:avLst/>
+          </a:prstGeom>
+          <a:noFill/>
+          <a:ln/>
+        </p:spPr>
+        <p:txBody>
+          <a:bodyPr wrap="square" lIns="0" tIns="0" rIns="0" bIns="0" rtlCol="0" anchor="t"/>
+          <a:lstStyle/>
+          <a:p>
+            <a:pPr algn="ctr" indent="0" marL="0">
+              <a:buNone/>
+            </a:pPr>
+            <a:r>
+              <a:rPr lang="en-US" sz="750" i="1" dirty="0">
+                <a:solidFill>
+                  <a:srgbClr val="94A3B8"/>
+                </a:solidFill>
+                <a:latin typeface="Calibri" pitchFamily="34" charset="0"/>
+                <a:ea typeface="Calibri" pitchFamily="34" charset="-122"/>
+                <a:cs typeface="Calibri" pitchFamily="34" charset="-120"/>
+              </a:rPr>
+              <a:t>/k/</a:t>
+            </a:r>
+            <a:endParaRPr lang="en-US" sz="750" dirty="0"/>
+          </a:p>
+        </p:txBody>
+      </p:sp>
+      <p:sp>
+        <p:nvSpPr>
+          <p:cNvPr id="36" name="Shape 34"/>
           <p:cNvSpPr/>
           <p:nvPr/>
         </p:nvSpPr>
         <p:spPr>
           <a:xfrm>
             <a:off x="3033522" y="4169664"/>
-            <a:ext cx="685800" cy="475488"/>
+            <a:ext cx="685800" cy="384048"/>
           </a:xfrm>
           <a:prstGeom prst="rect">
             <a:avLst>
-              <a:gd name="adj" fmla="val 7692"/>
+              <a:gd name="adj" fmla="val 9524"/>
             </a:avLst>
           </a:prstGeom>
           <a:solidFill>
@@ -32641,14 +33190,14 @@
       </p:sp>
       <p:sp>
         <p:nvSpPr>
-          <p:cNvPr id="36" name="Text 34"/>
+          <p:cNvPr id="37" name="Text 35"/>
           <p:cNvSpPr/>
           <p:nvPr/>
         </p:nvSpPr>
         <p:spPr>
           <a:xfrm>
             <a:off x="3033522" y="4169664"/>
-            <a:ext cx="685800" cy="475488"/>
+            <a:ext cx="685800" cy="384048"/>
           </a:xfrm>
           <a:prstGeom prst="rect">
             <a:avLst/>
@@ -32672,7 +33221,7 @@
                 <a:ea typeface="Trebuchet MS" pitchFamily="34" charset="-122"/>
                 <a:cs typeface="Trebuchet MS" pitchFamily="34" charset="-120"/>
               </a:rPr>
-              <a:t>i</a:t>
+              <a:t>ou</a:t>
             </a:r>
             <a:endParaRPr lang="en-US" sz="900" dirty="0"/>
           </a:p>
@@ -32680,18 +33229,18 @@
       </p:sp>
       <p:sp>
         <p:nvSpPr>
-          <p:cNvPr id="37" name="Shape 35"/>
+          <p:cNvPr id="38" name="Shape 36"/>
           <p:cNvSpPr/>
           <p:nvPr/>
         </p:nvSpPr>
         <p:spPr>
           <a:xfrm>
             <a:off x="3942207" y="4169664"/>
-            <a:ext cx="685800" cy="475488"/>
+            <a:ext cx="685800" cy="384048"/>
           </a:xfrm>
           <a:prstGeom prst="rect">
             <a:avLst>
-              <a:gd name="adj" fmla="val 7692"/>
+              <a:gd name="adj" fmla="val 9524"/>
             </a:avLst>
           </a:prstGeom>
           <a:solidFill>
@@ -32707,14 +33256,14 @@
       </p:sp>
       <p:sp>
         <p:nvSpPr>
-          <p:cNvPr id="38" name="Text 36"/>
+          <p:cNvPr id="39" name="Text 37"/>
           <p:cNvSpPr/>
           <p:nvPr/>
         </p:nvSpPr>
         <p:spPr>
           <a:xfrm>
             <a:off x="3942207" y="4169664"/>
-            <a:ext cx="685800" cy="475488"/>
+            <a:ext cx="685800" cy="384048"/>
           </a:xfrm>
           <a:prstGeom prst="rect">
             <a:avLst/>
@@ -32738,7 +33287,7 @@
                 <a:ea typeface="Trebuchet MS" pitchFamily="34" charset="-122"/>
                 <a:cs typeface="Trebuchet MS" pitchFamily="34" charset="-120"/>
               </a:rPr>
-              <a:t>s</a:t>
+              <a:t>n</a:t>
             </a:r>
             <a:endParaRPr lang="en-US" sz="900" dirty="0"/>
           </a:p>
@@ -32746,18 +33295,18 @@
       </p:sp>
       <p:sp>
         <p:nvSpPr>
-          <p:cNvPr id="39" name="Shape 37"/>
+          <p:cNvPr id="40" name="Shape 38"/>
           <p:cNvSpPr/>
           <p:nvPr/>
         </p:nvSpPr>
         <p:spPr>
           <a:xfrm>
             <a:off x="4850892" y="4169664"/>
-            <a:ext cx="685800" cy="475488"/>
+            <a:ext cx="685800" cy="384048"/>
           </a:xfrm>
           <a:prstGeom prst="rect">
             <a:avLst>
-              <a:gd name="adj" fmla="val 7692"/>
+              <a:gd name="adj" fmla="val 9524"/>
             </a:avLst>
           </a:prstGeom>
           <a:solidFill>
@@ -32773,14 +33322,14 @@
       </p:sp>
       <p:sp>
         <p:nvSpPr>
-          <p:cNvPr id="40" name="Text 38"/>
+          <p:cNvPr id="41" name="Text 39"/>
           <p:cNvSpPr/>
           <p:nvPr/>
         </p:nvSpPr>
         <p:spPr>
           <a:xfrm>
             <a:off x="4850892" y="4169664"/>
-            <a:ext cx="685800" cy="475488"/>
+            <a:ext cx="685800" cy="384048"/>
           </a:xfrm>
           <a:prstGeom prst="rect">
             <a:avLst/>
@@ -32804,7 +33353,7 @@
                 <a:ea typeface="Trebuchet MS" pitchFamily="34" charset="-122"/>
                 <a:cs typeface="Trebuchet MS" pitchFamily="34" charset="-120"/>
               </a:rPr>
-              <a:t>c</a:t>
+              <a:t>t</a:t>
             </a:r>
             <a:endParaRPr lang="en-US" sz="900" dirty="0"/>
           </a:p>
@@ -32812,18 +33361,18 @@
       </p:sp>
       <p:sp>
         <p:nvSpPr>
-          <p:cNvPr id="41" name="Shape 39"/>
+          <p:cNvPr id="42" name="Shape 40"/>
           <p:cNvSpPr/>
           <p:nvPr/>
         </p:nvSpPr>
         <p:spPr>
           <a:xfrm>
             <a:off x="5759577" y="4169664"/>
-            <a:ext cx="685800" cy="475488"/>
+            <a:ext cx="685800" cy="384048"/>
           </a:xfrm>
           <a:prstGeom prst="rect">
             <a:avLst>
-              <a:gd name="adj" fmla="val 7692"/>
+              <a:gd name="adj" fmla="val 9524"/>
             </a:avLst>
           </a:prstGeom>
           <a:solidFill>
@@ -32839,14 +33388,14 @@
       </p:sp>
       <p:sp>
         <p:nvSpPr>
-          <p:cNvPr id="42" name="Text 40"/>
+          <p:cNvPr id="43" name="Text 41"/>
           <p:cNvSpPr/>
           <p:nvPr/>
         </p:nvSpPr>
         <p:spPr>
           <a:xfrm>
             <a:off x="5759577" y="4169664"/>
-            <a:ext cx="685800" cy="475488"/>
+            <a:ext cx="685800" cy="384048"/>
           </a:xfrm>
           <a:prstGeom prst="rect">
             <a:avLst/>
@@ -32870,7 +33419,7 @@
                 <a:ea typeface="Trebuchet MS" pitchFamily="34" charset="-122"/>
                 <a:cs typeface="Trebuchet MS" pitchFamily="34" charset="-120"/>
               </a:rPr>
-              <a:t>ou</a:t>
+              <a:t>l</a:t>
             </a:r>
             <a:endParaRPr lang="en-US" sz="900" dirty="0"/>
           </a:p>
@@ -32878,18 +33427,18 @@
       </p:sp>
       <p:sp>
         <p:nvSpPr>
-          <p:cNvPr id="43" name="Shape 41"/>
+          <p:cNvPr id="44" name="Shape 42"/>
           <p:cNvSpPr/>
           <p:nvPr/>
         </p:nvSpPr>
         <p:spPr>
           <a:xfrm>
             <a:off x="6668262" y="4169664"/>
-            <a:ext cx="685800" cy="475488"/>
+            <a:ext cx="685800" cy="384048"/>
           </a:xfrm>
           <a:prstGeom prst="rect">
             <a:avLst>
-              <a:gd name="adj" fmla="val 7692"/>
+              <a:gd name="adj" fmla="val 9524"/>
             </a:avLst>
           </a:prstGeom>
           <a:solidFill>
@@ -32905,14 +33454,14 @@
       </p:sp>
       <p:sp>
         <p:nvSpPr>
-          <p:cNvPr id="44" name="Text 42"/>
+          <p:cNvPr id="45" name="Text 43"/>
           <p:cNvSpPr/>
           <p:nvPr/>
         </p:nvSpPr>
         <p:spPr>
           <a:xfrm>
             <a:off x="6668262" y="4169664"/>
-            <a:ext cx="685800" cy="475488"/>
+            <a:ext cx="685800" cy="384048"/>
           </a:xfrm>
           <a:prstGeom prst="rect">
             <a:avLst/>
@@ -32936,7 +33485,7 @@
                 <a:ea typeface="Trebuchet MS" pitchFamily="34" charset="-122"/>
                 <a:cs typeface="Trebuchet MS" pitchFamily="34" charset="-120"/>
               </a:rPr>
-              <a:t>n</a:t>
+              <a:t>e</a:t>
             </a:r>
             <a:endParaRPr lang="en-US" sz="900" dirty="0"/>
           </a:p>
@@ -32944,18 +33493,18 @@
       </p:sp>
       <p:sp>
         <p:nvSpPr>
-          <p:cNvPr id="45" name="Shape 43"/>
+          <p:cNvPr id="46" name="Shape 44"/>
           <p:cNvSpPr/>
           <p:nvPr/>
         </p:nvSpPr>
         <p:spPr>
           <a:xfrm>
             <a:off x="7576947" y="4169664"/>
-            <a:ext cx="685800" cy="475488"/>
+            <a:ext cx="685800" cy="384048"/>
           </a:xfrm>
           <a:prstGeom prst="rect">
             <a:avLst>
-              <a:gd name="adj" fmla="val 7692"/>
+              <a:gd name="adj" fmla="val 9524"/>
             </a:avLst>
           </a:prstGeom>
           <a:solidFill>
@@ -32971,14 +33520,14 @@
       </p:sp>
       <p:sp>
         <p:nvSpPr>
-          <p:cNvPr id="46" name="Text 44"/>
+          <p:cNvPr id="47" name="Text 45"/>
           <p:cNvSpPr/>
           <p:nvPr/>
         </p:nvSpPr>
         <p:spPr>
           <a:xfrm>
             <a:off x="7576947" y="4169664"/>
-            <a:ext cx="685800" cy="475488"/>
+            <a:ext cx="685800" cy="384048"/>
           </a:xfrm>
           <a:prstGeom prst="rect">
             <a:avLst/>
@@ -33002,7 +33551,7 @@
                 <a:ea typeface="Trebuchet MS" pitchFamily="34" charset="-122"/>
                 <a:cs typeface="Trebuchet MS" pitchFamily="34" charset="-120"/>
               </a:rPr>
-              <a:t>t</a:t>
+              <a:t>ss</a:t>
             </a:r>
             <a:endParaRPr lang="en-US" sz="900" dirty="0"/>
           </a:p>
@@ -33294,7 +33843,7 @@
                 <a:ea typeface="Calibri" pitchFamily="34" charset="-122"/>
                 <a:cs typeface="Calibri" pitchFamily="34" charset="-120"/>
               </a:rPr>
-              <a:t>Word Labs  •  wordlabs.app  •  Root: 'count' = to number or reckon</a:t>
+              <a:t>Word Labs  •  wordlabs.app  •  Root: 'count' = to number or calculate</a:t>
             </a:r>
             <a:endParaRPr lang="en-US" sz="800" dirty="0"/>
           </a:p>
@@ -34463,7 +35012,7 @@
                 <a:ea typeface="Calibri" pitchFamily="34" charset="-122"/>
                 <a:cs typeface="Calibri" pitchFamily="34" charset="-120"/>
               </a:rPr>
-              <a:t>Word Labs  •  wordlabs.app  •  Root: 'count' = to number or reckon</a:t>
+              <a:t>Word Labs  •  wordlabs.app  •  Root: 'count' = to number or calculate</a:t>
             </a:r>
             <a:endParaRPr lang="en-US" sz="800" dirty="0"/>
           </a:p>
@@ -35109,7 +35658,7 @@
                 <a:ea typeface="Trebuchet MS" pitchFamily="34" charset="-122"/>
                 <a:cs typeface="Trebuchet MS" pitchFamily="34" charset="-120"/>
               </a:rPr>
-              <a:t>mis-</a:t>
+              <a:t>en-</a:t>
             </a:r>
             <a:endParaRPr lang="en-US" sz="1300" dirty="0"/>
           </a:p>
@@ -35262,7 +35811,7 @@
                 <a:ea typeface="Trebuchet MS" pitchFamily="34" charset="-122"/>
                 <a:cs typeface="Trebuchet MS" pitchFamily="34" charset="-120"/>
               </a:rPr>
-              <a:t>re-</a:t>
+              <a:t>mis-</a:t>
             </a:r>
             <a:endParaRPr lang="en-US" sz="1300" dirty="0"/>
           </a:p>
@@ -35415,7 +35964,7 @@
                 <a:ea typeface="Trebuchet MS" pitchFamily="34" charset="-122"/>
                 <a:cs typeface="Trebuchet MS" pitchFamily="34" charset="-120"/>
               </a:rPr>
-              <a:t>sur-</a:t>
+              <a:t>re-</a:t>
             </a:r>
             <a:endParaRPr lang="en-US" sz="1300" dirty="0"/>
           </a:p>
@@ -35609,7 +36158,7 @@
                 <a:ea typeface="Trebuchet MS" pitchFamily="34" charset="-122"/>
                 <a:cs typeface="Trebuchet MS" pitchFamily="34" charset="-120"/>
               </a:rPr>
-              <a:t>count</a:t>
+              <a:t>account</a:t>
             </a:r>
             <a:endParaRPr lang="en-US" sz="1200" dirty="0"/>
           </a:p>
@@ -35807,7 +36356,7 @@
                 <a:ea typeface="Trebuchet MS" pitchFamily="34" charset="-122"/>
                 <a:cs typeface="Trebuchet MS" pitchFamily="34" charset="-120"/>
               </a:rPr>
-              <a:t>account</a:t>
+              <a:t>countless</a:t>
             </a:r>
             <a:endParaRPr lang="en-US" sz="1200" dirty="0"/>
           </a:p>
@@ -35873,7 +36422,7 @@
                 <a:ea typeface="Trebuchet MS" pitchFamily="34" charset="-122"/>
                 <a:cs typeface="Trebuchet MS" pitchFamily="34" charset="-120"/>
               </a:rPr>
-              <a:t>countless</a:t>
+              <a:t>countable</a:t>
             </a:r>
             <a:endParaRPr lang="en-US" sz="1200" dirty="0"/>
           </a:p>
@@ -35939,7 +36488,7 @@
                 <a:ea typeface="Trebuchet MS" pitchFamily="34" charset="-122"/>
                 <a:cs typeface="Trebuchet MS" pitchFamily="34" charset="-120"/>
               </a:rPr>
-              <a:t>countable</a:t>
+              <a:t>encounter</a:t>
             </a:r>
             <a:endParaRPr lang="en-US" sz="1200" dirty="0"/>
           </a:p>
@@ -36071,7 +36620,7 @@
                 <a:ea typeface="Trebuchet MS" pitchFamily="34" charset="-122"/>
                 <a:cs typeface="Trebuchet MS" pitchFamily="34" charset="-120"/>
               </a:rPr>
-              <a:t>counter</a:t>
+              <a:t>accountable</a:t>
             </a:r>
             <a:endParaRPr lang="en-US" sz="1200" dirty="0"/>
           </a:p>
@@ -36363,7 +36912,7 @@
                 <a:ea typeface="Calibri" pitchFamily="34" charset="-122"/>
                 <a:cs typeface="Calibri" pitchFamily="34" charset="-120"/>
               </a:rPr>
-              <a:t>Word Labs  •  wordlabs.app  •  Root: 'count' = to number or reckon</a:t>
+              <a:t>Word Labs  •  wordlabs.app  •  Root: 'count' = to number or calculate</a:t>
             </a:r>
             <a:endParaRPr lang="en-US" sz="800" dirty="0"/>
           </a:p>
@@ -36527,7 +37076,7 @@
                 <a:ea typeface="Calibri" pitchFamily="34" charset="-122"/>
                 <a:cs typeface="Calibri" pitchFamily="34" charset="-120"/>
               </a:rPr>
-              <a:t>The core part of a word carrying its basic meaning. For example, 'count' means 'to number or reckon'.</a:t>
+              <a:t>The core part of a word carrying its basic meaning. For example, 'count' means 'to number or calculate'.</a:t>
             </a:r>
             <a:endParaRPr lang="en-US" sz="1350" dirty="0"/>
           </a:p>
@@ -37147,7 +37696,7 @@
                 <a:ea typeface="Calibri" pitchFamily="34" charset="-122"/>
                 <a:cs typeface="Calibri" pitchFamily="34" charset="-120"/>
               </a:rPr>
-              <a:t>Word Labs  •  wordlabs.app  •  Root: 'count' = to number or reckon</a:t>
+              <a:t>Word Labs  •  wordlabs.app  •  Root: 'count' = to number or calculate</a:t>
             </a:r>
             <a:endParaRPr lang="en-US" sz="800" dirty="0"/>
           </a:p>
@@ -37259,7 +37808,7 @@
                 <a:ea typeface="Calibri" pitchFamily="34" charset="-122"/>
                 <a:cs typeface="Calibri" pitchFamily="34" charset="-120"/>
               </a:rPr>
-              <a:t>1.  The word 'countless' contains the root 'count' meaning to number or reckon.</a:t>
+              <a:t>1.  The word 'countless' contains the root 'count' meaning to number.</a:t>
             </a:r>
             <a:endParaRPr lang="en-US" sz="1300" dirty="0"/>
           </a:p>
@@ -37398,7 +37947,7 @@
                 <a:ea typeface="Calibri" pitchFamily="34" charset="-122"/>
                 <a:cs typeface="Calibri" pitchFamily="34" charset="-120"/>
               </a:rPr>
-              <a:t>2.  The prefix 'dis' in 'discount' means again.</a:t>
+              <a:t>2.  The word 'discount' uses the prefix 'dis-' meaning away or not.</a:t>
             </a:r>
             <a:endParaRPr lang="en-US" sz="1300" dirty="0"/>
           </a:p>
@@ -37421,11 +37970,11 @@
             </a:avLst>
           </a:prstGeom>
           <a:solidFill>
-            <a:srgbClr val="FEE2E2"/>
-          </a:solidFill>
-          <a:ln w="12700">
-            <a:solidFill>
-              <a:srgbClr val="DC2626"/>
+            <a:srgbClr val="DCFCE7"/>
+          </a:solidFill>
+          <a:ln w="12700">
+            <a:solidFill>
+              <a:srgbClr val="16A34A"/>
             </a:solidFill>
             <a:prstDash val="solid"/>
           </a:ln>
@@ -37458,13 +38007,13 @@
             <a:r>
               <a:rPr lang="en-US" sz="1100" b="1" dirty="0">
                 <a:solidFill>
-                  <a:srgbClr val="DC2626"/>
+                  <a:srgbClr val="16A34A"/>
                 </a:solidFill>
                 <a:latin typeface="Trebuchet MS" pitchFamily="34" charset="0"/>
                 <a:ea typeface="Trebuchet MS" pitchFamily="34" charset="-122"/>
                 <a:cs typeface="Trebuchet MS" pitchFamily="34" charset="-120"/>
               </a:rPr>
-              <a:t>FALSE</a:t>
+              <a:t>TRUE</a:t>
             </a:r>
             <a:endParaRPr lang="en-US" sz="1100" dirty="0"/>
           </a:p>
@@ -37537,7 +38086,7 @@
                 <a:ea typeface="Calibri" pitchFamily="34" charset="-122"/>
                 <a:cs typeface="Calibri" pitchFamily="34" charset="-120"/>
               </a:rPr>
-              <a:t>3.  The word 'recount' can mean to tell someone about an event that happened.</a:t>
+              <a:t>3.  The root 'count' comes from the Ancient Greek language.</a:t>
             </a:r>
             <a:endParaRPr lang="en-US" sz="1300" dirty="0"/>
           </a:p>
@@ -37560,11 +38109,11 @@
             </a:avLst>
           </a:prstGeom>
           <a:solidFill>
-            <a:srgbClr val="DCFCE7"/>
-          </a:solidFill>
-          <a:ln w="12700">
-            <a:solidFill>
-              <a:srgbClr val="16A34A"/>
+            <a:srgbClr val="FEE2E2"/>
+          </a:solidFill>
+          <a:ln w="12700">
+            <a:solidFill>
+              <a:srgbClr val="DC2626"/>
             </a:solidFill>
             <a:prstDash val="solid"/>
           </a:ln>
@@ -37597,13 +38146,13 @@
             <a:r>
               <a:rPr lang="en-US" sz="1100" b="1" dirty="0">
                 <a:solidFill>
-                  <a:srgbClr val="16A34A"/>
+                  <a:srgbClr val="DC2626"/>
                 </a:solidFill>
                 <a:latin typeface="Trebuchet MS" pitchFamily="34" charset="0"/>
                 <a:ea typeface="Trebuchet MS" pitchFamily="34" charset="-122"/>
                 <a:cs typeface="Trebuchet MS" pitchFamily="34" charset="-120"/>
               </a:rPr>
-              <a:t>TRUE</a:t>
+              <a:t>FALSE</a:t>
             </a:r>
             <a:endParaRPr lang="en-US" sz="1100" dirty="0"/>
           </a:p>
@@ -37676,7 +38225,7 @@
                 <a:ea typeface="Calibri" pitchFamily="34" charset="-122"/>
                 <a:cs typeface="Calibri" pitchFamily="34" charset="-120"/>
               </a:rPr>
-              <a:t>4.  The root 'count' comes from Latin.</a:t>
+              <a:t>4.  The word 'recount' means to count or tell something again.</a:t>
             </a:r>
             <a:endParaRPr lang="en-US" sz="1300" dirty="0"/>
           </a:p>
@@ -37815,7 +38364,7 @@
                 <a:ea typeface="Calibri" pitchFamily="34" charset="-122"/>
                 <a:cs typeface="Calibri" pitchFamily="34" charset="-120"/>
               </a:rPr>
-              <a:t>5.  The word 'countable' means something that cannot be counted.</a:t>
+              <a:t>5.  The suffix '-less' in 'countless' means full of.</a:t>
             </a:r>
             <a:endParaRPr lang="en-US" sz="1300" dirty="0"/>
           </a:p>
@@ -38173,7 +38722,7 @@
                 <a:ea typeface="Calibri" pitchFamily="34" charset="-122"/>
                 <a:cs typeface="Calibri" pitchFamily="34" charset="-120"/>
               </a:rPr>
-              <a:t>Word Labs  •  wordlabs.app  •  Root: 'count' = to number or reckon</a:t>
+              <a:t>Word Labs  •  wordlabs.app  •  Root: 'count' = to number or calculate</a:t>
             </a:r>
             <a:endParaRPr lang="en-US" sz="800" dirty="0"/>
           </a:p>
@@ -38310,7 +38859,7 @@
                 <a:ea typeface="Trebuchet MS" pitchFamily="34" charset="-122"/>
                 <a:cs typeface="Trebuchet MS" pitchFamily="34" charset="-120"/>
               </a:rPr>
-              <a:t>to number or reckon</a:t>
+              <a:t>to number or calculate</a:t>
             </a:r>
             <a:endParaRPr lang="en-US" sz="2000" dirty="0"/>
           </a:p>
@@ -38454,7 +39003,7 @@
                 <a:ea typeface="Trebuchet MS" pitchFamily="34" charset="-122"/>
                 <a:cs typeface="Trebuchet MS" pitchFamily="34" charset="-120"/>
               </a:rPr>
-              <a:t>count</a:t>
+              <a:t>account</a:t>
             </a:r>
             <a:endParaRPr lang="en-US" sz="1300" dirty="0"/>
           </a:p>
@@ -38652,7 +39201,7 @@
                 <a:ea typeface="Trebuchet MS" pitchFamily="34" charset="-122"/>
                 <a:cs typeface="Trebuchet MS" pitchFamily="34" charset="-120"/>
               </a:rPr>
-              <a:t>account</a:t>
+              <a:t>countless</a:t>
             </a:r>
             <a:endParaRPr lang="en-US" sz="1300" dirty="0"/>
           </a:p>
@@ -38718,7 +39267,7 @@
                 <a:ea typeface="Trebuchet MS" pitchFamily="34" charset="-122"/>
                 <a:cs typeface="Trebuchet MS" pitchFamily="34" charset="-120"/>
               </a:rPr>
-              <a:t>countless</a:t>
+              <a:t>countable</a:t>
             </a:r>
             <a:endParaRPr lang="en-US" sz="1300" dirty="0"/>
           </a:p>
@@ -38784,7 +39333,7 @@
                 <a:ea typeface="Trebuchet MS" pitchFamily="34" charset="-122"/>
                 <a:cs typeface="Trebuchet MS" pitchFamily="34" charset="-120"/>
               </a:rPr>
-              <a:t>countable</a:t>
+              <a:t>encounter</a:t>
             </a:r>
             <a:endParaRPr lang="en-US" sz="1300" dirty="0"/>
           </a:p>
@@ -39142,7 +39691,7 @@
                 <a:ea typeface="Calibri" pitchFamily="34" charset="-122"/>
                 <a:cs typeface="Calibri" pitchFamily="34" charset="-120"/>
               </a:rPr>
-              <a:t>Word Labs  •  wordlabs.app  •  Root: 'count' = to number or reckon</a:t>
+              <a:t>Word Labs  •  wordlabs.app  •  Root: 'count' = to number or calculate</a:t>
             </a:r>
             <a:endParaRPr lang="en-US" sz="800" dirty="0"/>
           </a:p>
@@ -39788,7 +40337,7 @@
                 <a:ea typeface="Trebuchet MS" pitchFamily="34" charset="-122"/>
                 <a:cs typeface="Trebuchet MS" pitchFamily="34" charset="-120"/>
               </a:rPr>
-              <a:t>mis-</a:t>
+              <a:t>en-</a:t>
             </a:r>
             <a:endParaRPr lang="en-US" sz="1300" dirty="0"/>
           </a:p>
@@ -39941,7 +40490,7 @@
                 <a:ea typeface="Trebuchet MS" pitchFamily="34" charset="-122"/>
                 <a:cs typeface="Trebuchet MS" pitchFamily="34" charset="-120"/>
               </a:rPr>
-              <a:t>re-</a:t>
+              <a:t>mis-</a:t>
             </a:r>
             <a:endParaRPr lang="en-US" sz="1300" dirty="0"/>
           </a:p>
@@ -40094,7 +40643,7 @@
                 <a:ea typeface="Trebuchet MS" pitchFamily="34" charset="-122"/>
                 <a:cs typeface="Trebuchet MS" pitchFamily="34" charset="-120"/>
               </a:rPr>
-              <a:t>sur-</a:t>
+              <a:t>re-</a:t>
             </a:r>
             <a:endParaRPr lang="en-US" sz="1300" dirty="0"/>
           </a:p>
@@ -40624,7 +41173,7 @@
                 <a:ea typeface="Trebuchet MS" pitchFamily="34" charset="-122"/>
                 <a:cs typeface="Trebuchet MS" pitchFamily="34" charset="-120"/>
               </a:rPr>
-              <a:t>count</a:t>
+              <a:t>account</a:t>
             </a:r>
             <a:endParaRPr lang="en-US" sz="1400" dirty="0"/>
           </a:p>
@@ -40916,7 +41465,7 @@
                 <a:ea typeface="Calibri" pitchFamily="34" charset="-122"/>
                 <a:cs typeface="Calibri" pitchFamily="34" charset="-120"/>
               </a:rPr>
-              <a:t>Word Labs  •  wordlabs.app  •  Root: 'count' = to number or reckon</a:t>
+              <a:t>Word Labs  •  wordlabs.app  •  Root: 'count' = to number or calculate</a:t>
             </a:r>
             <a:endParaRPr lang="en-US" sz="800" dirty="0"/>
           </a:p>
@@ -41028,7 +41577,7 @@
                 <a:ea typeface="Trebuchet MS" pitchFamily="34" charset="-122"/>
                 <a:cs typeface="Trebuchet MS" pitchFamily="34" charset="-120"/>
               </a:rPr>
-              <a:t>count</a:t>
+              <a:t>account</a:t>
             </a:r>
             <a:endParaRPr lang="en-US" sz="1200" dirty="0"/>
           </a:p>
@@ -41094,7 +41643,7 @@
                 <a:ea typeface="Calibri" pitchFamily="34" charset="-122"/>
                 <a:cs typeface="Calibri" pitchFamily="34" charset="-120"/>
               </a:rPr>
-              <a:t>Made a mistake when counting something.</a:t>
+              <a:t>Made a mistake when counting numbers.</a:t>
             </a:r>
             <a:endParaRPr lang="en-US" sz="1200" dirty="0"/>
           </a:p>
@@ -41233,7 +41782,7 @@
                 <a:ea typeface="Calibri" pitchFamily="34" charset="-122"/>
                 <a:cs typeface="Calibri" pitchFamily="34" charset="-120"/>
               </a:rPr>
-              <a:t>A record of money you have saved or spent, or a description of what happened.</a:t>
+              <a:t>Too many to count; a very large number of things.</a:t>
             </a:r>
             <a:endParaRPr lang="en-US" sz="1200" dirty="0"/>
           </a:p>
@@ -41372,7 +41921,7 @@
                 <a:ea typeface="Calibri" pitchFamily="34" charset="-122"/>
                 <a:cs typeface="Calibri" pitchFamily="34" charset="-120"/>
               </a:rPr>
-              <a:t>Something that can be counted because there is a definite number of it.</a:t>
+              <a:t>To meet or come across something or someone, often unexpectedly.</a:t>
             </a:r>
             <a:endParaRPr lang="en-US" sz="1200" dirty="0"/>
           </a:p>
@@ -41445,7 +41994,7 @@
                 <a:ea typeface="Trebuchet MS" pitchFamily="34" charset="-122"/>
                 <a:cs typeface="Trebuchet MS" pitchFamily="34" charset="-120"/>
               </a:rPr>
-              <a:t>account</a:t>
+              <a:t>countless</a:t>
             </a:r>
             <a:endParaRPr lang="en-US" sz="1200" dirty="0"/>
           </a:p>
@@ -41511,7 +42060,7 @@
                 <a:ea typeface="Calibri" pitchFamily="34" charset="-122"/>
                 <a:cs typeface="Calibri" pitchFamily="34" charset="-120"/>
               </a:rPr>
-              <a:t>So many that you cannot count them all.</a:t>
+              <a:t>Something that can be counted or numbered.</a:t>
             </a:r>
             <a:endParaRPr lang="en-US" sz="1200" dirty="0"/>
           </a:p>
@@ -41584,7 +42133,7 @@
                 <a:ea typeface="Trebuchet MS" pitchFamily="34" charset="-122"/>
                 <a:cs typeface="Trebuchet MS" pitchFamily="34" charset="-120"/>
               </a:rPr>
-              <a:t>countless</a:t>
+              <a:t>countable</a:t>
             </a:r>
             <a:endParaRPr lang="en-US" sz="1200" dirty="0"/>
           </a:p>
@@ -41650,7 +42199,7 @@
                 <a:ea typeface="Calibri" pitchFamily="34" charset="-122"/>
                 <a:cs typeface="Calibri" pitchFamily="34" charset="-120"/>
               </a:rPr>
-              <a:t>To say numbers in order, or to find out how many things there are.</a:t>
+              <a:t>A record of money coming in and going out, or a personal profile on a website.</a:t>
             </a:r>
             <a:endParaRPr lang="en-US" sz="1200" dirty="0"/>
           </a:p>
@@ -41723,7 +42272,7 @@
                 <a:ea typeface="Trebuchet MS" pitchFamily="34" charset="-122"/>
                 <a:cs typeface="Trebuchet MS" pitchFamily="34" charset="-120"/>
               </a:rPr>
-              <a:t>countable</a:t>
+              <a:t>encounter</a:t>
             </a:r>
             <a:endParaRPr lang="en-US" sz="1200" dirty="0"/>
           </a:p>
@@ -41789,7 +42338,7 @@
                 <a:ea typeface="Calibri" pitchFamily="34" charset="-122"/>
                 <a:cs typeface="Calibri" pitchFamily="34" charset="-120"/>
               </a:rPr>
-              <a:t>A reduction in price — like paying less than the usual cost.</a:t>
+              <a:t>A reduction in the price of something, making it cheaper to buy.</a:t>
             </a:r>
             <a:endParaRPr lang="en-US" sz="1200" dirty="0"/>
           </a:p>
@@ -41928,7 +42477,7 @@
                 <a:ea typeface="Calibri" pitchFamily="34" charset="-122"/>
                 <a:cs typeface="Calibri" pitchFamily="34" charset="-120"/>
               </a:rPr>
-              <a:t>To count something again, or to tell a story about something that happened.</a:t>
+              <a:t>To count something again, or to tell the story of what happened.</a:t>
             </a:r>
             <a:endParaRPr lang="en-US" sz="1200" dirty="0"/>
           </a:p>
@@ -42220,7 +42769,7 @@
                 <a:ea typeface="Calibri" pitchFamily="34" charset="-122"/>
                 <a:cs typeface="Calibri" pitchFamily="34" charset="-120"/>
               </a:rPr>
-              <a:t>Word Labs  •  wordlabs.app  •  Root: 'count' = to number or reckon</a:t>
+              <a:t>Word Labs  •  wordlabs.app  •  Root: 'count' = to number or calculate</a:t>
             </a:r>
             <a:endParaRPr lang="en-US" sz="800" dirty="0"/>
           </a:p>
@@ -42423,7 +42972,7 @@
                 <a:ea typeface="Calibri" pitchFamily="34" charset="-122"/>
                 <a:cs typeface="Calibri" pitchFamily="34" charset="-120"/>
               </a:rPr>
-              <a:t>The teacher asked the students to recount how many seeds had sprouted in their science experiment.</a:t>
+              <a:t>The shopkeeper gave us a discount because some of the apples were bruised.</a:t>
             </a:r>
             <a:endParaRPr lang="en-US" sz="1500" dirty="0"/>
           </a:p>
@@ -42587,7 +43136,7 @@
                 <a:ea typeface="Calibri" pitchFamily="34" charset="-122"/>
                 <a:cs typeface="Calibri" pitchFamily="34" charset="-120"/>
               </a:rPr>
-              <a:t>There were countless stars visible in the sky on the clear winter night.</a:t>
+              <a:t>There were countless stars in the sky on that clear winter night.</a:t>
             </a:r>
             <a:endParaRPr lang="en-US" sz="1500" dirty="0"/>
           </a:p>
@@ -42751,7 +43300,7 @@
                 <a:ea typeface="Calibri" pitchFamily="34" charset="-122"/>
                 <a:cs typeface="Calibri" pitchFamily="34" charset="-120"/>
               </a:rPr>
-              <a:t>The shop offered a discount on all books during the school holidays.</a:t>
+              <a:t>She had to recount all the money after she dropped it on the floor.</a:t>
             </a:r>
             <a:endParaRPr lang="en-US" sz="1500" dirty="0"/>
           </a:p>
